--- a/figures/FIGURES.pptx
+++ b/figures/FIGURES.pptx
@@ -7,6 +7,7 @@
   <p:sldIdLst>
     <p:sldId id="256" r:id="rId2"/>
     <p:sldId id="257" r:id="rId3"/>
+    <p:sldId id="258" r:id="rId4"/>
   </p:sldIdLst>
   <p:sldSz cx="12192000" cy="6858000"/>
   <p:notesSz cx="6858000" cy="9144000"/>
@@ -105,6 +106,11 @@
       </a:defRPr>
     </a:lvl9pPr>
   </p:defaultTextStyle>
+  <p:extLst>
+    <p:ext uri="{EFAFB233-063F-42B5-8137-9DF3F51BA10A}">
+      <p15:sldGuideLst xmlns:p15="http://schemas.microsoft.com/office/powerpoint/2012/main"/>
+    </p:ext>
+  </p:extLst>
 </p:presentation>
 </file>
 
@@ -255,7 +261,7 @@
           <a:p>
             <a:fld id="{DC3062A3-D9B4-9C49-8A0A-A1736D741080}" type="datetimeFigureOut">
               <a:rPr lang="en-US" smtClean="0"/>
-              <a:t>10/6/25</a:t>
+              <a:t>10/27/25</a:t>
             </a:fld>
             <a:endParaRPr lang="en-US"/>
           </a:p>
@@ -453,7 +459,7 @@
           <a:p>
             <a:fld id="{DC3062A3-D9B4-9C49-8A0A-A1736D741080}" type="datetimeFigureOut">
               <a:rPr lang="en-US" smtClean="0"/>
-              <a:t>10/6/25</a:t>
+              <a:t>10/27/25</a:t>
             </a:fld>
             <a:endParaRPr lang="en-US"/>
           </a:p>
@@ -661,7 +667,7 @@
           <a:p>
             <a:fld id="{DC3062A3-D9B4-9C49-8A0A-A1736D741080}" type="datetimeFigureOut">
               <a:rPr lang="en-US" smtClean="0"/>
-              <a:t>10/6/25</a:t>
+              <a:t>10/27/25</a:t>
             </a:fld>
             <a:endParaRPr lang="en-US"/>
           </a:p>
@@ -859,7 +865,7 @@
           <a:p>
             <a:fld id="{DC3062A3-D9B4-9C49-8A0A-A1736D741080}" type="datetimeFigureOut">
               <a:rPr lang="en-US" smtClean="0"/>
-              <a:t>10/6/25</a:t>
+              <a:t>10/27/25</a:t>
             </a:fld>
             <a:endParaRPr lang="en-US"/>
           </a:p>
@@ -1134,7 +1140,7 @@
           <a:p>
             <a:fld id="{DC3062A3-D9B4-9C49-8A0A-A1736D741080}" type="datetimeFigureOut">
               <a:rPr lang="en-US" smtClean="0"/>
-              <a:t>10/6/25</a:t>
+              <a:t>10/27/25</a:t>
             </a:fld>
             <a:endParaRPr lang="en-US"/>
           </a:p>
@@ -1399,7 +1405,7 @@
           <a:p>
             <a:fld id="{DC3062A3-D9B4-9C49-8A0A-A1736D741080}" type="datetimeFigureOut">
               <a:rPr lang="en-US" smtClean="0"/>
-              <a:t>10/6/25</a:t>
+              <a:t>10/27/25</a:t>
             </a:fld>
             <a:endParaRPr lang="en-US"/>
           </a:p>
@@ -1811,7 +1817,7 @@
           <a:p>
             <a:fld id="{DC3062A3-D9B4-9C49-8A0A-A1736D741080}" type="datetimeFigureOut">
               <a:rPr lang="en-US" smtClean="0"/>
-              <a:t>10/6/25</a:t>
+              <a:t>10/27/25</a:t>
             </a:fld>
             <a:endParaRPr lang="en-US"/>
           </a:p>
@@ -1952,7 +1958,7 @@
           <a:p>
             <a:fld id="{DC3062A3-D9B4-9C49-8A0A-A1736D741080}" type="datetimeFigureOut">
               <a:rPr lang="en-US" smtClean="0"/>
-              <a:t>10/6/25</a:t>
+              <a:t>10/27/25</a:t>
             </a:fld>
             <a:endParaRPr lang="en-US"/>
           </a:p>
@@ -2065,7 +2071,7 @@
           <a:p>
             <a:fld id="{DC3062A3-D9B4-9C49-8A0A-A1736D741080}" type="datetimeFigureOut">
               <a:rPr lang="en-US" smtClean="0"/>
-              <a:t>10/6/25</a:t>
+              <a:t>10/27/25</a:t>
             </a:fld>
             <a:endParaRPr lang="en-US"/>
           </a:p>
@@ -2376,7 +2382,7 @@
           <a:p>
             <a:fld id="{DC3062A3-D9B4-9C49-8A0A-A1736D741080}" type="datetimeFigureOut">
               <a:rPr lang="en-US" smtClean="0"/>
-              <a:t>10/6/25</a:t>
+              <a:t>10/27/25</a:t>
             </a:fld>
             <a:endParaRPr lang="en-US"/>
           </a:p>
@@ -2664,7 +2670,7 @@
           <a:p>
             <a:fld id="{DC3062A3-D9B4-9C49-8A0A-A1736D741080}" type="datetimeFigureOut">
               <a:rPr lang="en-US" smtClean="0"/>
-              <a:t>10/6/25</a:t>
+              <a:t>10/27/25</a:t>
             </a:fld>
             <a:endParaRPr lang="en-US"/>
           </a:p>
@@ -2905,7 +2911,7 @@
           <a:p>
             <a:fld id="{DC3062A3-D9B4-9C49-8A0A-A1736D741080}" type="datetimeFigureOut">
               <a:rPr lang="en-US" smtClean="0"/>
-              <a:t>10/6/25</a:t>
+              <a:t>10/27/25</a:t>
             </a:fld>
             <a:endParaRPr lang="en-US"/>
           </a:p>
@@ -3382,36 +3388,6 @@
           <a:chExt cx="0" cy="0"/>
         </a:xfrm>
       </p:grpSpPr>
-      <p:pic>
-        <p:nvPicPr>
-          <p:cNvPr id="5" name="Picture 4" descr="A graph with red and white lines&#10;&#10;AI-generated content may be incorrect.">
-            <a:extLst>
-              <a:ext uri="{FF2B5EF4-FFF2-40B4-BE49-F238E27FC236}">
-                <a16:creationId xmlns:a16="http://schemas.microsoft.com/office/drawing/2014/main" id="{42340338-0ED2-58AE-0974-F6D627B8BF70}"/>
-              </a:ext>
-            </a:extLst>
-          </p:cNvPr>
-          <p:cNvPicPr>
-            <a:picLocks noChangeAspect="1"/>
-          </p:cNvPicPr>
-          <p:nvPr/>
-        </p:nvPicPr>
-        <p:blipFill>
-          <a:blip r:embed="rId2"/>
-          <a:stretch>
-            <a:fillRect/>
-          </a:stretch>
-        </p:blipFill>
-        <p:spPr>
-          <a:xfrm>
-            <a:off x="984251" y="342900"/>
-            <a:ext cx="3029185" cy="1828800"/>
-          </a:xfrm>
-          <a:prstGeom prst="rect">
-            <a:avLst/>
-          </a:prstGeom>
-        </p:spPr>
-      </p:pic>
       <p:sp>
         <p:nvSpPr>
           <p:cNvPr id="6" name="TextBox 5">
@@ -3451,10 +3427,607 @@
           </a:p>
         </p:txBody>
       </p:sp>
+      <p:grpSp>
+        <p:nvGrpSpPr>
+          <p:cNvPr id="18" name="Group 17">
+            <a:extLst>
+              <a:ext uri="{FF2B5EF4-FFF2-40B4-BE49-F238E27FC236}">
+                <a16:creationId xmlns:a16="http://schemas.microsoft.com/office/drawing/2014/main" id="{4FC85A7B-B31E-F1EA-304C-C447315BD467}"/>
+              </a:ext>
+            </a:extLst>
+          </p:cNvPr>
+          <p:cNvGrpSpPr/>
+          <p:nvPr/>
+        </p:nvGrpSpPr>
+        <p:grpSpPr>
+          <a:xfrm>
+            <a:off x="968988" y="499989"/>
+            <a:ext cx="6058370" cy="4461543"/>
+            <a:chOff x="968988" y="499989"/>
+            <a:chExt cx="6058370" cy="4461543"/>
+          </a:xfrm>
+        </p:grpSpPr>
+        <p:grpSp>
+          <p:nvGrpSpPr>
+            <p:cNvPr id="16" name="Group 15">
+              <a:extLst>
+                <a:ext uri="{FF2B5EF4-FFF2-40B4-BE49-F238E27FC236}">
+                  <a16:creationId xmlns:a16="http://schemas.microsoft.com/office/drawing/2014/main" id="{EB35E4DF-D7D7-D219-9080-C721BE4FA0BF}"/>
+                </a:ext>
+              </a:extLst>
+            </p:cNvPr>
+            <p:cNvGrpSpPr/>
+            <p:nvPr/>
+          </p:nvGrpSpPr>
+          <p:grpSpPr>
+            <a:xfrm>
+              <a:off x="968988" y="715433"/>
+              <a:ext cx="6058370" cy="4246099"/>
+              <a:chOff x="968988" y="266700"/>
+              <a:chExt cx="6058370" cy="4246099"/>
+            </a:xfrm>
+          </p:grpSpPr>
+          <p:sp>
+            <p:nvSpPr>
+              <p:cNvPr id="2" name="TextBox 1">
+                <a:extLst>
+                  <a:ext uri="{FF2B5EF4-FFF2-40B4-BE49-F238E27FC236}">
+                    <a16:creationId xmlns:a16="http://schemas.microsoft.com/office/drawing/2014/main" id="{00E52D28-0530-01BA-832C-79C7F59C204F}"/>
+                  </a:ext>
+                </a:extLst>
+              </p:cNvPr>
+              <p:cNvSpPr txBox="1"/>
+              <p:nvPr/>
+            </p:nvSpPr>
+            <p:spPr>
+              <a:xfrm>
+                <a:off x="2300849" y="2171700"/>
+                <a:ext cx="389850" cy="215444"/>
+              </a:xfrm>
+              <a:prstGeom prst="rect">
+                <a:avLst/>
+              </a:prstGeom>
+              <a:noFill/>
+            </p:spPr>
+            <p:txBody>
+              <a:bodyPr wrap="none" rtlCol="0">
+                <a:spAutoFit/>
+              </a:bodyPr>
+              <a:lstStyle/>
+              <a:p>
+                <a:r>
+                  <a:rPr lang="en-US" sz="800" b="1" dirty="0"/>
+                  <a:t>MSE</a:t>
+                </a:r>
+              </a:p>
+            </p:txBody>
+          </p:sp>
+          <p:pic>
+            <p:nvPicPr>
+              <p:cNvPr id="4" name="Picture 3" descr="A graph with red and white lines&#10;&#10;AI-generated content may be incorrect.">
+                <a:extLst>
+                  <a:ext uri="{FF2B5EF4-FFF2-40B4-BE49-F238E27FC236}">
+                    <a16:creationId xmlns:a16="http://schemas.microsoft.com/office/drawing/2014/main" id="{FB5C3193-2E18-4C28-70AE-821C55374275}"/>
+                  </a:ext>
+                </a:extLst>
+              </p:cNvPr>
+              <p:cNvPicPr>
+                <a:picLocks noChangeAspect="1"/>
+              </p:cNvPicPr>
+              <p:nvPr/>
+            </p:nvPicPr>
+            <p:blipFill>
+              <a:blip r:embed="rId2"/>
+              <a:stretch>
+                <a:fillRect/>
+              </a:stretch>
+            </p:blipFill>
+            <p:spPr>
+              <a:xfrm>
+                <a:off x="981181" y="266700"/>
+                <a:ext cx="3029185" cy="1828800"/>
+              </a:xfrm>
+              <a:prstGeom prst="rect">
+                <a:avLst/>
+              </a:prstGeom>
+            </p:spPr>
+          </p:pic>
+          <p:pic>
+            <p:nvPicPr>
+              <p:cNvPr id="8" name="Picture 7" descr="A graph with red and white stripes&#10;&#10;AI-generated content may be incorrect.">
+                <a:extLst>
+                  <a:ext uri="{FF2B5EF4-FFF2-40B4-BE49-F238E27FC236}">
+                    <a16:creationId xmlns:a16="http://schemas.microsoft.com/office/drawing/2014/main" id="{C945C8BC-4DB2-5713-4D38-26D0D8DA79F2}"/>
+                  </a:ext>
+                </a:extLst>
+              </p:cNvPr>
+              <p:cNvPicPr>
+                <a:picLocks noChangeAspect="1"/>
+              </p:cNvPicPr>
+              <p:nvPr/>
+            </p:nvPicPr>
+            <p:blipFill>
+              <a:blip r:embed="rId3"/>
+              <a:stretch>
+                <a:fillRect/>
+              </a:stretch>
+            </p:blipFill>
+            <p:spPr>
+              <a:xfrm>
+                <a:off x="3998173" y="266700"/>
+                <a:ext cx="3029185" cy="1828800"/>
+              </a:xfrm>
+              <a:prstGeom prst="rect">
+                <a:avLst/>
+              </a:prstGeom>
+            </p:spPr>
+          </p:pic>
+          <p:pic>
+            <p:nvPicPr>
+              <p:cNvPr id="10" name="Picture 9" descr="A red and white graph&#10;&#10;AI-generated content may be incorrect.">
+                <a:extLst>
+                  <a:ext uri="{FF2B5EF4-FFF2-40B4-BE49-F238E27FC236}">
+                    <a16:creationId xmlns:a16="http://schemas.microsoft.com/office/drawing/2014/main" id="{78D23DDD-1EA5-FF25-B217-5910774A5437}"/>
+                  </a:ext>
+                </a:extLst>
+              </p:cNvPr>
+              <p:cNvPicPr>
+                <a:picLocks noChangeAspect="1"/>
+              </p:cNvPicPr>
+              <p:nvPr/>
+            </p:nvPicPr>
+            <p:blipFill>
+              <a:blip r:embed="rId4"/>
+              <a:stretch>
+                <a:fillRect/>
+              </a:stretch>
+            </p:blipFill>
+            <p:spPr>
+              <a:xfrm>
+                <a:off x="968988" y="2427133"/>
+                <a:ext cx="3029185" cy="1828800"/>
+              </a:xfrm>
+              <a:prstGeom prst="rect">
+                <a:avLst/>
+              </a:prstGeom>
+            </p:spPr>
+          </p:pic>
+          <p:pic>
+            <p:nvPicPr>
+              <p:cNvPr id="12" name="Picture 11" descr="A graph with red and white stripes&#10;&#10;AI-generated content may be incorrect.">
+                <a:extLst>
+                  <a:ext uri="{FF2B5EF4-FFF2-40B4-BE49-F238E27FC236}">
+                    <a16:creationId xmlns:a16="http://schemas.microsoft.com/office/drawing/2014/main" id="{807820F2-50AD-BF2B-4809-3C2E10ADDEB1}"/>
+                  </a:ext>
+                </a:extLst>
+              </p:cNvPr>
+              <p:cNvPicPr>
+                <a:picLocks noChangeAspect="1"/>
+              </p:cNvPicPr>
+              <p:nvPr/>
+            </p:nvPicPr>
+            <p:blipFill>
+              <a:blip r:embed="rId5"/>
+              <a:stretch>
+                <a:fillRect/>
+              </a:stretch>
+            </p:blipFill>
+            <p:spPr>
+              <a:xfrm>
+                <a:off x="3998173" y="2427133"/>
+                <a:ext cx="3029185" cy="1828800"/>
+              </a:xfrm>
+              <a:prstGeom prst="rect">
+                <a:avLst/>
+              </a:prstGeom>
+            </p:spPr>
+          </p:pic>
+          <p:sp>
+            <p:nvSpPr>
+              <p:cNvPr id="13" name="TextBox 12">
+                <a:extLst>
+                  <a:ext uri="{FF2B5EF4-FFF2-40B4-BE49-F238E27FC236}">
+                    <a16:creationId xmlns:a16="http://schemas.microsoft.com/office/drawing/2014/main" id="{1DB4CE92-0B11-558C-0F9C-8784AB09E6C3}"/>
+                  </a:ext>
+                </a:extLst>
+              </p:cNvPr>
+              <p:cNvSpPr txBox="1"/>
+              <p:nvPr/>
+            </p:nvSpPr>
+            <p:spPr>
+              <a:xfrm>
+                <a:off x="2255162" y="4297355"/>
+                <a:ext cx="481222" cy="215444"/>
+              </a:xfrm>
+              <a:prstGeom prst="rect">
+                <a:avLst/>
+              </a:prstGeom>
+              <a:noFill/>
+            </p:spPr>
+            <p:txBody>
+              <a:bodyPr wrap="none" rtlCol="0">
+                <a:spAutoFit/>
+              </a:bodyPr>
+              <a:lstStyle/>
+              <a:p>
+                <a:r>
+                  <a:rPr lang="en-US" sz="800" b="1" dirty="0" err="1"/>
+                  <a:t>mMSE</a:t>
+                </a:r>
+                <a:endParaRPr lang="en-US" sz="800" b="1" dirty="0"/>
+              </a:p>
+            </p:txBody>
+          </p:sp>
+          <p:sp>
+            <p:nvSpPr>
+              <p:cNvPr id="14" name="TextBox 13">
+                <a:extLst>
+                  <a:ext uri="{FF2B5EF4-FFF2-40B4-BE49-F238E27FC236}">
+                    <a16:creationId xmlns:a16="http://schemas.microsoft.com/office/drawing/2014/main" id="{8977ADB1-C568-DDD8-AC56-989CBE6B57A6}"/>
+                  </a:ext>
+                </a:extLst>
+              </p:cNvPr>
+              <p:cNvSpPr txBox="1"/>
+              <p:nvPr/>
+            </p:nvSpPr>
+            <p:spPr>
+              <a:xfrm>
+                <a:off x="5317840" y="2122789"/>
+                <a:ext cx="389850" cy="215444"/>
+              </a:xfrm>
+              <a:prstGeom prst="rect">
+                <a:avLst/>
+              </a:prstGeom>
+              <a:noFill/>
+            </p:spPr>
+            <p:txBody>
+              <a:bodyPr wrap="none" rtlCol="0">
+                <a:spAutoFit/>
+              </a:bodyPr>
+              <a:lstStyle/>
+              <a:p>
+                <a:r>
+                  <a:rPr lang="en-US" sz="800" b="1" dirty="0"/>
+                  <a:t>MFE</a:t>
+                </a:r>
+              </a:p>
+            </p:txBody>
+          </p:sp>
+          <p:sp>
+            <p:nvSpPr>
+              <p:cNvPr id="15" name="TextBox 14">
+                <a:extLst>
+                  <a:ext uri="{FF2B5EF4-FFF2-40B4-BE49-F238E27FC236}">
+                    <a16:creationId xmlns:a16="http://schemas.microsoft.com/office/drawing/2014/main" id="{AB059AA8-CC3B-0D88-3803-05CEA81FB0BB}"/>
+                  </a:ext>
+                </a:extLst>
+              </p:cNvPr>
+              <p:cNvSpPr txBox="1"/>
+              <p:nvPr/>
+            </p:nvSpPr>
+            <p:spPr>
+              <a:xfrm>
+                <a:off x="5317840" y="4297355"/>
+                <a:ext cx="521297" cy="215444"/>
+              </a:xfrm>
+              <a:prstGeom prst="rect">
+                <a:avLst/>
+              </a:prstGeom>
+              <a:noFill/>
+            </p:spPr>
+            <p:txBody>
+              <a:bodyPr wrap="none" rtlCol="0">
+                <a:spAutoFit/>
+              </a:bodyPr>
+              <a:lstStyle/>
+              <a:p>
+                <a:r>
+                  <a:rPr lang="en-US" sz="800" b="1" dirty="0"/>
+                  <a:t>RCMFE</a:t>
+                </a:r>
+              </a:p>
+            </p:txBody>
+          </p:sp>
+        </p:grpSp>
+        <p:sp>
+          <p:nvSpPr>
+            <p:cNvPr id="17" name="TextBox 16">
+              <a:extLst>
+                <a:ext uri="{FF2B5EF4-FFF2-40B4-BE49-F238E27FC236}">
+                  <a16:creationId xmlns:a16="http://schemas.microsoft.com/office/drawing/2014/main" id="{572B3714-305B-A373-BC26-A038ACDDDCF7}"/>
+                </a:ext>
+              </a:extLst>
+            </p:cNvPr>
+            <p:cNvSpPr txBox="1"/>
+            <p:nvPr/>
+          </p:nvSpPr>
+          <p:spPr>
+            <a:xfrm>
+              <a:off x="3038615" y="499989"/>
+              <a:ext cx="1919115" cy="215444"/>
+            </a:xfrm>
+            <a:prstGeom prst="rect">
+              <a:avLst/>
+            </a:prstGeom>
+            <a:noFill/>
+          </p:spPr>
+          <p:txBody>
+            <a:bodyPr wrap="none" rtlCol="0">
+              <a:spAutoFit/>
+            </a:bodyPr>
+            <a:lstStyle/>
+            <a:p>
+              <a:r>
+                <a:rPr lang="en-US" sz="800" b="1" dirty="0" err="1"/>
+                <a:t>Coarsing</a:t>
+              </a:r>
+              <a:r>
+                <a:rPr lang="en-US" sz="800" b="1" dirty="0"/>
+                <a:t> method: standard deviation</a:t>
+              </a:r>
+            </a:p>
+          </p:txBody>
+        </p:sp>
+      </p:grpSp>
     </p:spTree>
     <p:extLst>
       <p:ext uri="{BB962C8B-B14F-4D97-AF65-F5344CB8AC3E}">
         <p14:creationId xmlns:p14="http://schemas.microsoft.com/office/powerpoint/2010/main" val="2948164643"/>
+      </p:ext>
+    </p:extLst>
+  </p:cSld>
+  <p:clrMapOvr>
+    <a:masterClrMapping/>
+  </p:clrMapOvr>
+</p:sld>
+</file>
+
+<file path=ppt/slides/slide3.xml><?xml version="1.0" encoding="utf-8"?>
+<p:sld xmlns:a="http://schemas.openxmlformats.org/drawingml/2006/main" xmlns:r="http://schemas.openxmlformats.org/officeDocument/2006/relationships" xmlns:p="http://schemas.openxmlformats.org/presentationml/2006/main">
+  <p:cSld>
+    <p:spTree>
+      <p:nvGrpSpPr>
+        <p:cNvPr id="1" name="">
+          <a:extLst>
+            <a:ext uri="{FF2B5EF4-FFF2-40B4-BE49-F238E27FC236}">
+              <a16:creationId xmlns:a16="http://schemas.microsoft.com/office/drawing/2014/main" id="{63D9837D-C764-6911-BDF2-7695F1437604}"/>
+            </a:ext>
+          </a:extLst>
+        </p:cNvPr>
+        <p:cNvGrpSpPr/>
+        <p:nvPr/>
+      </p:nvGrpSpPr>
+      <p:grpSpPr>
+        <a:xfrm>
+          <a:off x="0" y="0"/>
+          <a:ext cx="0" cy="0"/>
+          <a:chOff x="0" y="0"/>
+          <a:chExt cx="0" cy="0"/>
+        </a:xfrm>
+      </p:grpSpPr>
+      <p:sp>
+        <p:nvSpPr>
+          <p:cNvPr id="6" name="TextBox 5">
+            <a:extLst>
+              <a:ext uri="{FF2B5EF4-FFF2-40B4-BE49-F238E27FC236}">
+                <a16:creationId xmlns:a16="http://schemas.microsoft.com/office/drawing/2014/main" id="{0B9895D9-B875-7FB7-C530-8FEFE5C78AA2}"/>
+              </a:ext>
+            </a:extLst>
+          </p:cNvPr>
+          <p:cNvSpPr txBox="1"/>
+          <p:nvPr/>
+        </p:nvSpPr>
+        <p:spPr>
+          <a:xfrm>
+            <a:off x="2495774" y="6357769"/>
+            <a:ext cx="1502399" cy="369332"/>
+          </a:xfrm>
+          <a:prstGeom prst="rect">
+            <a:avLst/>
+          </a:prstGeom>
+          <a:noFill/>
+        </p:spPr>
+        <p:txBody>
+          <a:bodyPr wrap="none" rtlCol="0">
+            <a:spAutoFit/>
+          </a:bodyPr>
+          <a:lstStyle/>
+          <a:p>
+            <a:r>
+              <a:rPr lang="en-US" dirty="0" err="1"/>
+              <a:t>Coarsing</a:t>
+            </a:r>
+            <a:r>
+              <a:rPr lang="en-US" dirty="0"/>
+              <a:t>: std</a:t>
+            </a:r>
+          </a:p>
+        </p:txBody>
+      </p:sp>
+      <p:sp>
+        <p:nvSpPr>
+          <p:cNvPr id="2" name="TextBox 1">
+            <a:extLst>
+              <a:ext uri="{FF2B5EF4-FFF2-40B4-BE49-F238E27FC236}">
+                <a16:creationId xmlns:a16="http://schemas.microsoft.com/office/drawing/2014/main" id="{E8BCE681-3B8A-C979-27EE-BB3BB33E211B}"/>
+              </a:ext>
+            </a:extLst>
+          </p:cNvPr>
+          <p:cNvSpPr txBox="1"/>
+          <p:nvPr/>
+        </p:nvSpPr>
+        <p:spPr>
+          <a:xfrm>
+            <a:off x="2300849" y="2620433"/>
+            <a:ext cx="389850" cy="215444"/>
+          </a:xfrm>
+          <a:prstGeom prst="rect">
+            <a:avLst/>
+          </a:prstGeom>
+          <a:noFill/>
+        </p:spPr>
+        <p:txBody>
+          <a:bodyPr wrap="none" rtlCol="0">
+            <a:spAutoFit/>
+          </a:bodyPr>
+          <a:lstStyle/>
+          <a:p>
+            <a:r>
+              <a:rPr lang="en-US" sz="800" b="1" dirty="0"/>
+              <a:t>MSE</a:t>
+            </a:r>
+          </a:p>
+        </p:txBody>
+      </p:sp>
+      <p:sp>
+        <p:nvSpPr>
+          <p:cNvPr id="13" name="TextBox 12">
+            <a:extLst>
+              <a:ext uri="{FF2B5EF4-FFF2-40B4-BE49-F238E27FC236}">
+                <a16:creationId xmlns:a16="http://schemas.microsoft.com/office/drawing/2014/main" id="{35FA97BD-451D-2C76-0A16-43A1EEC34AA5}"/>
+              </a:ext>
+            </a:extLst>
+          </p:cNvPr>
+          <p:cNvSpPr txBox="1"/>
+          <p:nvPr/>
+        </p:nvSpPr>
+        <p:spPr>
+          <a:xfrm>
+            <a:off x="2255162" y="4746088"/>
+            <a:ext cx="481222" cy="215444"/>
+          </a:xfrm>
+          <a:prstGeom prst="rect">
+            <a:avLst/>
+          </a:prstGeom>
+          <a:noFill/>
+        </p:spPr>
+        <p:txBody>
+          <a:bodyPr wrap="none" rtlCol="0">
+            <a:spAutoFit/>
+          </a:bodyPr>
+          <a:lstStyle/>
+          <a:p>
+            <a:r>
+              <a:rPr lang="en-US" sz="800" b="1" dirty="0" err="1"/>
+              <a:t>mMSE</a:t>
+            </a:r>
+            <a:endParaRPr lang="en-US" sz="800" b="1" dirty="0"/>
+          </a:p>
+        </p:txBody>
+      </p:sp>
+      <p:sp>
+        <p:nvSpPr>
+          <p:cNvPr id="14" name="TextBox 13">
+            <a:extLst>
+              <a:ext uri="{FF2B5EF4-FFF2-40B4-BE49-F238E27FC236}">
+                <a16:creationId xmlns:a16="http://schemas.microsoft.com/office/drawing/2014/main" id="{EDBFEEBE-C074-86B0-0828-0CECB225C64B}"/>
+              </a:ext>
+            </a:extLst>
+          </p:cNvPr>
+          <p:cNvSpPr txBox="1"/>
+          <p:nvPr/>
+        </p:nvSpPr>
+        <p:spPr>
+          <a:xfrm>
+            <a:off x="5317840" y="2571522"/>
+            <a:ext cx="389850" cy="215444"/>
+          </a:xfrm>
+          <a:prstGeom prst="rect">
+            <a:avLst/>
+          </a:prstGeom>
+          <a:noFill/>
+        </p:spPr>
+        <p:txBody>
+          <a:bodyPr wrap="none" rtlCol="0">
+            <a:spAutoFit/>
+          </a:bodyPr>
+          <a:lstStyle/>
+          <a:p>
+            <a:r>
+              <a:rPr lang="en-US" sz="800" b="1" dirty="0"/>
+              <a:t>MFE</a:t>
+            </a:r>
+          </a:p>
+        </p:txBody>
+      </p:sp>
+      <p:sp>
+        <p:nvSpPr>
+          <p:cNvPr id="15" name="TextBox 14">
+            <a:extLst>
+              <a:ext uri="{FF2B5EF4-FFF2-40B4-BE49-F238E27FC236}">
+                <a16:creationId xmlns:a16="http://schemas.microsoft.com/office/drawing/2014/main" id="{24E8965C-A296-A1C6-D2A3-912C6DF6F1CF}"/>
+              </a:ext>
+            </a:extLst>
+          </p:cNvPr>
+          <p:cNvSpPr txBox="1"/>
+          <p:nvPr/>
+        </p:nvSpPr>
+        <p:spPr>
+          <a:xfrm>
+            <a:off x="5317840" y="4746088"/>
+            <a:ext cx="521297" cy="215444"/>
+          </a:xfrm>
+          <a:prstGeom prst="rect">
+            <a:avLst/>
+          </a:prstGeom>
+          <a:noFill/>
+        </p:spPr>
+        <p:txBody>
+          <a:bodyPr wrap="none" rtlCol="0">
+            <a:spAutoFit/>
+          </a:bodyPr>
+          <a:lstStyle/>
+          <a:p>
+            <a:r>
+              <a:rPr lang="en-US" sz="800" b="1" dirty="0"/>
+              <a:t>RCMFE</a:t>
+            </a:r>
+          </a:p>
+        </p:txBody>
+      </p:sp>
+      <p:sp>
+        <p:nvSpPr>
+          <p:cNvPr id="17" name="TextBox 16">
+            <a:extLst>
+              <a:ext uri="{FF2B5EF4-FFF2-40B4-BE49-F238E27FC236}">
+                <a16:creationId xmlns:a16="http://schemas.microsoft.com/office/drawing/2014/main" id="{EE638CAE-8D8B-EFF2-FED4-286A7D13C010}"/>
+              </a:ext>
+            </a:extLst>
+          </p:cNvPr>
+          <p:cNvSpPr txBox="1"/>
+          <p:nvPr/>
+        </p:nvSpPr>
+        <p:spPr>
+          <a:xfrm>
+            <a:off x="3038615" y="499989"/>
+            <a:ext cx="1393330" cy="215444"/>
+          </a:xfrm>
+          <a:prstGeom prst="rect">
+            <a:avLst/>
+          </a:prstGeom>
+          <a:noFill/>
+        </p:spPr>
+        <p:txBody>
+          <a:bodyPr wrap="none" rtlCol="0">
+            <a:spAutoFit/>
+          </a:bodyPr>
+          <a:lstStyle/>
+          <a:p>
+            <a:r>
+              <a:rPr lang="en-US" sz="800" b="1" dirty="0" err="1"/>
+              <a:t>Coarsing</a:t>
+            </a:r>
+            <a:r>
+              <a:rPr lang="en-US" sz="800" b="1" dirty="0"/>
+              <a:t> method: median</a:t>
+            </a:r>
+          </a:p>
+        </p:txBody>
+      </p:sp>
+    </p:spTree>
+    <p:extLst>
+      <p:ext uri="{BB962C8B-B14F-4D97-AF65-F5344CB8AC3E}">
+        <p14:creationId xmlns:p14="http://schemas.microsoft.com/office/powerpoint/2010/main" val="3871675941"/>
       </p:ext>
     </p:extLst>
   </p:cSld>

--- a/figures/FIGURES.pptx
+++ b/figures/FIGURES.pptx
@@ -3328,36 +3328,112 @@
           <a:chExt cx="0" cy="0"/>
         </a:xfrm>
       </p:grpSpPr>
-      <p:pic>
-        <p:nvPicPr>
-          <p:cNvPr id="5" name="Picture 4" descr="A diagram of different types of objects with Ice hockey rink in the background&#10;&#10;AI-generated content may be incorrect.">
-            <a:extLst>
-              <a:ext uri="{FF2B5EF4-FFF2-40B4-BE49-F238E27FC236}">
-                <a16:creationId xmlns:a16="http://schemas.microsoft.com/office/drawing/2014/main" id="{42F98B71-2A50-CD57-978F-09D72D9ACEA3}"/>
-              </a:ext>
-            </a:extLst>
-          </p:cNvPr>
-          <p:cNvPicPr>
-            <a:picLocks noChangeAspect="1"/>
-          </p:cNvPicPr>
+      <p:grpSp>
+        <p:nvGrpSpPr>
+          <p:cNvPr id="3" name="Group 2">
+            <a:extLst>
+              <a:ext uri="{FF2B5EF4-FFF2-40B4-BE49-F238E27FC236}">
+                <a16:creationId xmlns:a16="http://schemas.microsoft.com/office/drawing/2014/main" id="{84B772C5-6419-006A-35A4-6A8860975FEB}"/>
+              </a:ext>
+            </a:extLst>
+          </p:cNvPr>
+          <p:cNvGrpSpPr/>
           <p:nvPr/>
-        </p:nvPicPr>
-        <p:blipFill>
-          <a:blip r:embed="rId2"/>
-          <a:stretch>
-            <a:fillRect/>
-          </a:stretch>
-        </p:blipFill>
-        <p:spPr>
+        </p:nvGrpSpPr>
+        <p:grpSpPr>
           <a:xfrm>
-            <a:off x="1715770" y="848509"/>
-            <a:ext cx="7772400" cy="4692405"/>
+            <a:off x="1168400" y="482599"/>
+            <a:ext cx="6372437" cy="5029201"/>
+            <a:chOff x="1168400" y="482599"/>
+            <a:chExt cx="6372437" cy="5029201"/>
           </a:xfrm>
-          <a:prstGeom prst="rect">
-            <a:avLst/>
-          </a:prstGeom>
-        </p:spPr>
-      </p:pic>
+        </p:grpSpPr>
+        <p:sp>
+          <p:nvSpPr>
+            <p:cNvPr id="2" name="Rounded Rectangle 1">
+              <a:extLst>
+                <a:ext uri="{FF2B5EF4-FFF2-40B4-BE49-F238E27FC236}">
+                  <a16:creationId xmlns:a16="http://schemas.microsoft.com/office/drawing/2014/main" id="{DE4BA2F0-6623-FC5B-7B20-292D0F82B166}"/>
+                </a:ext>
+              </a:extLst>
+            </p:cNvPr>
+            <p:cNvSpPr/>
+            <p:nvPr/>
+          </p:nvSpPr>
+          <p:spPr>
+            <a:xfrm>
+              <a:off x="1168400" y="482599"/>
+              <a:ext cx="6372437" cy="5029201"/>
+            </a:xfrm>
+            <a:prstGeom prst="roundRect">
+              <a:avLst/>
+            </a:prstGeom>
+            <a:solidFill>
+              <a:schemeClr val="bg1"/>
+            </a:solidFill>
+            <a:ln>
+              <a:solidFill>
+                <a:schemeClr val="tx1"/>
+              </a:solidFill>
+            </a:ln>
+          </p:spPr>
+          <p:style>
+            <a:lnRef idx="2">
+              <a:schemeClr val="accent1">
+                <a:shade val="15000"/>
+              </a:schemeClr>
+            </a:lnRef>
+            <a:fillRef idx="1">
+              <a:schemeClr val="accent1"/>
+            </a:fillRef>
+            <a:effectRef idx="0">
+              <a:schemeClr val="accent1"/>
+            </a:effectRef>
+            <a:fontRef idx="minor">
+              <a:schemeClr val="lt1"/>
+            </a:fontRef>
+          </p:style>
+          <p:txBody>
+            <a:bodyPr rtlCol="0" anchor="ctr"/>
+            <a:lstStyle/>
+            <a:p>
+              <a:pPr algn="ctr"/>
+              <a:endParaRPr lang="en-US"/>
+            </a:p>
+          </p:txBody>
+        </p:sp>
+        <p:pic>
+          <p:nvPicPr>
+            <p:cNvPr id="5" name="Picture 4" descr="A diagram of different types of objects with Ice hockey rink in the background&#10;&#10;AI-generated content may be incorrect.">
+              <a:extLst>
+                <a:ext uri="{FF2B5EF4-FFF2-40B4-BE49-F238E27FC236}">
+                  <a16:creationId xmlns:a16="http://schemas.microsoft.com/office/drawing/2014/main" id="{42F98B71-2A50-CD57-978F-09D72D9ACEA3}"/>
+                </a:ext>
+              </a:extLst>
+            </p:cNvPr>
+            <p:cNvPicPr>
+              <a:picLocks noChangeAspect="1"/>
+            </p:cNvPicPr>
+            <p:nvPr/>
+          </p:nvPicPr>
+          <p:blipFill>
+            <a:blip r:embed="rId2"/>
+            <a:srcRect l="18012" t="1783" r="7587" b="7640"/>
+            <a:stretch>
+              <a:fillRect/>
+            </a:stretch>
+          </p:blipFill>
+          <p:spPr>
+            <a:xfrm>
+              <a:off x="1380066" y="872065"/>
+              <a:ext cx="5782735" cy="4250268"/>
+            </a:xfrm>
+            <a:prstGeom prst="rect">
+              <a:avLst/>
+            </a:prstGeom>
+          </p:spPr>
+        </p:pic>
+      </p:grpSp>
     </p:spTree>
     <p:extLst>
       <p:ext uri="{BB962C8B-B14F-4D97-AF65-F5344CB8AC3E}">
@@ -3388,51 +3464,12 @@
           <a:chExt cx="0" cy="0"/>
         </a:xfrm>
       </p:grpSpPr>
-      <p:sp>
-        <p:nvSpPr>
-          <p:cNvPr id="6" name="TextBox 5">
-            <a:extLst>
-              <a:ext uri="{FF2B5EF4-FFF2-40B4-BE49-F238E27FC236}">
-                <a16:creationId xmlns:a16="http://schemas.microsoft.com/office/drawing/2014/main" id="{F14938F8-FCC6-BE65-E009-710ABB4184D7}"/>
-              </a:ext>
-            </a:extLst>
-          </p:cNvPr>
-          <p:cNvSpPr txBox="1"/>
-          <p:nvPr/>
-        </p:nvSpPr>
-        <p:spPr>
-          <a:xfrm>
-            <a:off x="2495774" y="6357769"/>
-            <a:ext cx="1502399" cy="369332"/>
-          </a:xfrm>
-          <a:prstGeom prst="rect">
-            <a:avLst/>
-          </a:prstGeom>
-          <a:noFill/>
-        </p:spPr>
-        <p:txBody>
-          <a:bodyPr wrap="none" rtlCol="0">
-            <a:spAutoFit/>
-          </a:bodyPr>
-          <a:lstStyle/>
-          <a:p>
-            <a:r>
-              <a:rPr lang="en-US" dirty="0" err="1"/>
-              <a:t>Coarsing</a:t>
-            </a:r>
-            <a:r>
-              <a:rPr lang="en-US" dirty="0"/>
-              <a:t>: std</a:t>
-            </a:r>
-          </a:p>
-        </p:txBody>
-      </p:sp>
       <p:grpSp>
         <p:nvGrpSpPr>
-          <p:cNvPr id="18" name="Group 17">
-            <a:extLst>
-              <a:ext uri="{FF2B5EF4-FFF2-40B4-BE49-F238E27FC236}">
-                <a16:creationId xmlns:a16="http://schemas.microsoft.com/office/drawing/2014/main" id="{4FC85A7B-B31E-F1EA-304C-C447315BD467}"/>
+          <p:cNvPr id="40" name="Group 39">
+            <a:extLst>
+              <a:ext uri="{FF2B5EF4-FFF2-40B4-BE49-F238E27FC236}">
+                <a16:creationId xmlns:a16="http://schemas.microsoft.com/office/drawing/2014/main" id="{B5DD8526-35DF-BE1D-41F8-4A81CDAA70F3}"/>
               </a:ext>
             </a:extLst>
           </p:cNvPr>
@@ -3441,18 +3478,72 @@
         </p:nvGrpSpPr>
         <p:grpSpPr>
           <a:xfrm>
-            <a:off x="968988" y="499989"/>
-            <a:ext cx="6058370" cy="4461543"/>
-            <a:chOff x="968988" y="499989"/>
-            <a:chExt cx="6058370" cy="4461543"/>
+            <a:off x="203200" y="435700"/>
+            <a:ext cx="8966200" cy="5088466"/>
+            <a:chOff x="203200" y="237067"/>
+            <a:chExt cx="8966200" cy="5088466"/>
           </a:xfrm>
         </p:grpSpPr>
+        <p:sp>
+          <p:nvSpPr>
+            <p:cNvPr id="39" name="Rounded Rectangle 38">
+              <a:extLst>
+                <a:ext uri="{FF2B5EF4-FFF2-40B4-BE49-F238E27FC236}">
+                  <a16:creationId xmlns:a16="http://schemas.microsoft.com/office/drawing/2014/main" id="{B2FC92A2-9BD6-FB0F-FC98-B1F08FB260E9}"/>
+                </a:ext>
+              </a:extLst>
+            </p:cNvPr>
+            <p:cNvSpPr/>
+            <p:nvPr/>
+          </p:nvSpPr>
+          <p:spPr>
+            <a:xfrm>
+              <a:off x="203200" y="237067"/>
+              <a:ext cx="8966200" cy="5088466"/>
+            </a:xfrm>
+            <a:prstGeom prst="roundRect">
+              <a:avLst/>
+            </a:prstGeom>
+            <a:solidFill>
+              <a:schemeClr val="bg1"/>
+            </a:solidFill>
+            <a:ln>
+              <a:solidFill>
+                <a:schemeClr val="tx1"/>
+              </a:solidFill>
+            </a:ln>
+          </p:spPr>
+          <p:style>
+            <a:lnRef idx="2">
+              <a:schemeClr val="accent1">
+                <a:shade val="15000"/>
+              </a:schemeClr>
+            </a:lnRef>
+            <a:fillRef idx="1">
+              <a:schemeClr val="accent1"/>
+            </a:fillRef>
+            <a:effectRef idx="0">
+              <a:schemeClr val="accent1"/>
+            </a:effectRef>
+            <a:fontRef idx="minor">
+              <a:schemeClr val="lt1"/>
+            </a:fontRef>
+          </p:style>
+          <p:txBody>
+            <a:bodyPr rtlCol="0" anchor="ctr"/>
+            <a:lstStyle/>
+            <a:p>
+              <a:pPr algn="ctr"/>
+              <a:endParaRPr lang="en-US"/>
+            </a:p>
+          </p:txBody>
+        </p:sp>
         <p:grpSp>
           <p:nvGrpSpPr>
-            <p:cNvPr id="16" name="Group 15">
+            <p:cNvPr id="38" name="Group 37">
               <a:extLst>
                 <a:ext uri="{FF2B5EF4-FFF2-40B4-BE49-F238E27FC236}">
-                  <a16:creationId xmlns:a16="http://schemas.microsoft.com/office/drawing/2014/main" id="{EB35E4DF-D7D7-D219-9080-C721BE4FA0BF}"/>
+                  <a16:creationId xmlns:a16="http://schemas.microsoft.com/office/drawing/2014/main" id="{6934853E-E174-8AA8-4879-9217F236CF32}"/>
                 </a:ext>
               </a:extLst>
             </p:cNvPr>
@@ -3461,10 +3552,10 @@
           </p:nvGrpSpPr>
           <p:grpSpPr>
             <a:xfrm>
-              <a:off x="968988" y="715433"/>
-              <a:ext cx="6058370" cy="4246099"/>
-              <a:chOff x="968988" y="266700"/>
-              <a:chExt cx="6058370" cy="4246099"/>
+              <a:off x="340784" y="508456"/>
+              <a:ext cx="8643523" cy="4341643"/>
+              <a:chOff x="340784" y="508456"/>
+              <a:chExt cx="8643523" cy="4341643"/>
             </a:xfrm>
           </p:grpSpPr>
           <p:sp>
@@ -3481,7 +3572,7 @@
             </p:nvSpPr>
             <p:spPr>
               <a:xfrm>
-                <a:off x="2300849" y="2171700"/>
+                <a:off x="3054381" y="2518832"/>
                 <a:ext cx="389850" cy="215444"/>
               </a:xfrm>
               <a:prstGeom prst="rect">
@@ -3524,7 +3615,7 @@
             </p:blipFill>
             <p:spPr>
               <a:xfrm>
-                <a:off x="981181" y="266700"/>
+                <a:off x="1768581" y="723900"/>
                 <a:ext cx="3029185" cy="1828800"/>
               </a:xfrm>
               <a:prstGeom prst="rect">
@@ -3554,7 +3645,7 @@
             </p:blipFill>
             <p:spPr>
               <a:xfrm>
-                <a:off x="3998173" y="266700"/>
+                <a:off x="4573898" y="723900"/>
                 <a:ext cx="3029185" cy="1828800"/>
               </a:xfrm>
               <a:prstGeom prst="rect">
@@ -3584,7 +3675,7 @@
             </p:blipFill>
             <p:spPr>
               <a:xfrm>
-                <a:off x="968988" y="2427133"/>
+                <a:off x="1756388" y="2884333"/>
                 <a:ext cx="3029185" cy="1828800"/>
               </a:xfrm>
               <a:prstGeom prst="rect">
@@ -3614,7 +3705,7 @@
             </p:blipFill>
             <p:spPr>
               <a:xfrm>
-                <a:off x="3998173" y="2427133"/>
+                <a:off x="4573898" y="2884333"/>
                 <a:ext cx="3029185" cy="1828800"/>
               </a:xfrm>
               <a:prstGeom prst="rect">
@@ -3636,7 +3727,7 @@
             </p:nvSpPr>
             <p:spPr>
               <a:xfrm>
-                <a:off x="2255162" y="4297355"/>
+                <a:off x="3008089" y="4634655"/>
                 <a:ext cx="481222" cy="215444"/>
               </a:xfrm>
               <a:prstGeom prst="rect">
@@ -3672,7 +3763,7 @@
             </p:nvSpPr>
             <p:spPr>
               <a:xfrm>
-                <a:off x="5317840" y="2122789"/>
+                <a:off x="5871891" y="2520723"/>
                 <a:ext cx="389850" cy="215444"/>
               </a:xfrm>
               <a:prstGeom prst="rect">
@@ -3707,7 +3798,7 @@
             </p:nvSpPr>
             <p:spPr>
               <a:xfrm>
-                <a:off x="5317840" y="4297355"/>
+                <a:off x="5802732" y="4634655"/>
                 <a:ext cx="521297" cy="215444"/>
               </a:xfrm>
               <a:prstGeom prst="rect">
@@ -3728,46 +3819,286 @@
               </a:p>
             </p:txBody>
           </p:sp>
+          <p:sp>
+            <p:nvSpPr>
+              <p:cNvPr id="17" name="TextBox 16">
+                <a:extLst>
+                  <a:ext uri="{FF2B5EF4-FFF2-40B4-BE49-F238E27FC236}">
+                    <a16:creationId xmlns:a16="http://schemas.microsoft.com/office/drawing/2014/main" id="{572B3714-305B-A373-BC26-A038ACDDDCF7}"/>
+                  </a:ext>
+                </a:extLst>
+              </p:cNvPr>
+              <p:cNvSpPr txBox="1"/>
+              <p:nvPr/>
+            </p:nvSpPr>
+            <p:spPr>
+              <a:xfrm>
+                <a:off x="3826015" y="508456"/>
+                <a:ext cx="1919115" cy="215444"/>
+              </a:xfrm>
+              <a:prstGeom prst="rect">
+                <a:avLst/>
+              </a:prstGeom>
+              <a:noFill/>
+            </p:spPr>
+            <p:txBody>
+              <a:bodyPr wrap="none" rtlCol="0">
+                <a:spAutoFit/>
+              </a:bodyPr>
+              <a:lstStyle/>
+              <a:p>
+                <a:r>
+                  <a:rPr lang="en-US" sz="800" b="1" dirty="0" err="1"/>
+                  <a:t>Coarsing</a:t>
+                </a:r>
+                <a:r>
+                  <a:rPr lang="en-US" sz="800" b="1" dirty="0"/>
+                  <a:t> method: standard deviation</a:t>
+                </a:r>
+              </a:p>
+            </p:txBody>
+          </p:sp>
+          <p:pic>
+            <p:nvPicPr>
+              <p:cNvPr id="21" name="Picture 20" descr="A graph showing a green line&#10;&#10;AI-generated content may be incorrect.">
+                <a:extLst>
+                  <a:ext uri="{FF2B5EF4-FFF2-40B4-BE49-F238E27FC236}">
+                    <a16:creationId xmlns:a16="http://schemas.microsoft.com/office/drawing/2014/main" id="{A0EFFCBB-3027-D79A-02AA-928C1828BE6A}"/>
+                  </a:ext>
+                </a:extLst>
+              </p:cNvPr>
+              <p:cNvPicPr>
+                <a:picLocks noChangeAspect="1"/>
+              </p:cNvPicPr>
+              <p:nvPr/>
+            </p:nvPicPr>
+            <p:blipFill>
+              <a:blip r:embed="rId6"/>
+              <a:stretch>
+                <a:fillRect/>
+              </a:stretch>
+            </p:blipFill>
+            <p:spPr>
+              <a:xfrm>
+                <a:off x="7469714" y="3917266"/>
+                <a:ext cx="1514593" cy="914400"/>
+              </a:xfrm>
+              <a:prstGeom prst="rect">
+                <a:avLst/>
+              </a:prstGeom>
+            </p:spPr>
+          </p:pic>
+          <p:pic>
+            <p:nvPicPr>
+              <p:cNvPr id="23" name="Picture 22" descr="A diagram of a scale factor&#10;&#10;AI-generated content may be incorrect.">
+                <a:extLst>
+                  <a:ext uri="{FF2B5EF4-FFF2-40B4-BE49-F238E27FC236}">
+                    <a16:creationId xmlns:a16="http://schemas.microsoft.com/office/drawing/2014/main" id="{2CA27FA9-D109-EC7D-E353-7902E58686B4}"/>
+                  </a:ext>
+                </a:extLst>
+              </p:cNvPr>
+              <p:cNvPicPr>
+                <a:picLocks noChangeAspect="1"/>
+              </p:cNvPicPr>
+              <p:nvPr/>
+            </p:nvPicPr>
+            <p:blipFill>
+              <a:blip r:embed="rId7"/>
+              <a:stretch>
+                <a:fillRect/>
+              </a:stretch>
+            </p:blipFill>
+            <p:spPr>
+              <a:xfrm>
+                <a:off x="7469714" y="3002866"/>
+                <a:ext cx="1514593" cy="914400"/>
+              </a:xfrm>
+              <a:prstGeom prst="rect">
+                <a:avLst/>
+              </a:prstGeom>
+            </p:spPr>
+          </p:pic>
+          <p:pic>
+            <p:nvPicPr>
+              <p:cNvPr id="25" name="Picture 24" descr="A diagram of a scale factor&#10;&#10;AI-generated content may be incorrect.">
+                <a:extLst>
+                  <a:ext uri="{FF2B5EF4-FFF2-40B4-BE49-F238E27FC236}">
+                    <a16:creationId xmlns:a16="http://schemas.microsoft.com/office/drawing/2014/main" id="{AD5AC3D7-94B0-0B09-D435-9E08BE70CD77}"/>
+                  </a:ext>
+                </a:extLst>
+              </p:cNvPr>
+              <p:cNvPicPr>
+                <a:picLocks noChangeAspect="1"/>
+              </p:cNvPicPr>
+              <p:nvPr/>
+            </p:nvPicPr>
+            <p:blipFill>
+              <a:blip r:embed="rId8"/>
+              <a:stretch>
+                <a:fillRect/>
+              </a:stretch>
+            </p:blipFill>
+            <p:spPr>
+              <a:xfrm>
+                <a:off x="340784" y="700426"/>
+                <a:ext cx="1514593" cy="914400"/>
+              </a:xfrm>
+              <a:prstGeom prst="rect">
+                <a:avLst/>
+              </a:prstGeom>
+            </p:spPr>
+          </p:pic>
+          <p:pic>
+            <p:nvPicPr>
+              <p:cNvPr id="27" name="Picture 26" descr="A graph showing a green line&#10;&#10;AI-generated content may be incorrect.">
+                <a:extLst>
+                  <a:ext uri="{FF2B5EF4-FFF2-40B4-BE49-F238E27FC236}">
+                    <a16:creationId xmlns:a16="http://schemas.microsoft.com/office/drawing/2014/main" id="{056E9511-0679-492A-322E-0010BE6A1911}"/>
+                  </a:ext>
+                </a:extLst>
+              </p:cNvPr>
+              <p:cNvPicPr>
+                <a:picLocks noChangeAspect="1"/>
+              </p:cNvPicPr>
+              <p:nvPr/>
+            </p:nvPicPr>
+            <p:blipFill>
+              <a:blip r:embed="rId9"/>
+              <a:stretch>
+                <a:fillRect/>
+              </a:stretch>
+            </p:blipFill>
+            <p:spPr>
+              <a:xfrm>
+                <a:off x="340784" y="1518929"/>
+                <a:ext cx="1514593" cy="914400"/>
+              </a:xfrm>
+              <a:prstGeom prst="rect">
+                <a:avLst/>
+              </a:prstGeom>
+            </p:spPr>
+          </p:pic>
+          <p:pic>
+            <p:nvPicPr>
+              <p:cNvPr id="29" name="Picture 28" descr="A diagram of a cluster&#10;&#10;AI-generated content may be incorrect.">
+                <a:extLst>
+                  <a:ext uri="{FF2B5EF4-FFF2-40B4-BE49-F238E27FC236}">
+                    <a16:creationId xmlns:a16="http://schemas.microsoft.com/office/drawing/2014/main" id="{6F2AAF61-7B05-7CFB-5EA8-A7A3F43A8DF8}"/>
+                  </a:ext>
+                </a:extLst>
+              </p:cNvPr>
+              <p:cNvPicPr>
+                <a:picLocks noChangeAspect="1"/>
+              </p:cNvPicPr>
+              <p:nvPr/>
+            </p:nvPicPr>
+            <p:blipFill>
+              <a:blip r:embed="rId10"/>
+              <a:stretch>
+                <a:fillRect/>
+              </a:stretch>
+            </p:blipFill>
+            <p:spPr>
+              <a:xfrm>
+                <a:off x="350961" y="2980230"/>
+                <a:ext cx="1514593" cy="914400"/>
+              </a:xfrm>
+              <a:prstGeom prst="rect">
+                <a:avLst/>
+              </a:prstGeom>
+            </p:spPr>
+          </p:pic>
+          <p:pic>
+            <p:nvPicPr>
+              <p:cNvPr id="31" name="Picture 30" descr="A green line graph with numbers and a black line&#10;&#10;AI-generated content may be incorrect.">
+                <a:extLst>
+                  <a:ext uri="{FF2B5EF4-FFF2-40B4-BE49-F238E27FC236}">
+                    <a16:creationId xmlns:a16="http://schemas.microsoft.com/office/drawing/2014/main" id="{D4170E40-8659-8534-59A7-3D7D5A7C910A}"/>
+                  </a:ext>
+                </a:extLst>
+              </p:cNvPr>
+              <p:cNvPicPr>
+                <a:picLocks noChangeAspect="1"/>
+              </p:cNvPicPr>
+              <p:nvPr/>
+            </p:nvPicPr>
+            <p:blipFill>
+              <a:blip r:embed="rId11"/>
+              <a:stretch>
+                <a:fillRect/>
+              </a:stretch>
+            </p:blipFill>
+            <p:spPr>
+              <a:xfrm>
+                <a:off x="384675" y="3818482"/>
+                <a:ext cx="1514593" cy="914400"/>
+              </a:xfrm>
+              <a:prstGeom prst="rect">
+                <a:avLst/>
+              </a:prstGeom>
+            </p:spPr>
+          </p:pic>
+          <p:pic>
+            <p:nvPicPr>
+              <p:cNvPr id="35" name="Picture 34" descr="A diagram of a planet&#10;&#10;AI-generated content may be incorrect.">
+                <a:extLst>
+                  <a:ext uri="{FF2B5EF4-FFF2-40B4-BE49-F238E27FC236}">
+                    <a16:creationId xmlns:a16="http://schemas.microsoft.com/office/drawing/2014/main" id="{3D5DBE70-CFF8-1A44-A060-B97B3DEFD3A9}"/>
+                  </a:ext>
+                </a:extLst>
+              </p:cNvPr>
+              <p:cNvPicPr>
+                <a:picLocks noChangeAspect="1"/>
+              </p:cNvPicPr>
+              <p:nvPr/>
+            </p:nvPicPr>
+            <p:blipFill>
+              <a:blip r:embed="rId12"/>
+              <a:stretch>
+                <a:fillRect/>
+              </a:stretch>
+            </p:blipFill>
+            <p:spPr>
+              <a:xfrm>
+                <a:off x="7394236" y="676200"/>
+                <a:ext cx="1514593" cy="914400"/>
+              </a:xfrm>
+              <a:prstGeom prst="rect">
+                <a:avLst/>
+              </a:prstGeom>
+            </p:spPr>
+          </p:pic>
+          <p:pic>
+            <p:nvPicPr>
+              <p:cNvPr id="37" name="Picture 36" descr="A graph showing a curve&#10;&#10;AI-generated content may be incorrect.">
+                <a:extLst>
+                  <a:ext uri="{FF2B5EF4-FFF2-40B4-BE49-F238E27FC236}">
+                    <a16:creationId xmlns:a16="http://schemas.microsoft.com/office/drawing/2014/main" id="{47B4D663-A9F0-D9B8-CCAE-CEE4E4585666}"/>
+                  </a:ext>
+                </a:extLst>
+              </p:cNvPr>
+              <p:cNvPicPr>
+                <a:picLocks noChangeAspect="1"/>
+              </p:cNvPicPr>
+              <p:nvPr/>
+            </p:nvPicPr>
+            <p:blipFill>
+              <a:blip r:embed="rId13"/>
+              <a:stretch>
+                <a:fillRect/>
+              </a:stretch>
+            </p:blipFill>
+            <p:spPr>
+              <a:xfrm>
+                <a:off x="7469714" y="1520560"/>
+                <a:ext cx="1514593" cy="914400"/>
+              </a:xfrm>
+              <a:prstGeom prst="rect">
+                <a:avLst/>
+              </a:prstGeom>
+            </p:spPr>
+          </p:pic>
         </p:grpSp>
-        <p:sp>
-          <p:nvSpPr>
-            <p:cNvPr id="17" name="TextBox 16">
-              <a:extLst>
-                <a:ext uri="{FF2B5EF4-FFF2-40B4-BE49-F238E27FC236}">
-                  <a16:creationId xmlns:a16="http://schemas.microsoft.com/office/drawing/2014/main" id="{572B3714-305B-A373-BC26-A038ACDDDCF7}"/>
-                </a:ext>
-              </a:extLst>
-            </p:cNvPr>
-            <p:cNvSpPr txBox="1"/>
-            <p:nvPr/>
-          </p:nvSpPr>
-          <p:spPr>
-            <a:xfrm>
-              <a:off x="3038615" y="499989"/>
-              <a:ext cx="1919115" cy="215444"/>
-            </a:xfrm>
-            <a:prstGeom prst="rect">
-              <a:avLst/>
-            </a:prstGeom>
-            <a:noFill/>
-          </p:spPr>
-          <p:txBody>
-            <a:bodyPr wrap="none" rtlCol="0">
-              <a:spAutoFit/>
-            </a:bodyPr>
-            <a:lstStyle/>
-            <a:p>
-              <a:r>
-                <a:rPr lang="en-US" sz="800" b="1" dirty="0" err="1"/>
-                <a:t>Coarsing</a:t>
-              </a:r>
-              <a:r>
-                <a:rPr lang="en-US" sz="800" b="1" dirty="0"/>
-                <a:t> method: standard deviation</a:t>
-              </a:r>
-            </a:p>
-          </p:txBody>
-        </p:sp>
       </p:grpSp>
     </p:spTree>
     <p:extLst>
@@ -3805,225 +4136,621 @@
           <a:chExt cx="0" cy="0"/>
         </a:xfrm>
       </p:grpSpPr>
-      <p:sp>
-        <p:nvSpPr>
-          <p:cNvPr id="6" name="TextBox 5">
-            <a:extLst>
-              <a:ext uri="{FF2B5EF4-FFF2-40B4-BE49-F238E27FC236}">
-                <a16:creationId xmlns:a16="http://schemas.microsoft.com/office/drawing/2014/main" id="{0B9895D9-B875-7FB7-C530-8FEFE5C78AA2}"/>
-              </a:ext>
-            </a:extLst>
-          </p:cNvPr>
-          <p:cNvSpPr txBox="1"/>
+      <p:grpSp>
+        <p:nvGrpSpPr>
+          <p:cNvPr id="41" name="Group 40">
+            <a:extLst>
+              <a:ext uri="{FF2B5EF4-FFF2-40B4-BE49-F238E27FC236}">
+                <a16:creationId xmlns:a16="http://schemas.microsoft.com/office/drawing/2014/main" id="{ECC7E8CF-9458-9898-D9CE-A516F62ECD0E}"/>
+              </a:ext>
+            </a:extLst>
+          </p:cNvPr>
+          <p:cNvGrpSpPr/>
           <p:nvPr/>
-        </p:nvSpPr>
-        <p:spPr>
+        </p:nvGrpSpPr>
+        <p:grpSpPr>
           <a:xfrm>
-            <a:off x="2495774" y="6357769"/>
-            <a:ext cx="1502399" cy="369332"/>
+            <a:off x="440267" y="338667"/>
+            <a:ext cx="8949266" cy="4754871"/>
+            <a:chOff x="59267" y="397933"/>
+            <a:chExt cx="8949266" cy="4754871"/>
           </a:xfrm>
-          <a:prstGeom prst="rect">
-            <a:avLst/>
-          </a:prstGeom>
-          <a:noFill/>
-        </p:spPr>
-        <p:txBody>
-          <a:bodyPr wrap="none" rtlCol="0">
-            <a:spAutoFit/>
-          </a:bodyPr>
-          <a:lstStyle/>
-          <a:p>
-            <a:r>
-              <a:rPr lang="en-US" dirty="0" err="1"/>
-              <a:t>Coarsing</a:t>
-            </a:r>
-            <a:r>
-              <a:rPr lang="en-US" dirty="0"/>
-              <a:t>: std</a:t>
-            </a:r>
-          </a:p>
-        </p:txBody>
-      </p:sp>
-      <p:sp>
-        <p:nvSpPr>
-          <p:cNvPr id="2" name="TextBox 1">
-            <a:extLst>
-              <a:ext uri="{FF2B5EF4-FFF2-40B4-BE49-F238E27FC236}">
-                <a16:creationId xmlns:a16="http://schemas.microsoft.com/office/drawing/2014/main" id="{E8BCE681-3B8A-C979-27EE-BB3BB33E211B}"/>
-              </a:ext>
-            </a:extLst>
-          </p:cNvPr>
-          <p:cNvSpPr txBox="1"/>
-          <p:nvPr/>
-        </p:nvSpPr>
-        <p:spPr>
-          <a:xfrm>
-            <a:off x="2300849" y="2620433"/>
-            <a:ext cx="389850" cy="215444"/>
-          </a:xfrm>
-          <a:prstGeom prst="rect">
-            <a:avLst/>
-          </a:prstGeom>
-          <a:noFill/>
-        </p:spPr>
-        <p:txBody>
-          <a:bodyPr wrap="none" rtlCol="0">
-            <a:spAutoFit/>
-          </a:bodyPr>
-          <a:lstStyle/>
-          <a:p>
-            <a:r>
-              <a:rPr lang="en-US" sz="800" b="1" dirty="0"/>
-              <a:t>MSE</a:t>
-            </a:r>
-          </a:p>
-        </p:txBody>
-      </p:sp>
-      <p:sp>
-        <p:nvSpPr>
-          <p:cNvPr id="13" name="TextBox 12">
-            <a:extLst>
-              <a:ext uri="{FF2B5EF4-FFF2-40B4-BE49-F238E27FC236}">
-                <a16:creationId xmlns:a16="http://schemas.microsoft.com/office/drawing/2014/main" id="{35FA97BD-451D-2C76-0A16-43A1EEC34AA5}"/>
-              </a:ext>
-            </a:extLst>
-          </p:cNvPr>
-          <p:cNvSpPr txBox="1"/>
-          <p:nvPr/>
-        </p:nvSpPr>
-        <p:spPr>
-          <a:xfrm>
-            <a:off x="2255162" y="4746088"/>
-            <a:ext cx="481222" cy="215444"/>
-          </a:xfrm>
-          <a:prstGeom prst="rect">
-            <a:avLst/>
-          </a:prstGeom>
-          <a:noFill/>
-        </p:spPr>
-        <p:txBody>
-          <a:bodyPr wrap="none" rtlCol="0">
-            <a:spAutoFit/>
-          </a:bodyPr>
-          <a:lstStyle/>
-          <a:p>
-            <a:r>
-              <a:rPr lang="en-US" sz="800" b="1" dirty="0" err="1"/>
-              <a:t>mMSE</a:t>
-            </a:r>
-            <a:endParaRPr lang="en-US" sz="800" b="1" dirty="0"/>
-          </a:p>
-        </p:txBody>
-      </p:sp>
-      <p:sp>
-        <p:nvSpPr>
-          <p:cNvPr id="14" name="TextBox 13">
-            <a:extLst>
-              <a:ext uri="{FF2B5EF4-FFF2-40B4-BE49-F238E27FC236}">
-                <a16:creationId xmlns:a16="http://schemas.microsoft.com/office/drawing/2014/main" id="{EDBFEEBE-C074-86B0-0828-0CECB225C64B}"/>
-              </a:ext>
-            </a:extLst>
-          </p:cNvPr>
-          <p:cNvSpPr txBox="1"/>
-          <p:nvPr/>
-        </p:nvSpPr>
-        <p:spPr>
-          <a:xfrm>
-            <a:off x="5317840" y="2571522"/>
-            <a:ext cx="389850" cy="215444"/>
-          </a:xfrm>
-          <a:prstGeom prst="rect">
-            <a:avLst/>
-          </a:prstGeom>
-          <a:noFill/>
-        </p:spPr>
-        <p:txBody>
-          <a:bodyPr wrap="none" rtlCol="0">
-            <a:spAutoFit/>
-          </a:bodyPr>
-          <a:lstStyle/>
-          <a:p>
-            <a:r>
-              <a:rPr lang="en-US" sz="800" b="1" dirty="0"/>
-              <a:t>MFE</a:t>
-            </a:r>
-          </a:p>
-        </p:txBody>
-      </p:sp>
-      <p:sp>
-        <p:nvSpPr>
-          <p:cNvPr id="15" name="TextBox 14">
-            <a:extLst>
-              <a:ext uri="{FF2B5EF4-FFF2-40B4-BE49-F238E27FC236}">
-                <a16:creationId xmlns:a16="http://schemas.microsoft.com/office/drawing/2014/main" id="{24E8965C-A296-A1C6-D2A3-912C6DF6F1CF}"/>
-              </a:ext>
-            </a:extLst>
-          </p:cNvPr>
-          <p:cNvSpPr txBox="1"/>
-          <p:nvPr/>
-        </p:nvSpPr>
-        <p:spPr>
-          <a:xfrm>
-            <a:off x="5317840" y="4746088"/>
-            <a:ext cx="521297" cy="215444"/>
-          </a:xfrm>
-          <a:prstGeom prst="rect">
-            <a:avLst/>
-          </a:prstGeom>
-          <a:noFill/>
-        </p:spPr>
-        <p:txBody>
-          <a:bodyPr wrap="none" rtlCol="0">
-            <a:spAutoFit/>
-          </a:bodyPr>
-          <a:lstStyle/>
-          <a:p>
-            <a:r>
-              <a:rPr lang="en-US" sz="800" b="1" dirty="0"/>
-              <a:t>RCMFE</a:t>
-            </a:r>
-          </a:p>
-        </p:txBody>
-      </p:sp>
-      <p:sp>
-        <p:nvSpPr>
-          <p:cNvPr id="17" name="TextBox 16">
-            <a:extLst>
-              <a:ext uri="{FF2B5EF4-FFF2-40B4-BE49-F238E27FC236}">
-                <a16:creationId xmlns:a16="http://schemas.microsoft.com/office/drawing/2014/main" id="{EE638CAE-8D8B-EFF2-FED4-286A7D13C010}"/>
-              </a:ext>
-            </a:extLst>
-          </p:cNvPr>
-          <p:cNvSpPr txBox="1"/>
-          <p:nvPr/>
-        </p:nvSpPr>
-        <p:spPr>
-          <a:xfrm>
-            <a:off x="3038615" y="499989"/>
-            <a:ext cx="1393330" cy="215444"/>
-          </a:xfrm>
-          <a:prstGeom prst="rect">
-            <a:avLst/>
-          </a:prstGeom>
-          <a:noFill/>
-        </p:spPr>
-        <p:txBody>
-          <a:bodyPr wrap="none" rtlCol="0">
-            <a:spAutoFit/>
-          </a:bodyPr>
-          <a:lstStyle/>
-          <a:p>
-            <a:r>
-              <a:rPr lang="en-US" sz="800" b="1" dirty="0" err="1"/>
-              <a:t>Coarsing</a:t>
-            </a:r>
-            <a:r>
-              <a:rPr lang="en-US" sz="800" b="1" dirty="0"/>
-              <a:t> method: median</a:t>
-            </a:r>
-          </a:p>
-        </p:txBody>
-      </p:sp>
+        </p:grpSpPr>
+        <p:sp>
+          <p:nvSpPr>
+            <p:cNvPr id="24" name="Rounded Rectangle 23">
+              <a:extLst>
+                <a:ext uri="{FF2B5EF4-FFF2-40B4-BE49-F238E27FC236}">
+                  <a16:creationId xmlns:a16="http://schemas.microsoft.com/office/drawing/2014/main" id="{A0A6FF83-5F2B-0D9A-D972-62F0B63499E7}"/>
+                </a:ext>
+              </a:extLst>
+            </p:cNvPr>
+            <p:cNvSpPr/>
+            <p:nvPr/>
+          </p:nvSpPr>
+          <p:spPr>
+            <a:xfrm>
+              <a:off x="59267" y="397933"/>
+              <a:ext cx="8949266" cy="4754871"/>
+            </a:xfrm>
+            <a:prstGeom prst="roundRect">
+              <a:avLst/>
+            </a:prstGeom>
+            <a:solidFill>
+              <a:schemeClr val="bg1"/>
+            </a:solidFill>
+            <a:ln>
+              <a:solidFill>
+                <a:schemeClr val="tx1"/>
+              </a:solidFill>
+            </a:ln>
+          </p:spPr>
+          <p:style>
+            <a:lnRef idx="2">
+              <a:schemeClr val="accent1">
+                <a:shade val="15000"/>
+              </a:schemeClr>
+            </a:lnRef>
+            <a:fillRef idx="1">
+              <a:schemeClr val="accent1"/>
+            </a:fillRef>
+            <a:effectRef idx="0">
+              <a:schemeClr val="accent1"/>
+            </a:effectRef>
+            <a:fontRef idx="minor">
+              <a:schemeClr val="lt1"/>
+            </a:fontRef>
+          </p:style>
+          <p:txBody>
+            <a:bodyPr rtlCol="0" anchor="ctr"/>
+            <a:lstStyle/>
+            <a:p>
+              <a:pPr algn="ctr"/>
+              <a:endParaRPr lang="en-US"/>
+            </a:p>
+          </p:txBody>
+        </p:sp>
+        <p:sp>
+          <p:nvSpPr>
+            <p:cNvPr id="2" name="TextBox 1">
+              <a:extLst>
+                <a:ext uri="{FF2B5EF4-FFF2-40B4-BE49-F238E27FC236}">
+                  <a16:creationId xmlns:a16="http://schemas.microsoft.com/office/drawing/2014/main" id="{E8BCE681-3B8A-C979-27EE-BB3BB33E211B}"/>
+                </a:ext>
+              </a:extLst>
+            </p:cNvPr>
+            <p:cNvSpPr txBox="1"/>
+            <p:nvPr/>
+          </p:nvSpPr>
+          <p:spPr>
+            <a:xfrm>
+              <a:off x="2839362" y="2552579"/>
+              <a:ext cx="389850" cy="215444"/>
+            </a:xfrm>
+            <a:prstGeom prst="rect">
+              <a:avLst/>
+            </a:prstGeom>
+            <a:noFill/>
+          </p:spPr>
+          <p:txBody>
+            <a:bodyPr wrap="none" rtlCol="0">
+              <a:spAutoFit/>
+            </a:bodyPr>
+            <a:lstStyle/>
+            <a:p>
+              <a:r>
+                <a:rPr lang="en-US" sz="800" b="1" dirty="0"/>
+                <a:t>MSE</a:t>
+              </a:r>
+            </a:p>
+          </p:txBody>
+        </p:sp>
+        <p:sp>
+          <p:nvSpPr>
+            <p:cNvPr id="13" name="TextBox 12">
+              <a:extLst>
+                <a:ext uri="{FF2B5EF4-FFF2-40B4-BE49-F238E27FC236}">
+                  <a16:creationId xmlns:a16="http://schemas.microsoft.com/office/drawing/2014/main" id="{35FA97BD-451D-2C76-0A16-43A1EEC34AA5}"/>
+                </a:ext>
+              </a:extLst>
+            </p:cNvPr>
+            <p:cNvSpPr txBox="1"/>
+            <p:nvPr/>
+          </p:nvSpPr>
+          <p:spPr>
+            <a:xfrm>
+              <a:off x="2763058" y="4678235"/>
+              <a:ext cx="481222" cy="215444"/>
+            </a:xfrm>
+            <a:prstGeom prst="rect">
+              <a:avLst/>
+            </a:prstGeom>
+            <a:noFill/>
+          </p:spPr>
+          <p:txBody>
+            <a:bodyPr wrap="none" rtlCol="0">
+              <a:spAutoFit/>
+            </a:bodyPr>
+            <a:lstStyle/>
+            <a:p>
+              <a:r>
+                <a:rPr lang="en-US" sz="800" b="1" dirty="0" err="1"/>
+                <a:t>mMSE</a:t>
+              </a:r>
+              <a:endParaRPr lang="en-US" sz="800" b="1" dirty="0"/>
+            </a:p>
+          </p:txBody>
+        </p:sp>
+        <p:sp>
+          <p:nvSpPr>
+            <p:cNvPr id="14" name="TextBox 13">
+              <a:extLst>
+                <a:ext uri="{FF2B5EF4-FFF2-40B4-BE49-F238E27FC236}">
+                  <a16:creationId xmlns:a16="http://schemas.microsoft.com/office/drawing/2014/main" id="{EDBFEEBE-C074-86B0-0828-0CECB225C64B}"/>
+                </a:ext>
+              </a:extLst>
+            </p:cNvPr>
+            <p:cNvSpPr txBox="1"/>
+            <p:nvPr/>
+          </p:nvSpPr>
+          <p:spPr>
+            <a:xfrm>
+              <a:off x="5706150" y="2552579"/>
+              <a:ext cx="389850" cy="215444"/>
+            </a:xfrm>
+            <a:prstGeom prst="rect">
+              <a:avLst/>
+            </a:prstGeom>
+            <a:noFill/>
+          </p:spPr>
+          <p:txBody>
+            <a:bodyPr wrap="none" rtlCol="0">
+              <a:spAutoFit/>
+            </a:bodyPr>
+            <a:lstStyle/>
+            <a:p>
+              <a:r>
+                <a:rPr lang="en-US" sz="800" b="1" dirty="0"/>
+                <a:t>MFE</a:t>
+              </a:r>
+            </a:p>
+          </p:txBody>
+        </p:sp>
+        <p:sp>
+          <p:nvSpPr>
+            <p:cNvPr id="15" name="TextBox 14">
+              <a:extLst>
+                <a:ext uri="{FF2B5EF4-FFF2-40B4-BE49-F238E27FC236}">
+                  <a16:creationId xmlns:a16="http://schemas.microsoft.com/office/drawing/2014/main" id="{24E8965C-A296-A1C6-D2A3-912C6DF6F1CF}"/>
+                </a:ext>
+              </a:extLst>
+            </p:cNvPr>
+            <p:cNvSpPr txBox="1"/>
+            <p:nvPr/>
+          </p:nvSpPr>
+          <p:spPr>
+            <a:xfrm>
+              <a:off x="5654777" y="4678235"/>
+              <a:ext cx="521297" cy="215444"/>
+            </a:xfrm>
+            <a:prstGeom prst="rect">
+              <a:avLst/>
+            </a:prstGeom>
+            <a:noFill/>
+          </p:spPr>
+          <p:txBody>
+            <a:bodyPr wrap="none" rtlCol="0">
+              <a:spAutoFit/>
+            </a:bodyPr>
+            <a:lstStyle/>
+            <a:p>
+              <a:r>
+                <a:rPr lang="en-US" sz="800" b="1" dirty="0"/>
+                <a:t>RCMFE</a:t>
+              </a:r>
+            </a:p>
+          </p:txBody>
+        </p:sp>
+        <p:sp>
+          <p:nvSpPr>
+            <p:cNvPr id="17" name="TextBox 16">
+              <a:extLst>
+                <a:ext uri="{FF2B5EF4-FFF2-40B4-BE49-F238E27FC236}">
+                  <a16:creationId xmlns:a16="http://schemas.microsoft.com/office/drawing/2014/main" id="{EE638CAE-8D8B-EFF2-FED4-286A7D13C010}"/>
+                </a:ext>
+              </a:extLst>
+            </p:cNvPr>
+            <p:cNvSpPr txBox="1"/>
+            <p:nvPr/>
+          </p:nvSpPr>
+          <p:spPr>
+            <a:xfrm>
+              <a:off x="3749815" y="510610"/>
+              <a:ext cx="1393330" cy="215444"/>
+            </a:xfrm>
+            <a:prstGeom prst="rect">
+              <a:avLst/>
+            </a:prstGeom>
+            <a:noFill/>
+          </p:spPr>
+          <p:txBody>
+            <a:bodyPr wrap="none" rtlCol="0">
+              <a:spAutoFit/>
+            </a:bodyPr>
+            <a:lstStyle/>
+            <a:p>
+              <a:r>
+                <a:rPr lang="en-US" sz="800" b="1" dirty="0" err="1"/>
+                <a:t>Coarsing</a:t>
+              </a:r>
+              <a:r>
+                <a:rPr lang="en-US" sz="800" b="1" dirty="0"/>
+                <a:t> method: median</a:t>
+              </a:r>
+            </a:p>
+          </p:txBody>
+        </p:sp>
+        <p:pic>
+          <p:nvPicPr>
+            <p:cNvPr id="5" name="Picture 4" descr="A red and white scale&#10;&#10;AI-generated content may be incorrect.">
+              <a:extLst>
+                <a:ext uri="{FF2B5EF4-FFF2-40B4-BE49-F238E27FC236}">
+                  <a16:creationId xmlns:a16="http://schemas.microsoft.com/office/drawing/2014/main" id="{2326408B-4978-42FC-F237-66BEE3E1FC37}"/>
+                </a:ext>
+              </a:extLst>
+            </p:cNvPr>
+            <p:cNvPicPr>
+              <a:picLocks noChangeAspect="1"/>
+            </p:cNvPicPr>
+            <p:nvPr/>
+          </p:nvPicPr>
+          <p:blipFill>
+            <a:blip r:embed="rId2"/>
+            <a:stretch>
+              <a:fillRect/>
+            </a:stretch>
+          </p:blipFill>
+          <p:spPr>
+            <a:xfrm>
+              <a:off x="1553188" y="790796"/>
+              <a:ext cx="3029185" cy="1828800"/>
+            </a:xfrm>
+            <a:prstGeom prst="rect">
+              <a:avLst/>
+            </a:prstGeom>
+          </p:spPr>
+        </p:pic>
+        <p:pic>
+          <p:nvPicPr>
+            <p:cNvPr id="9" name="Picture 8" descr="A graph with red lines&#10;&#10;AI-generated content may be incorrect.">
+              <a:extLst>
+                <a:ext uri="{FF2B5EF4-FFF2-40B4-BE49-F238E27FC236}">
+                  <a16:creationId xmlns:a16="http://schemas.microsoft.com/office/drawing/2014/main" id="{22BF59AC-5630-4F71-8DA6-2AA5BCC49133}"/>
+                </a:ext>
+              </a:extLst>
+            </p:cNvPr>
+            <p:cNvPicPr>
+              <a:picLocks noChangeAspect="1"/>
+            </p:cNvPicPr>
+            <p:nvPr/>
+          </p:nvPicPr>
+          <p:blipFill>
+            <a:blip r:embed="rId3"/>
+            <a:stretch>
+              <a:fillRect/>
+            </a:stretch>
+          </p:blipFill>
+          <p:spPr>
+            <a:xfrm>
+              <a:off x="1553187" y="2916451"/>
+              <a:ext cx="3029185" cy="1828800"/>
+            </a:xfrm>
+            <a:prstGeom prst="rect">
+              <a:avLst/>
+            </a:prstGeom>
+          </p:spPr>
+        </p:pic>
+        <p:pic>
+          <p:nvPicPr>
+            <p:cNvPr id="21" name="Picture 20" descr="A red and white scale&#10;&#10;AI-generated content may be incorrect.">
+              <a:extLst>
+                <a:ext uri="{FF2B5EF4-FFF2-40B4-BE49-F238E27FC236}">
+                  <a16:creationId xmlns:a16="http://schemas.microsoft.com/office/drawing/2014/main" id="{2BB23ADB-8F6C-03DC-95C2-F825740452DC}"/>
+                </a:ext>
+              </a:extLst>
+            </p:cNvPr>
+            <p:cNvPicPr>
+              <a:picLocks noChangeAspect="1"/>
+            </p:cNvPicPr>
+            <p:nvPr/>
+          </p:nvPicPr>
+          <p:blipFill>
+            <a:blip r:embed="rId4"/>
+            <a:stretch>
+              <a:fillRect/>
+            </a:stretch>
+          </p:blipFill>
+          <p:spPr>
+            <a:xfrm>
+              <a:off x="4427183" y="790796"/>
+              <a:ext cx="3029185" cy="1828800"/>
+            </a:xfrm>
+            <a:prstGeom prst="rect">
+              <a:avLst/>
+            </a:prstGeom>
+          </p:spPr>
+        </p:pic>
+        <p:pic>
+          <p:nvPicPr>
+            <p:cNvPr id="23" name="Picture 22" descr="A red and white scale&#10;&#10;AI-generated content may be incorrect.">
+              <a:extLst>
+                <a:ext uri="{FF2B5EF4-FFF2-40B4-BE49-F238E27FC236}">
+                  <a16:creationId xmlns:a16="http://schemas.microsoft.com/office/drawing/2014/main" id="{B3B2C6EE-2740-ACCE-419A-8320186540E8}"/>
+                </a:ext>
+              </a:extLst>
+            </p:cNvPr>
+            <p:cNvPicPr>
+              <a:picLocks noChangeAspect="1"/>
+            </p:cNvPicPr>
+            <p:nvPr/>
+          </p:nvPicPr>
+          <p:blipFill>
+            <a:blip r:embed="rId5"/>
+            <a:stretch>
+              <a:fillRect/>
+            </a:stretch>
+          </p:blipFill>
+          <p:spPr>
+            <a:xfrm>
+              <a:off x="4425220" y="2916451"/>
+              <a:ext cx="3029185" cy="1828800"/>
+            </a:xfrm>
+            <a:prstGeom prst="rect">
+              <a:avLst/>
+            </a:prstGeom>
+          </p:spPr>
+        </p:pic>
+        <p:pic>
+          <p:nvPicPr>
+            <p:cNvPr id="26" name="Picture 25" descr="A diagram of a scale factor&#10;&#10;AI-generated content may be incorrect.">
+              <a:extLst>
+                <a:ext uri="{FF2B5EF4-FFF2-40B4-BE49-F238E27FC236}">
+                  <a16:creationId xmlns:a16="http://schemas.microsoft.com/office/drawing/2014/main" id="{2D0A3D0A-C0A8-E1C1-E187-19B4296DD074}"/>
+                </a:ext>
+              </a:extLst>
+            </p:cNvPr>
+            <p:cNvPicPr>
+              <a:picLocks noChangeAspect="1"/>
+            </p:cNvPicPr>
+            <p:nvPr/>
+          </p:nvPicPr>
+          <p:blipFill>
+            <a:blip r:embed="rId6"/>
+            <a:stretch>
+              <a:fillRect/>
+            </a:stretch>
+          </p:blipFill>
+          <p:spPr>
+            <a:xfrm>
+              <a:off x="7329452" y="3064878"/>
+              <a:ext cx="1514593" cy="914400"/>
+            </a:xfrm>
+            <a:prstGeom prst="rect">
+              <a:avLst/>
+            </a:prstGeom>
+          </p:spPr>
+        </p:pic>
+        <p:pic>
+          <p:nvPicPr>
+            <p:cNvPr id="28" name="Picture 27" descr="A graph showing a green line&#10;&#10;AI-generated content may be incorrect.">
+              <a:extLst>
+                <a:ext uri="{FF2B5EF4-FFF2-40B4-BE49-F238E27FC236}">
+                  <a16:creationId xmlns:a16="http://schemas.microsoft.com/office/drawing/2014/main" id="{567303BE-346C-FC5C-EE90-11A59E4EE8EF}"/>
+                </a:ext>
+              </a:extLst>
+            </p:cNvPr>
+            <p:cNvPicPr>
+              <a:picLocks noChangeAspect="1"/>
+            </p:cNvPicPr>
+            <p:nvPr/>
+          </p:nvPicPr>
+          <p:blipFill>
+            <a:blip r:embed="rId7"/>
+            <a:stretch>
+              <a:fillRect/>
+            </a:stretch>
+          </p:blipFill>
+          <p:spPr>
+            <a:xfrm>
+              <a:off x="7204499" y="3979278"/>
+              <a:ext cx="1514593" cy="914400"/>
+            </a:xfrm>
+            <a:prstGeom prst="rect">
+              <a:avLst/>
+            </a:prstGeom>
+          </p:spPr>
+        </p:pic>
+        <p:pic>
+          <p:nvPicPr>
+            <p:cNvPr id="30" name="Picture 29" descr="A diagram of a scale factor&#10;&#10;AI-generated content may be incorrect.">
+              <a:extLst>
+                <a:ext uri="{FF2B5EF4-FFF2-40B4-BE49-F238E27FC236}">
+                  <a16:creationId xmlns:a16="http://schemas.microsoft.com/office/drawing/2014/main" id="{8CCDF3D9-8906-F426-15CB-06E970201226}"/>
+                </a:ext>
+              </a:extLst>
+            </p:cNvPr>
+            <p:cNvPicPr>
+              <a:picLocks noChangeAspect="1"/>
+            </p:cNvPicPr>
+            <p:nvPr/>
+          </p:nvPicPr>
+          <p:blipFill>
+            <a:blip r:embed="rId8"/>
+            <a:stretch>
+              <a:fillRect/>
+            </a:stretch>
+          </p:blipFill>
+          <p:spPr>
+            <a:xfrm>
+              <a:off x="187736" y="831501"/>
+              <a:ext cx="1514593" cy="914400"/>
+            </a:xfrm>
+            <a:prstGeom prst="rect">
+              <a:avLst/>
+            </a:prstGeom>
+          </p:spPr>
+        </p:pic>
+        <p:pic>
+          <p:nvPicPr>
+            <p:cNvPr id="32" name="Picture 31" descr="A graph showing a green line&#10;&#10;AI-generated content may be incorrect.">
+              <a:extLst>
+                <a:ext uri="{FF2B5EF4-FFF2-40B4-BE49-F238E27FC236}">
+                  <a16:creationId xmlns:a16="http://schemas.microsoft.com/office/drawing/2014/main" id="{B88EC16E-0AAB-29D2-2F46-D36DAF4CA685}"/>
+                </a:ext>
+              </a:extLst>
+            </p:cNvPr>
+            <p:cNvPicPr>
+              <a:picLocks noChangeAspect="1"/>
+            </p:cNvPicPr>
+            <p:nvPr/>
+          </p:nvPicPr>
+          <p:blipFill>
+            <a:blip r:embed="rId9"/>
+            <a:stretch>
+              <a:fillRect/>
+            </a:stretch>
+          </p:blipFill>
+          <p:spPr>
+            <a:xfrm>
+              <a:off x="226954" y="1705196"/>
+              <a:ext cx="1514593" cy="914400"/>
+            </a:xfrm>
+            <a:prstGeom prst="rect">
+              <a:avLst/>
+            </a:prstGeom>
+          </p:spPr>
+        </p:pic>
+        <p:pic>
+          <p:nvPicPr>
+            <p:cNvPr id="34" name="Picture 33" descr="A diagram of a cluster&#10;&#10;AI-generated content may be incorrect.">
+              <a:extLst>
+                <a:ext uri="{FF2B5EF4-FFF2-40B4-BE49-F238E27FC236}">
+                  <a16:creationId xmlns:a16="http://schemas.microsoft.com/office/drawing/2014/main" id="{76A4CBFA-7069-7A04-9B1A-9236DF5EE540}"/>
+                </a:ext>
+              </a:extLst>
+            </p:cNvPr>
+            <p:cNvPicPr>
+              <a:picLocks noChangeAspect="1"/>
+            </p:cNvPicPr>
+            <p:nvPr/>
+          </p:nvPicPr>
+          <p:blipFill>
+            <a:blip r:embed="rId10"/>
+            <a:stretch>
+              <a:fillRect/>
+            </a:stretch>
+          </p:blipFill>
+          <p:spPr>
+            <a:xfrm>
+              <a:off x="288500" y="2990665"/>
+              <a:ext cx="1514593" cy="914400"/>
+            </a:xfrm>
+            <a:prstGeom prst="rect">
+              <a:avLst/>
+            </a:prstGeom>
+          </p:spPr>
+        </p:pic>
+        <p:pic>
+          <p:nvPicPr>
+            <p:cNvPr id="36" name="Picture 35" descr="A green line graph with numbers and a black line&#10;&#10;AI-generated content may be incorrect.">
+              <a:extLst>
+                <a:ext uri="{FF2B5EF4-FFF2-40B4-BE49-F238E27FC236}">
+                  <a16:creationId xmlns:a16="http://schemas.microsoft.com/office/drawing/2014/main" id="{6A856116-8FD6-91AF-B199-A99868066BEB}"/>
+                </a:ext>
+              </a:extLst>
+            </p:cNvPr>
+            <p:cNvPicPr>
+              <a:picLocks noChangeAspect="1"/>
+            </p:cNvPicPr>
+            <p:nvPr/>
+          </p:nvPicPr>
+          <p:blipFill>
+            <a:blip r:embed="rId11"/>
+            <a:stretch>
+              <a:fillRect/>
+            </a:stretch>
+          </p:blipFill>
+          <p:spPr>
+            <a:xfrm>
+              <a:off x="226954" y="3905065"/>
+              <a:ext cx="1514593" cy="914400"/>
+            </a:xfrm>
+            <a:prstGeom prst="rect">
+              <a:avLst/>
+            </a:prstGeom>
+          </p:spPr>
+        </p:pic>
+        <p:pic>
+          <p:nvPicPr>
+            <p:cNvPr id="38" name="Picture 37" descr="A diagram of a planet&#10;&#10;AI-generated content may be incorrect.">
+              <a:extLst>
+                <a:ext uri="{FF2B5EF4-FFF2-40B4-BE49-F238E27FC236}">
+                  <a16:creationId xmlns:a16="http://schemas.microsoft.com/office/drawing/2014/main" id="{A5BE97FE-1AA7-8428-B3EE-63700A1024C9}"/>
+                </a:ext>
+              </a:extLst>
+            </p:cNvPr>
+            <p:cNvPicPr>
+              <a:picLocks noChangeAspect="1"/>
+            </p:cNvPicPr>
+            <p:nvPr/>
+          </p:nvPicPr>
+          <p:blipFill>
+            <a:blip r:embed="rId12"/>
+            <a:stretch>
+              <a:fillRect/>
+            </a:stretch>
+          </p:blipFill>
+          <p:spPr>
+            <a:xfrm>
+              <a:off x="7259234" y="831501"/>
+              <a:ext cx="1514593" cy="914400"/>
+            </a:xfrm>
+            <a:prstGeom prst="rect">
+              <a:avLst/>
+            </a:prstGeom>
+          </p:spPr>
+        </p:pic>
+        <p:pic>
+          <p:nvPicPr>
+            <p:cNvPr id="40" name="Picture 39" descr="A graph showing a curve&#10;&#10;AI-generated content may be incorrect.">
+              <a:extLst>
+                <a:ext uri="{FF2B5EF4-FFF2-40B4-BE49-F238E27FC236}">
+                  <a16:creationId xmlns:a16="http://schemas.microsoft.com/office/drawing/2014/main" id="{7353AA3E-8A49-CD34-1D2E-5F04C9E249FB}"/>
+                </a:ext>
+              </a:extLst>
+            </p:cNvPr>
+            <p:cNvPicPr>
+              <a:picLocks noChangeAspect="1"/>
+            </p:cNvPicPr>
+            <p:nvPr/>
+          </p:nvPicPr>
+          <p:blipFill>
+            <a:blip r:embed="rId13"/>
+            <a:stretch>
+              <a:fillRect/>
+            </a:stretch>
+          </p:blipFill>
+          <p:spPr>
+            <a:xfrm>
+              <a:off x="7258268" y="1671688"/>
+              <a:ext cx="1514593" cy="914400"/>
+            </a:xfrm>
+            <a:prstGeom prst="rect">
+              <a:avLst/>
+            </a:prstGeom>
+          </p:spPr>
+        </p:pic>
+      </p:grpSp>
     </p:spTree>
     <p:extLst>
       <p:ext uri="{BB962C8B-B14F-4D97-AF65-F5344CB8AC3E}">

--- a/figures/FIGURES.pptx
+++ b/figures/FIGURES.pptx
@@ -5,18 +5,17 @@
     <p:sldMasterId id="2147483648" r:id="rId1"/>
   </p:sldMasterIdLst>
   <p:sldIdLst>
-    <p:sldId id="256" r:id="rId2"/>
-    <p:sldId id="257" r:id="rId3"/>
-    <p:sldId id="258" r:id="rId4"/>
+    <p:sldId id="257" r:id="rId2"/>
+    <p:sldId id="258" r:id="rId3"/>
   </p:sldIdLst>
-  <p:sldSz cx="12192000" cy="6858000"/>
+  <p:sldSz cx="36576000" cy="20116800"/>
   <p:notesSz cx="6858000" cy="9144000"/>
   <p:defaultTextStyle>
     <a:defPPr>
       <a:defRPr lang="en-US"/>
     </a:defPPr>
-    <a:lvl1pPr marL="0" algn="l" defTabSz="914400" rtl="0" eaLnBrk="1" latinLnBrk="0" hangingPunct="1">
-      <a:defRPr sz="1800" kern="1200">
+    <a:lvl1pPr marL="0" algn="l" defTabSz="2128723" rtl="0" eaLnBrk="1" latinLnBrk="0" hangingPunct="1">
+      <a:defRPr sz="4190" kern="1200">
         <a:solidFill>
           <a:schemeClr val="tx1"/>
         </a:solidFill>
@@ -25,8 +24,8 @@
         <a:cs typeface="+mn-cs"/>
       </a:defRPr>
     </a:lvl1pPr>
-    <a:lvl2pPr marL="457200" algn="l" defTabSz="914400" rtl="0" eaLnBrk="1" latinLnBrk="0" hangingPunct="1">
-      <a:defRPr sz="1800" kern="1200">
+    <a:lvl2pPr marL="1064362" algn="l" defTabSz="2128723" rtl="0" eaLnBrk="1" latinLnBrk="0" hangingPunct="1">
+      <a:defRPr sz="4190" kern="1200">
         <a:solidFill>
           <a:schemeClr val="tx1"/>
         </a:solidFill>
@@ -35,8 +34,8 @@
         <a:cs typeface="+mn-cs"/>
       </a:defRPr>
     </a:lvl2pPr>
-    <a:lvl3pPr marL="914400" algn="l" defTabSz="914400" rtl="0" eaLnBrk="1" latinLnBrk="0" hangingPunct="1">
-      <a:defRPr sz="1800" kern="1200">
+    <a:lvl3pPr marL="2128723" algn="l" defTabSz="2128723" rtl="0" eaLnBrk="1" latinLnBrk="0" hangingPunct="1">
+      <a:defRPr sz="4190" kern="1200">
         <a:solidFill>
           <a:schemeClr val="tx1"/>
         </a:solidFill>
@@ -45,8 +44,8 @@
         <a:cs typeface="+mn-cs"/>
       </a:defRPr>
     </a:lvl3pPr>
-    <a:lvl4pPr marL="1371600" algn="l" defTabSz="914400" rtl="0" eaLnBrk="1" latinLnBrk="0" hangingPunct="1">
-      <a:defRPr sz="1800" kern="1200">
+    <a:lvl4pPr marL="3193085" algn="l" defTabSz="2128723" rtl="0" eaLnBrk="1" latinLnBrk="0" hangingPunct="1">
+      <a:defRPr sz="4190" kern="1200">
         <a:solidFill>
           <a:schemeClr val="tx1"/>
         </a:solidFill>
@@ -55,8 +54,8 @@
         <a:cs typeface="+mn-cs"/>
       </a:defRPr>
     </a:lvl4pPr>
-    <a:lvl5pPr marL="1828800" algn="l" defTabSz="914400" rtl="0" eaLnBrk="1" latinLnBrk="0" hangingPunct="1">
-      <a:defRPr sz="1800" kern="1200">
+    <a:lvl5pPr marL="4257446" algn="l" defTabSz="2128723" rtl="0" eaLnBrk="1" latinLnBrk="0" hangingPunct="1">
+      <a:defRPr sz="4190" kern="1200">
         <a:solidFill>
           <a:schemeClr val="tx1"/>
         </a:solidFill>
@@ -65,8 +64,8 @@
         <a:cs typeface="+mn-cs"/>
       </a:defRPr>
     </a:lvl5pPr>
-    <a:lvl6pPr marL="2286000" algn="l" defTabSz="914400" rtl="0" eaLnBrk="1" latinLnBrk="0" hangingPunct="1">
-      <a:defRPr sz="1800" kern="1200">
+    <a:lvl6pPr marL="5321808" algn="l" defTabSz="2128723" rtl="0" eaLnBrk="1" latinLnBrk="0" hangingPunct="1">
+      <a:defRPr sz="4190" kern="1200">
         <a:solidFill>
           <a:schemeClr val="tx1"/>
         </a:solidFill>
@@ -75,8 +74,8 @@
         <a:cs typeface="+mn-cs"/>
       </a:defRPr>
     </a:lvl6pPr>
-    <a:lvl7pPr marL="2743200" algn="l" defTabSz="914400" rtl="0" eaLnBrk="1" latinLnBrk="0" hangingPunct="1">
-      <a:defRPr sz="1800" kern="1200">
+    <a:lvl7pPr marL="6386170" algn="l" defTabSz="2128723" rtl="0" eaLnBrk="1" latinLnBrk="0" hangingPunct="1">
+      <a:defRPr sz="4190" kern="1200">
         <a:solidFill>
           <a:schemeClr val="tx1"/>
         </a:solidFill>
@@ -85,8 +84,8 @@
         <a:cs typeface="+mn-cs"/>
       </a:defRPr>
     </a:lvl7pPr>
-    <a:lvl8pPr marL="3200400" algn="l" defTabSz="914400" rtl="0" eaLnBrk="1" latinLnBrk="0" hangingPunct="1">
-      <a:defRPr sz="1800" kern="1200">
+    <a:lvl8pPr marL="7450531" algn="l" defTabSz="2128723" rtl="0" eaLnBrk="1" latinLnBrk="0" hangingPunct="1">
+      <a:defRPr sz="4190" kern="1200">
         <a:solidFill>
           <a:schemeClr val="tx1"/>
         </a:solidFill>
@@ -95,8 +94,8 @@
         <a:cs typeface="+mn-cs"/>
       </a:defRPr>
     </a:lvl8pPr>
-    <a:lvl9pPr marL="3657600" algn="l" defTabSz="914400" rtl="0" eaLnBrk="1" latinLnBrk="0" hangingPunct="1">
-      <a:defRPr sz="1800" kern="1200">
+    <a:lvl9pPr marL="8514893" algn="l" defTabSz="2128723" rtl="0" eaLnBrk="1" latinLnBrk="0" hangingPunct="1">
+      <a:defRPr sz="4190" kern="1200">
         <a:solidFill>
           <a:schemeClr val="tx1"/>
         </a:solidFill>
@@ -149,15 +148,15 @@
         </p:nvSpPr>
         <p:spPr>
           <a:xfrm>
-            <a:off x="1524000" y="1122363"/>
-            <a:ext cx="9144000" cy="2387600"/>
+            <a:off x="4572000" y="3292265"/>
+            <a:ext cx="27432000" cy="7003628"/>
           </a:xfrm>
         </p:spPr>
         <p:txBody>
           <a:bodyPr anchor="b"/>
           <a:lstStyle>
             <a:lvl1pPr algn="ctr">
-              <a:defRPr sz="6000"/>
+              <a:defRPr sz="15529"/>
             </a:lvl1pPr>
           </a:lstStyle>
           <a:p>
@@ -186,8 +185,8 @@
         </p:nvSpPr>
         <p:spPr>
           <a:xfrm>
-            <a:off x="1524000" y="3602038"/>
-            <a:ext cx="9144000" cy="1655762"/>
+            <a:off x="4572000" y="10565979"/>
+            <a:ext cx="27432000" cy="4856901"/>
           </a:xfrm>
         </p:spPr>
         <p:txBody>
@@ -195,39 +194,39 @@
           <a:lstStyle>
             <a:lvl1pPr marL="0" indent="0" algn="ctr">
               <a:buNone/>
-              <a:defRPr sz="2400"/>
+              <a:defRPr sz="6212"/>
             </a:lvl1pPr>
-            <a:lvl2pPr marL="457200" indent="0" algn="ctr">
-              <a:buNone/>
-              <a:defRPr sz="2000"/>
+            <a:lvl2pPr marL="1183325" indent="0" algn="ctr">
+              <a:buNone/>
+              <a:defRPr sz="5176"/>
             </a:lvl2pPr>
-            <a:lvl3pPr marL="914400" indent="0" algn="ctr">
-              <a:buNone/>
-              <a:defRPr sz="1800"/>
+            <a:lvl3pPr marL="2366650" indent="0" algn="ctr">
+              <a:buNone/>
+              <a:defRPr sz="4659"/>
             </a:lvl3pPr>
-            <a:lvl4pPr marL="1371600" indent="0" algn="ctr">
-              <a:buNone/>
-              <a:defRPr sz="1600"/>
+            <a:lvl4pPr marL="3549975" indent="0" algn="ctr">
+              <a:buNone/>
+              <a:defRPr sz="4141"/>
             </a:lvl4pPr>
-            <a:lvl5pPr marL="1828800" indent="0" algn="ctr">
-              <a:buNone/>
-              <a:defRPr sz="1600"/>
+            <a:lvl5pPr marL="4733300" indent="0" algn="ctr">
+              <a:buNone/>
+              <a:defRPr sz="4141"/>
             </a:lvl5pPr>
-            <a:lvl6pPr marL="2286000" indent="0" algn="ctr">
-              <a:buNone/>
-              <a:defRPr sz="1600"/>
+            <a:lvl6pPr marL="5916625" indent="0" algn="ctr">
+              <a:buNone/>
+              <a:defRPr sz="4141"/>
             </a:lvl6pPr>
-            <a:lvl7pPr marL="2743200" indent="0" algn="ctr">
-              <a:buNone/>
-              <a:defRPr sz="1600"/>
+            <a:lvl7pPr marL="7099950" indent="0" algn="ctr">
+              <a:buNone/>
+              <a:defRPr sz="4141"/>
             </a:lvl7pPr>
-            <a:lvl8pPr marL="3200400" indent="0" algn="ctr">
-              <a:buNone/>
-              <a:defRPr sz="1600"/>
+            <a:lvl8pPr marL="8283275" indent="0" algn="ctr">
+              <a:buNone/>
+              <a:defRPr sz="4141"/>
             </a:lvl8pPr>
-            <a:lvl9pPr marL="3657600" indent="0" algn="ctr">
-              <a:buNone/>
-              <a:defRPr sz="1600"/>
+            <a:lvl9pPr marL="9466600" indent="0" algn="ctr">
+              <a:buNone/>
+              <a:defRPr sz="4141"/>
             </a:lvl9pPr>
           </a:lstStyle>
           <a:p>
@@ -261,7 +260,7 @@
           <a:p>
             <a:fld id="{DC3062A3-D9B4-9C49-8A0A-A1736D741080}" type="datetimeFigureOut">
               <a:rPr lang="en-US" smtClean="0"/>
-              <a:t>10/27/25</a:t>
+              <a:t>12/22/2025</a:t>
             </a:fld>
             <a:endParaRPr lang="en-US"/>
           </a:p>
@@ -459,7 +458,7 @@
           <a:p>
             <a:fld id="{DC3062A3-D9B4-9C49-8A0A-A1736D741080}" type="datetimeFigureOut">
               <a:rPr lang="en-US" smtClean="0"/>
-              <a:t>10/27/25</a:t>
+              <a:t>12/22/2025</a:t>
             </a:fld>
             <a:endParaRPr lang="en-US"/>
           </a:p>
@@ -567,8 +566,8 @@
         </p:nvSpPr>
         <p:spPr>
           <a:xfrm>
-            <a:off x="8724900" y="365125"/>
-            <a:ext cx="2628900" cy="5811838"/>
+            <a:off x="26174700" y="1071032"/>
+            <a:ext cx="7886700" cy="17048059"/>
           </a:xfrm>
         </p:spPr>
         <p:txBody>
@@ -600,8 +599,8 @@
         </p:nvSpPr>
         <p:spPr>
           <a:xfrm>
-            <a:off x="838200" y="365125"/>
-            <a:ext cx="7734300" cy="5811838"/>
+            <a:off x="2514600" y="1071032"/>
+            <a:ext cx="23202900" cy="17048059"/>
           </a:xfrm>
         </p:spPr>
         <p:txBody>
@@ -667,7 +666,7 @@
           <a:p>
             <a:fld id="{DC3062A3-D9B4-9C49-8A0A-A1736D741080}" type="datetimeFigureOut">
               <a:rPr lang="en-US" smtClean="0"/>
-              <a:t>10/27/25</a:t>
+              <a:t>12/22/2025</a:t>
             </a:fld>
             <a:endParaRPr lang="en-US"/>
           </a:p>
@@ -865,7 +864,7 @@
           <a:p>
             <a:fld id="{DC3062A3-D9B4-9C49-8A0A-A1736D741080}" type="datetimeFigureOut">
               <a:rPr lang="en-US" smtClean="0"/>
-              <a:t>10/27/25</a:t>
+              <a:t>12/22/2025</a:t>
             </a:fld>
             <a:endParaRPr lang="en-US"/>
           </a:p>
@@ -973,15 +972,15 @@
         </p:nvSpPr>
         <p:spPr>
           <a:xfrm>
-            <a:off x="831850" y="1709738"/>
-            <a:ext cx="10515600" cy="2852737"/>
+            <a:off x="2495550" y="5015234"/>
+            <a:ext cx="31546800" cy="8368029"/>
           </a:xfrm>
         </p:spPr>
         <p:txBody>
           <a:bodyPr anchor="b"/>
           <a:lstStyle>
             <a:lvl1pPr>
-              <a:defRPr sz="6000"/>
+              <a:defRPr sz="15529"/>
             </a:lvl1pPr>
           </a:lstStyle>
           <a:p>
@@ -1010,8 +1009,8 @@
         </p:nvSpPr>
         <p:spPr>
           <a:xfrm>
-            <a:off x="831850" y="4589463"/>
-            <a:ext cx="10515600" cy="1500187"/>
+            <a:off x="2495550" y="13462426"/>
+            <a:ext cx="31546800" cy="4400549"/>
           </a:xfrm>
         </p:spPr>
         <p:txBody>
@@ -1019,7 +1018,7 @@
           <a:lstStyle>
             <a:lvl1pPr marL="0" indent="0">
               <a:buNone/>
-              <a:defRPr sz="2400">
+              <a:defRPr sz="6212">
                 <a:solidFill>
                   <a:schemeClr val="tx1">
                     <a:tint val="82000"/>
@@ -1027,9 +1026,9 @@
                 </a:solidFill>
               </a:defRPr>
             </a:lvl1pPr>
-            <a:lvl2pPr marL="457200" indent="0">
-              <a:buNone/>
-              <a:defRPr sz="2000">
+            <a:lvl2pPr marL="1183325" indent="0">
+              <a:buNone/>
+              <a:defRPr sz="5176">
                 <a:solidFill>
                   <a:schemeClr val="tx1">
                     <a:tint val="82000"/>
@@ -1037,9 +1036,9 @@
                 </a:solidFill>
               </a:defRPr>
             </a:lvl2pPr>
-            <a:lvl3pPr marL="914400" indent="0">
-              <a:buNone/>
-              <a:defRPr sz="1800">
+            <a:lvl3pPr marL="2366650" indent="0">
+              <a:buNone/>
+              <a:defRPr sz="4659">
                 <a:solidFill>
                   <a:schemeClr val="tx1">
                     <a:tint val="82000"/>
@@ -1047,9 +1046,9 @@
                 </a:solidFill>
               </a:defRPr>
             </a:lvl3pPr>
-            <a:lvl4pPr marL="1371600" indent="0">
-              <a:buNone/>
-              <a:defRPr sz="1600">
+            <a:lvl4pPr marL="3549975" indent="0">
+              <a:buNone/>
+              <a:defRPr sz="4141">
                 <a:solidFill>
                   <a:schemeClr val="tx1">
                     <a:tint val="82000"/>
@@ -1057,9 +1056,9 @@
                 </a:solidFill>
               </a:defRPr>
             </a:lvl4pPr>
-            <a:lvl5pPr marL="1828800" indent="0">
-              <a:buNone/>
-              <a:defRPr sz="1600">
+            <a:lvl5pPr marL="4733300" indent="0">
+              <a:buNone/>
+              <a:defRPr sz="4141">
                 <a:solidFill>
                   <a:schemeClr val="tx1">
                     <a:tint val="82000"/>
@@ -1067,9 +1066,9 @@
                 </a:solidFill>
               </a:defRPr>
             </a:lvl5pPr>
-            <a:lvl6pPr marL="2286000" indent="0">
-              <a:buNone/>
-              <a:defRPr sz="1600">
+            <a:lvl6pPr marL="5916625" indent="0">
+              <a:buNone/>
+              <a:defRPr sz="4141">
                 <a:solidFill>
                   <a:schemeClr val="tx1">
                     <a:tint val="82000"/>
@@ -1077,9 +1076,9 @@
                 </a:solidFill>
               </a:defRPr>
             </a:lvl6pPr>
-            <a:lvl7pPr marL="2743200" indent="0">
-              <a:buNone/>
-              <a:defRPr sz="1600">
+            <a:lvl7pPr marL="7099950" indent="0">
+              <a:buNone/>
+              <a:defRPr sz="4141">
                 <a:solidFill>
                   <a:schemeClr val="tx1">
                     <a:tint val="82000"/>
@@ -1087,9 +1086,9 @@
                 </a:solidFill>
               </a:defRPr>
             </a:lvl7pPr>
-            <a:lvl8pPr marL="3200400" indent="0">
-              <a:buNone/>
-              <a:defRPr sz="1600">
+            <a:lvl8pPr marL="8283275" indent="0">
+              <a:buNone/>
+              <a:defRPr sz="4141">
                 <a:solidFill>
                   <a:schemeClr val="tx1">
                     <a:tint val="82000"/>
@@ -1097,9 +1096,9 @@
                 </a:solidFill>
               </a:defRPr>
             </a:lvl8pPr>
-            <a:lvl9pPr marL="3657600" indent="0">
-              <a:buNone/>
-              <a:defRPr sz="1600">
+            <a:lvl9pPr marL="9466600" indent="0">
+              <a:buNone/>
+              <a:defRPr sz="4141">
                 <a:solidFill>
                   <a:schemeClr val="tx1">
                     <a:tint val="82000"/>
@@ -1140,7 +1139,7 @@
           <a:p>
             <a:fld id="{DC3062A3-D9B4-9C49-8A0A-A1736D741080}" type="datetimeFigureOut">
               <a:rPr lang="en-US" smtClean="0"/>
-              <a:t>10/27/25</a:t>
+              <a:t>12/22/2025</a:t>
             </a:fld>
             <a:endParaRPr lang="en-US"/>
           </a:p>
@@ -1276,8 +1275,8 @@
         </p:nvSpPr>
         <p:spPr>
           <a:xfrm>
-            <a:off x="838200" y="1825625"/>
-            <a:ext cx="5181600" cy="4351338"/>
+            <a:off x="2514600" y="5355167"/>
+            <a:ext cx="15544800" cy="12763924"/>
           </a:xfrm>
         </p:spPr>
         <p:txBody>
@@ -1338,8 +1337,8 @@
         </p:nvSpPr>
         <p:spPr>
           <a:xfrm>
-            <a:off x="6172200" y="1825625"/>
-            <a:ext cx="5181600" cy="4351338"/>
+            <a:off x="18516600" y="5355167"/>
+            <a:ext cx="15544800" cy="12763924"/>
           </a:xfrm>
         </p:spPr>
         <p:txBody>
@@ -1405,7 +1404,7 @@
           <a:p>
             <a:fld id="{DC3062A3-D9B4-9C49-8A0A-A1736D741080}" type="datetimeFigureOut">
               <a:rPr lang="en-US" smtClean="0"/>
-              <a:t>10/27/25</a:t>
+              <a:t>12/22/2025</a:t>
             </a:fld>
             <a:endParaRPr lang="en-US"/>
           </a:p>
@@ -1513,8 +1512,8 @@
         </p:nvSpPr>
         <p:spPr>
           <a:xfrm>
-            <a:off x="839788" y="365125"/>
-            <a:ext cx="10515600" cy="1325563"/>
+            <a:off x="2519364" y="1071036"/>
+            <a:ext cx="31546800" cy="3888319"/>
           </a:xfrm>
         </p:spPr>
         <p:txBody>
@@ -1546,8 +1545,8 @@
         </p:nvSpPr>
         <p:spPr>
           <a:xfrm>
-            <a:off x="839788" y="1681163"/>
-            <a:ext cx="5157787" cy="823912"/>
+            <a:off x="2519367" y="4931412"/>
+            <a:ext cx="15473361" cy="2416809"/>
           </a:xfrm>
         </p:spPr>
         <p:txBody>
@@ -1555,39 +1554,39 @@
           <a:lstStyle>
             <a:lvl1pPr marL="0" indent="0">
               <a:buNone/>
-              <a:defRPr sz="2400" b="1"/>
+              <a:defRPr sz="6212" b="1"/>
             </a:lvl1pPr>
-            <a:lvl2pPr marL="457200" indent="0">
-              <a:buNone/>
-              <a:defRPr sz="2000" b="1"/>
+            <a:lvl2pPr marL="1183325" indent="0">
+              <a:buNone/>
+              <a:defRPr sz="5176" b="1"/>
             </a:lvl2pPr>
-            <a:lvl3pPr marL="914400" indent="0">
-              <a:buNone/>
-              <a:defRPr sz="1800" b="1"/>
+            <a:lvl3pPr marL="2366650" indent="0">
+              <a:buNone/>
+              <a:defRPr sz="4659" b="1"/>
             </a:lvl3pPr>
-            <a:lvl4pPr marL="1371600" indent="0">
-              <a:buNone/>
-              <a:defRPr sz="1600" b="1"/>
+            <a:lvl4pPr marL="3549975" indent="0">
+              <a:buNone/>
+              <a:defRPr sz="4141" b="1"/>
             </a:lvl4pPr>
-            <a:lvl5pPr marL="1828800" indent="0">
-              <a:buNone/>
-              <a:defRPr sz="1600" b="1"/>
+            <a:lvl5pPr marL="4733300" indent="0">
+              <a:buNone/>
+              <a:defRPr sz="4141" b="1"/>
             </a:lvl5pPr>
-            <a:lvl6pPr marL="2286000" indent="0">
-              <a:buNone/>
-              <a:defRPr sz="1600" b="1"/>
+            <a:lvl6pPr marL="5916625" indent="0">
+              <a:buNone/>
+              <a:defRPr sz="4141" b="1"/>
             </a:lvl6pPr>
-            <a:lvl7pPr marL="2743200" indent="0">
-              <a:buNone/>
-              <a:defRPr sz="1600" b="1"/>
+            <a:lvl7pPr marL="7099950" indent="0">
+              <a:buNone/>
+              <a:defRPr sz="4141" b="1"/>
             </a:lvl7pPr>
-            <a:lvl8pPr marL="3200400" indent="0">
-              <a:buNone/>
-              <a:defRPr sz="1600" b="1"/>
+            <a:lvl8pPr marL="8283275" indent="0">
+              <a:buNone/>
+              <a:defRPr sz="4141" b="1"/>
             </a:lvl8pPr>
-            <a:lvl9pPr marL="3657600" indent="0">
-              <a:buNone/>
-              <a:defRPr sz="1600" b="1"/>
+            <a:lvl9pPr marL="9466600" indent="0">
+              <a:buNone/>
+              <a:defRPr sz="4141" b="1"/>
             </a:lvl9pPr>
           </a:lstStyle>
           <a:p>
@@ -1617,8 +1616,8 @@
         </p:nvSpPr>
         <p:spPr>
           <a:xfrm>
-            <a:off x="839788" y="2505075"/>
-            <a:ext cx="5157787" cy="3684588"/>
+            <a:off x="2519367" y="7348220"/>
+            <a:ext cx="15473361" cy="10808124"/>
           </a:xfrm>
         </p:spPr>
         <p:txBody>
@@ -1679,8 +1678,8 @@
         </p:nvSpPr>
         <p:spPr>
           <a:xfrm>
-            <a:off x="6172200" y="1681163"/>
-            <a:ext cx="5183188" cy="823912"/>
+            <a:off x="18516600" y="4931412"/>
+            <a:ext cx="15549564" cy="2416809"/>
           </a:xfrm>
         </p:spPr>
         <p:txBody>
@@ -1688,39 +1687,39 @@
           <a:lstStyle>
             <a:lvl1pPr marL="0" indent="0">
               <a:buNone/>
-              <a:defRPr sz="2400" b="1"/>
+              <a:defRPr sz="6212" b="1"/>
             </a:lvl1pPr>
-            <a:lvl2pPr marL="457200" indent="0">
-              <a:buNone/>
-              <a:defRPr sz="2000" b="1"/>
+            <a:lvl2pPr marL="1183325" indent="0">
+              <a:buNone/>
+              <a:defRPr sz="5176" b="1"/>
             </a:lvl2pPr>
-            <a:lvl3pPr marL="914400" indent="0">
-              <a:buNone/>
-              <a:defRPr sz="1800" b="1"/>
+            <a:lvl3pPr marL="2366650" indent="0">
+              <a:buNone/>
+              <a:defRPr sz="4659" b="1"/>
             </a:lvl3pPr>
-            <a:lvl4pPr marL="1371600" indent="0">
-              <a:buNone/>
-              <a:defRPr sz="1600" b="1"/>
+            <a:lvl4pPr marL="3549975" indent="0">
+              <a:buNone/>
+              <a:defRPr sz="4141" b="1"/>
             </a:lvl4pPr>
-            <a:lvl5pPr marL="1828800" indent="0">
-              <a:buNone/>
-              <a:defRPr sz="1600" b="1"/>
+            <a:lvl5pPr marL="4733300" indent="0">
+              <a:buNone/>
+              <a:defRPr sz="4141" b="1"/>
             </a:lvl5pPr>
-            <a:lvl6pPr marL="2286000" indent="0">
-              <a:buNone/>
-              <a:defRPr sz="1600" b="1"/>
+            <a:lvl6pPr marL="5916625" indent="0">
+              <a:buNone/>
+              <a:defRPr sz="4141" b="1"/>
             </a:lvl6pPr>
-            <a:lvl7pPr marL="2743200" indent="0">
-              <a:buNone/>
-              <a:defRPr sz="1600" b="1"/>
+            <a:lvl7pPr marL="7099950" indent="0">
+              <a:buNone/>
+              <a:defRPr sz="4141" b="1"/>
             </a:lvl7pPr>
-            <a:lvl8pPr marL="3200400" indent="0">
-              <a:buNone/>
-              <a:defRPr sz="1600" b="1"/>
+            <a:lvl8pPr marL="8283275" indent="0">
+              <a:buNone/>
+              <a:defRPr sz="4141" b="1"/>
             </a:lvl8pPr>
-            <a:lvl9pPr marL="3657600" indent="0">
-              <a:buNone/>
-              <a:defRPr sz="1600" b="1"/>
+            <a:lvl9pPr marL="9466600" indent="0">
+              <a:buNone/>
+              <a:defRPr sz="4141" b="1"/>
             </a:lvl9pPr>
           </a:lstStyle>
           <a:p>
@@ -1750,8 +1749,8 @@
         </p:nvSpPr>
         <p:spPr>
           <a:xfrm>
-            <a:off x="6172200" y="2505075"/>
-            <a:ext cx="5183188" cy="3684588"/>
+            <a:off x="18516600" y="7348220"/>
+            <a:ext cx="15549564" cy="10808124"/>
           </a:xfrm>
         </p:spPr>
         <p:txBody>
@@ -1817,7 +1816,7 @@
           <a:p>
             <a:fld id="{DC3062A3-D9B4-9C49-8A0A-A1736D741080}" type="datetimeFigureOut">
               <a:rPr lang="en-US" smtClean="0"/>
-              <a:t>10/27/25</a:t>
+              <a:t>12/22/2025</a:t>
             </a:fld>
             <a:endParaRPr lang="en-US"/>
           </a:p>
@@ -1958,7 +1957,7 @@
           <a:p>
             <a:fld id="{DC3062A3-D9B4-9C49-8A0A-A1736D741080}" type="datetimeFigureOut">
               <a:rPr lang="en-US" smtClean="0"/>
-              <a:t>10/27/25</a:t>
+              <a:t>12/22/2025</a:t>
             </a:fld>
             <a:endParaRPr lang="en-US"/>
           </a:p>
@@ -2071,7 +2070,7 @@
           <a:p>
             <a:fld id="{DC3062A3-D9B4-9C49-8A0A-A1736D741080}" type="datetimeFigureOut">
               <a:rPr lang="en-US" smtClean="0"/>
-              <a:t>10/27/25</a:t>
+              <a:t>12/22/2025</a:t>
             </a:fld>
             <a:endParaRPr lang="en-US"/>
           </a:p>
@@ -2179,15 +2178,15 @@
         </p:nvSpPr>
         <p:spPr>
           <a:xfrm>
-            <a:off x="839788" y="457200"/>
-            <a:ext cx="3932237" cy="1600200"/>
+            <a:off x="2519367" y="1341120"/>
+            <a:ext cx="11796711" cy="4693920"/>
           </a:xfrm>
         </p:spPr>
         <p:txBody>
           <a:bodyPr anchor="b"/>
           <a:lstStyle>
             <a:lvl1pPr>
-              <a:defRPr sz="3200"/>
+              <a:defRPr sz="8282"/>
             </a:lvl1pPr>
           </a:lstStyle>
           <a:p>
@@ -2216,39 +2215,39 @@
         </p:nvSpPr>
         <p:spPr>
           <a:xfrm>
-            <a:off x="5183188" y="987425"/>
-            <a:ext cx="6172200" cy="4873625"/>
+            <a:off x="15549564" y="2896447"/>
+            <a:ext cx="18516600" cy="14295968"/>
           </a:xfrm>
         </p:spPr>
         <p:txBody>
           <a:bodyPr/>
           <a:lstStyle>
             <a:lvl1pPr>
-              <a:defRPr sz="3200"/>
+              <a:defRPr sz="8282"/>
             </a:lvl1pPr>
             <a:lvl2pPr>
-              <a:defRPr sz="2800"/>
+              <a:defRPr sz="7247"/>
             </a:lvl2pPr>
             <a:lvl3pPr>
-              <a:defRPr sz="2400"/>
+              <a:defRPr sz="6212"/>
             </a:lvl3pPr>
             <a:lvl4pPr>
-              <a:defRPr sz="2000"/>
+              <a:defRPr sz="5176"/>
             </a:lvl4pPr>
             <a:lvl5pPr>
-              <a:defRPr sz="2000"/>
+              <a:defRPr sz="5176"/>
             </a:lvl5pPr>
             <a:lvl6pPr>
-              <a:defRPr sz="2000"/>
+              <a:defRPr sz="5176"/>
             </a:lvl6pPr>
             <a:lvl7pPr>
-              <a:defRPr sz="2000"/>
+              <a:defRPr sz="5176"/>
             </a:lvl7pPr>
             <a:lvl8pPr>
-              <a:defRPr sz="2000"/>
+              <a:defRPr sz="5176"/>
             </a:lvl8pPr>
             <a:lvl9pPr>
-              <a:defRPr sz="2000"/>
+              <a:defRPr sz="5176"/>
             </a:lvl9pPr>
           </a:lstStyle>
           <a:p>
@@ -2306,8 +2305,8 @@
         </p:nvSpPr>
         <p:spPr>
           <a:xfrm>
-            <a:off x="839788" y="2057400"/>
-            <a:ext cx="3932237" cy="3811588"/>
+            <a:off x="2519367" y="6035040"/>
+            <a:ext cx="11796711" cy="11180659"/>
           </a:xfrm>
         </p:spPr>
         <p:txBody>
@@ -2315,39 +2314,39 @@
           <a:lstStyle>
             <a:lvl1pPr marL="0" indent="0">
               <a:buNone/>
-              <a:defRPr sz="1600"/>
+              <a:defRPr sz="4141"/>
             </a:lvl1pPr>
-            <a:lvl2pPr marL="457200" indent="0">
-              <a:buNone/>
-              <a:defRPr sz="1400"/>
+            <a:lvl2pPr marL="1183325" indent="0">
+              <a:buNone/>
+              <a:defRPr sz="3623"/>
             </a:lvl2pPr>
-            <a:lvl3pPr marL="914400" indent="0">
-              <a:buNone/>
-              <a:defRPr sz="1200"/>
+            <a:lvl3pPr marL="2366650" indent="0">
+              <a:buNone/>
+              <a:defRPr sz="3106"/>
             </a:lvl3pPr>
-            <a:lvl4pPr marL="1371600" indent="0">
-              <a:buNone/>
-              <a:defRPr sz="1000"/>
+            <a:lvl4pPr marL="3549975" indent="0">
+              <a:buNone/>
+              <a:defRPr sz="2588"/>
             </a:lvl4pPr>
-            <a:lvl5pPr marL="1828800" indent="0">
-              <a:buNone/>
-              <a:defRPr sz="1000"/>
+            <a:lvl5pPr marL="4733300" indent="0">
+              <a:buNone/>
+              <a:defRPr sz="2588"/>
             </a:lvl5pPr>
-            <a:lvl6pPr marL="2286000" indent="0">
-              <a:buNone/>
-              <a:defRPr sz="1000"/>
+            <a:lvl6pPr marL="5916625" indent="0">
+              <a:buNone/>
+              <a:defRPr sz="2588"/>
             </a:lvl6pPr>
-            <a:lvl7pPr marL="2743200" indent="0">
-              <a:buNone/>
-              <a:defRPr sz="1000"/>
+            <a:lvl7pPr marL="7099950" indent="0">
+              <a:buNone/>
+              <a:defRPr sz="2588"/>
             </a:lvl7pPr>
-            <a:lvl8pPr marL="3200400" indent="0">
-              <a:buNone/>
-              <a:defRPr sz="1000"/>
+            <a:lvl8pPr marL="8283275" indent="0">
+              <a:buNone/>
+              <a:defRPr sz="2588"/>
             </a:lvl8pPr>
-            <a:lvl9pPr marL="3657600" indent="0">
-              <a:buNone/>
-              <a:defRPr sz="1000"/>
+            <a:lvl9pPr marL="9466600" indent="0">
+              <a:buNone/>
+              <a:defRPr sz="2588"/>
             </a:lvl9pPr>
           </a:lstStyle>
           <a:p>
@@ -2382,7 +2381,7 @@
           <a:p>
             <a:fld id="{DC3062A3-D9B4-9C49-8A0A-A1736D741080}" type="datetimeFigureOut">
               <a:rPr lang="en-US" smtClean="0"/>
-              <a:t>10/27/25</a:t>
+              <a:t>12/22/2025</a:t>
             </a:fld>
             <a:endParaRPr lang="en-US"/>
           </a:p>
@@ -2490,15 +2489,15 @@
         </p:nvSpPr>
         <p:spPr>
           <a:xfrm>
-            <a:off x="839788" y="457200"/>
-            <a:ext cx="3932237" cy="1600200"/>
+            <a:off x="2519367" y="1341120"/>
+            <a:ext cx="11796711" cy="4693920"/>
           </a:xfrm>
         </p:spPr>
         <p:txBody>
           <a:bodyPr anchor="b"/>
           <a:lstStyle>
             <a:lvl1pPr>
-              <a:defRPr sz="3200"/>
+              <a:defRPr sz="8282"/>
             </a:lvl1pPr>
           </a:lstStyle>
           <a:p>
@@ -2527,8 +2526,8 @@
         </p:nvSpPr>
         <p:spPr>
           <a:xfrm>
-            <a:off x="5183188" y="987425"/>
-            <a:ext cx="6172200" cy="4873625"/>
+            <a:off x="15549564" y="2896447"/>
+            <a:ext cx="18516600" cy="14295968"/>
           </a:xfrm>
         </p:spPr>
         <p:txBody>
@@ -2536,39 +2535,39 @@
           <a:lstStyle>
             <a:lvl1pPr marL="0" indent="0">
               <a:buNone/>
-              <a:defRPr sz="3200"/>
+              <a:defRPr sz="8282"/>
             </a:lvl1pPr>
-            <a:lvl2pPr marL="457200" indent="0">
-              <a:buNone/>
-              <a:defRPr sz="2800"/>
+            <a:lvl2pPr marL="1183325" indent="0">
+              <a:buNone/>
+              <a:defRPr sz="7247"/>
             </a:lvl2pPr>
-            <a:lvl3pPr marL="914400" indent="0">
-              <a:buNone/>
-              <a:defRPr sz="2400"/>
+            <a:lvl3pPr marL="2366650" indent="0">
+              <a:buNone/>
+              <a:defRPr sz="6212"/>
             </a:lvl3pPr>
-            <a:lvl4pPr marL="1371600" indent="0">
-              <a:buNone/>
-              <a:defRPr sz="2000"/>
+            <a:lvl4pPr marL="3549975" indent="0">
+              <a:buNone/>
+              <a:defRPr sz="5176"/>
             </a:lvl4pPr>
-            <a:lvl5pPr marL="1828800" indent="0">
-              <a:buNone/>
-              <a:defRPr sz="2000"/>
+            <a:lvl5pPr marL="4733300" indent="0">
+              <a:buNone/>
+              <a:defRPr sz="5176"/>
             </a:lvl5pPr>
-            <a:lvl6pPr marL="2286000" indent="0">
-              <a:buNone/>
-              <a:defRPr sz="2000"/>
+            <a:lvl6pPr marL="5916625" indent="0">
+              <a:buNone/>
+              <a:defRPr sz="5176"/>
             </a:lvl6pPr>
-            <a:lvl7pPr marL="2743200" indent="0">
-              <a:buNone/>
-              <a:defRPr sz="2000"/>
+            <a:lvl7pPr marL="7099950" indent="0">
+              <a:buNone/>
+              <a:defRPr sz="5176"/>
             </a:lvl7pPr>
-            <a:lvl8pPr marL="3200400" indent="0">
-              <a:buNone/>
-              <a:defRPr sz="2000"/>
+            <a:lvl8pPr marL="8283275" indent="0">
+              <a:buNone/>
+              <a:defRPr sz="5176"/>
             </a:lvl8pPr>
-            <a:lvl9pPr marL="3657600" indent="0">
-              <a:buNone/>
-              <a:defRPr sz="2000"/>
+            <a:lvl9pPr marL="9466600" indent="0">
+              <a:buNone/>
+              <a:defRPr sz="5176"/>
             </a:lvl9pPr>
           </a:lstStyle>
           <a:p>
@@ -2594,8 +2593,8 @@
         </p:nvSpPr>
         <p:spPr>
           <a:xfrm>
-            <a:off x="839788" y="2057400"/>
-            <a:ext cx="3932237" cy="3811588"/>
+            <a:off x="2519367" y="6035040"/>
+            <a:ext cx="11796711" cy="11180659"/>
           </a:xfrm>
         </p:spPr>
         <p:txBody>
@@ -2603,39 +2602,39 @@
           <a:lstStyle>
             <a:lvl1pPr marL="0" indent="0">
               <a:buNone/>
-              <a:defRPr sz="1600"/>
+              <a:defRPr sz="4141"/>
             </a:lvl1pPr>
-            <a:lvl2pPr marL="457200" indent="0">
-              <a:buNone/>
-              <a:defRPr sz="1400"/>
+            <a:lvl2pPr marL="1183325" indent="0">
+              <a:buNone/>
+              <a:defRPr sz="3623"/>
             </a:lvl2pPr>
-            <a:lvl3pPr marL="914400" indent="0">
-              <a:buNone/>
-              <a:defRPr sz="1200"/>
+            <a:lvl3pPr marL="2366650" indent="0">
+              <a:buNone/>
+              <a:defRPr sz="3106"/>
             </a:lvl3pPr>
-            <a:lvl4pPr marL="1371600" indent="0">
-              <a:buNone/>
-              <a:defRPr sz="1000"/>
+            <a:lvl4pPr marL="3549975" indent="0">
+              <a:buNone/>
+              <a:defRPr sz="2588"/>
             </a:lvl4pPr>
-            <a:lvl5pPr marL="1828800" indent="0">
-              <a:buNone/>
-              <a:defRPr sz="1000"/>
+            <a:lvl5pPr marL="4733300" indent="0">
+              <a:buNone/>
+              <a:defRPr sz="2588"/>
             </a:lvl5pPr>
-            <a:lvl6pPr marL="2286000" indent="0">
-              <a:buNone/>
-              <a:defRPr sz="1000"/>
+            <a:lvl6pPr marL="5916625" indent="0">
+              <a:buNone/>
+              <a:defRPr sz="2588"/>
             </a:lvl6pPr>
-            <a:lvl7pPr marL="2743200" indent="0">
-              <a:buNone/>
-              <a:defRPr sz="1000"/>
+            <a:lvl7pPr marL="7099950" indent="0">
+              <a:buNone/>
+              <a:defRPr sz="2588"/>
             </a:lvl7pPr>
-            <a:lvl8pPr marL="3200400" indent="0">
-              <a:buNone/>
-              <a:defRPr sz="1000"/>
+            <a:lvl8pPr marL="8283275" indent="0">
+              <a:buNone/>
+              <a:defRPr sz="2588"/>
             </a:lvl8pPr>
-            <a:lvl9pPr marL="3657600" indent="0">
-              <a:buNone/>
-              <a:defRPr sz="1000"/>
+            <a:lvl9pPr marL="9466600" indent="0">
+              <a:buNone/>
+              <a:defRPr sz="2588"/>
             </a:lvl9pPr>
           </a:lstStyle>
           <a:p>
@@ -2670,7 +2669,7 @@
           <a:p>
             <a:fld id="{DC3062A3-D9B4-9C49-8A0A-A1736D741080}" type="datetimeFigureOut">
               <a:rPr lang="en-US" smtClean="0"/>
-              <a:t>10/27/25</a:t>
+              <a:t>12/22/2025</a:t>
             </a:fld>
             <a:endParaRPr lang="en-US"/>
           </a:p>
@@ -2783,8 +2782,8 @@
         </p:nvSpPr>
         <p:spPr>
           <a:xfrm>
-            <a:off x="838200" y="365125"/>
-            <a:ext cx="10515600" cy="1325563"/>
+            <a:off x="2514600" y="1071036"/>
+            <a:ext cx="31546800" cy="3888319"/>
           </a:xfrm>
           <a:prstGeom prst="rect">
             <a:avLst/>
@@ -2821,8 +2820,8 @@
         </p:nvSpPr>
         <p:spPr>
           <a:xfrm>
-            <a:off x="838200" y="1825625"/>
-            <a:ext cx="10515600" cy="4351338"/>
+            <a:off x="2514600" y="5355167"/>
+            <a:ext cx="31546800" cy="12763924"/>
           </a:xfrm>
           <a:prstGeom prst="rect">
             <a:avLst/>
@@ -2888,8 +2887,8 @@
         </p:nvSpPr>
         <p:spPr>
           <a:xfrm>
-            <a:off x="838200" y="6356350"/>
-            <a:ext cx="2743200" cy="365125"/>
+            <a:off x="2514600" y="18645295"/>
+            <a:ext cx="8229600" cy="1071032"/>
           </a:xfrm>
           <a:prstGeom prst="rect">
             <a:avLst/>
@@ -2899,7 +2898,7 @@
           <a:bodyPr vert="horz" lIns="91440" tIns="45720" rIns="91440" bIns="45720" rtlCol="0" anchor="ctr"/>
           <a:lstStyle>
             <a:lvl1pPr algn="l">
-              <a:defRPr sz="1200">
+              <a:defRPr sz="3106">
                 <a:solidFill>
                   <a:schemeClr val="tx1">
                     <a:tint val="82000"/>
@@ -2911,7 +2910,7 @@
           <a:p>
             <a:fld id="{DC3062A3-D9B4-9C49-8A0A-A1736D741080}" type="datetimeFigureOut">
               <a:rPr lang="en-US" smtClean="0"/>
-              <a:t>10/27/25</a:t>
+              <a:t>12/22/2025</a:t>
             </a:fld>
             <a:endParaRPr lang="en-US"/>
           </a:p>
@@ -2935,8 +2934,8 @@
         </p:nvSpPr>
         <p:spPr>
           <a:xfrm>
-            <a:off x="4038600" y="6356350"/>
-            <a:ext cx="4114800" cy="365125"/>
+            <a:off x="12115800" y="18645295"/>
+            <a:ext cx="12344400" cy="1071032"/>
           </a:xfrm>
           <a:prstGeom prst="rect">
             <a:avLst/>
@@ -2946,7 +2945,7 @@
           <a:bodyPr vert="horz" lIns="91440" tIns="45720" rIns="91440" bIns="45720" rtlCol="0" anchor="ctr"/>
           <a:lstStyle>
             <a:lvl1pPr algn="ctr">
-              <a:defRPr sz="1200">
+              <a:defRPr sz="3106">
                 <a:solidFill>
                   <a:schemeClr val="tx1">
                     <a:tint val="82000"/>
@@ -2978,8 +2977,8 @@
         </p:nvSpPr>
         <p:spPr>
           <a:xfrm>
-            <a:off x="8610600" y="6356350"/>
-            <a:ext cx="2743200" cy="365125"/>
+            <a:off x="25831800" y="18645295"/>
+            <a:ext cx="8229600" cy="1071032"/>
           </a:xfrm>
           <a:prstGeom prst="rect">
             <a:avLst/>
@@ -2989,7 +2988,7 @@
           <a:bodyPr vert="horz" lIns="91440" tIns="45720" rIns="91440" bIns="45720" rtlCol="0" anchor="ctr"/>
           <a:lstStyle>
             <a:lvl1pPr algn="r">
-              <a:defRPr sz="1200">
+              <a:defRPr sz="3106">
                 <a:solidFill>
                   <a:schemeClr val="tx1">
                     <a:tint val="82000"/>
@@ -3030,7 +3029,7 @@
   </p:sldLayoutIdLst>
   <p:txStyles>
     <p:titleStyle>
-      <a:lvl1pPr algn="l" defTabSz="914400" rtl="0" eaLnBrk="1" latinLnBrk="0" hangingPunct="1">
+      <a:lvl1pPr algn="l" defTabSz="2366650" rtl="0" eaLnBrk="1" latinLnBrk="0" hangingPunct="1">
         <a:lnSpc>
           <a:spcPct val="90000"/>
         </a:lnSpc>
@@ -3038,7 +3037,7 @@
           <a:spcPct val="0"/>
         </a:spcBef>
         <a:buNone/>
-        <a:defRPr sz="4400" kern="1200">
+        <a:defRPr sz="11388" kern="1200">
           <a:solidFill>
             <a:schemeClr val="tx1"/>
           </a:solidFill>
@@ -3049,16 +3048,16 @@
       </a:lvl1pPr>
     </p:titleStyle>
     <p:bodyStyle>
-      <a:lvl1pPr marL="228600" indent="-228600" algn="l" defTabSz="914400" rtl="0" eaLnBrk="1" latinLnBrk="0" hangingPunct="1">
+      <a:lvl1pPr marL="591663" indent="-591663" algn="l" defTabSz="2366650" rtl="0" eaLnBrk="1" latinLnBrk="0" hangingPunct="1">
         <a:lnSpc>
           <a:spcPct val="90000"/>
         </a:lnSpc>
         <a:spcBef>
-          <a:spcPts val="1000"/>
+          <a:spcPts val="2588"/>
         </a:spcBef>
         <a:buFont typeface="Arial" panose="020B0604020202020204" pitchFamily="34" charset="0"/>
         <a:buChar char="•"/>
-        <a:defRPr sz="2800" kern="1200">
+        <a:defRPr sz="7247" kern="1200">
           <a:solidFill>
             <a:schemeClr val="tx1"/>
           </a:solidFill>
@@ -3067,16 +3066,16 @@
           <a:cs typeface="+mn-cs"/>
         </a:defRPr>
       </a:lvl1pPr>
-      <a:lvl2pPr marL="685800" indent="-228600" algn="l" defTabSz="914400" rtl="0" eaLnBrk="1" latinLnBrk="0" hangingPunct="1">
+      <a:lvl2pPr marL="1774988" indent="-591663" algn="l" defTabSz="2366650" rtl="0" eaLnBrk="1" latinLnBrk="0" hangingPunct="1">
         <a:lnSpc>
           <a:spcPct val="90000"/>
         </a:lnSpc>
         <a:spcBef>
-          <a:spcPts val="500"/>
+          <a:spcPts val="1294"/>
         </a:spcBef>
         <a:buFont typeface="Arial" panose="020B0604020202020204" pitchFamily="34" charset="0"/>
         <a:buChar char="•"/>
-        <a:defRPr sz="2400" kern="1200">
+        <a:defRPr sz="6212" kern="1200">
           <a:solidFill>
             <a:schemeClr val="tx1"/>
           </a:solidFill>
@@ -3085,16 +3084,16 @@
           <a:cs typeface="+mn-cs"/>
         </a:defRPr>
       </a:lvl2pPr>
-      <a:lvl3pPr marL="1143000" indent="-228600" algn="l" defTabSz="914400" rtl="0" eaLnBrk="1" latinLnBrk="0" hangingPunct="1">
+      <a:lvl3pPr marL="2958313" indent="-591663" algn="l" defTabSz="2366650" rtl="0" eaLnBrk="1" latinLnBrk="0" hangingPunct="1">
         <a:lnSpc>
           <a:spcPct val="90000"/>
         </a:lnSpc>
         <a:spcBef>
-          <a:spcPts val="500"/>
+          <a:spcPts val="1294"/>
         </a:spcBef>
         <a:buFont typeface="Arial" panose="020B0604020202020204" pitchFamily="34" charset="0"/>
         <a:buChar char="•"/>
-        <a:defRPr sz="2000" kern="1200">
+        <a:defRPr sz="5176" kern="1200">
           <a:solidFill>
             <a:schemeClr val="tx1"/>
           </a:solidFill>
@@ -3103,16 +3102,16 @@
           <a:cs typeface="+mn-cs"/>
         </a:defRPr>
       </a:lvl3pPr>
-      <a:lvl4pPr marL="1600200" indent="-228600" algn="l" defTabSz="914400" rtl="0" eaLnBrk="1" latinLnBrk="0" hangingPunct="1">
+      <a:lvl4pPr marL="4141638" indent="-591663" algn="l" defTabSz="2366650" rtl="0" eaLnBrk="1" latinLnBrk="0" hangingPunct="1">
         <a:lnSpc>
           <a:spcPct val="90000"/>
         </a:lnSpc>
         <a:spcBef>
-          <a:spcPts val="500"/>
+          <a:spcPts val="1294"/>
         </a:spcBef>
         <a:buFont typeface="Arial" panose="020B0604020202020204" pitchFamily="34" charset="0"/>
         <a:buChar char="•"/>
-        <a:defRPr sz="1800" kern="1200">
+        <a:defRPr sz="4659" kern="1200">
           <a:solidFill>
             <a:schemeClr val="tx1"/>
           </a:solidFill>
@@ -3121,16 +3120,16 @@
           <a:cs typeface="+mn-cs"/>
         </a:defRPr>
       </a:lvl4pPr>
-      <a:lvl5pPr marL="2057400" indent="-228600" algn="l" defTabSz="914400" rtl="0" eaLnBrk="1" latinLnBrk="0" hangingPunct="1">
+      <a:lvl5pPr marL="5324963" indent="-591663" algn="l" defTabSz="2366650" rtl="0" eaLnBrk="1" latinLnBrk="0" hangingPunct="1">
         <a:lnSpc>
           <a:spcPct val="90000"/>
         </a:lnSpc>
         <a:spcBef>
-          <a:spcPts val="500"/>
+          <a:spcPts val="1294"/>
         </a:spcBef>
         <a:buFont typeface="Arial" panose="020B0604020202020204" pitchFamily="34" charset="0"/>
         <a:buChar char="•"/>
-        <a:defRPr sz="1800" kern="1200">
+        <a:defRPr sz="4659" kern="1200">
           <a:solidFill>
             <a:schemeClr val="tx1"/>
           </a:solidFill>
@@ -3139,16 +3138,16 @@
           <a:cs typeface="+mn-cs"/>
         </a:defRPr>
       </a:lvl5pPr>
-      <a:lvl6pPr marL="2514600" indent="-228600" algn="l" defTabSz="914400" rtl="0" eaLnBrk="1" latinLnBrk="0" hangingPunct="1">
+      <a:lvl6pPr marL="6508288" indent="-591663" algn="l" defTabSz="2366650" rtl="0" eaLnBrk="1" latinLnBrk="0" hangingPunct="1">
         <a:lnSpc>
           <a:spcPct val="90000"/>
         </a:lnSpc>
         <a:spcBef>
-          <a:spcPts val="500"/>
+          <a:spcPts val="1294"/>
         </a:spcBef>
         <a:buFont typeface="Arial" panose="020B0604020202020204" pitchFamily="34" charset="0"/>
         <a:buChar char="•"/>
-        <a:defRPr sz="1800" kern="1200">
+        <a:defRPr sz="4659" kern="1200">
           <a:solidFill>
             <a:schemeClr val="tx1"/>
           </a:solidFill>
@@ -3157,16 +3156,16 @@
           <a:cs typeface="+mn-cs"/>
         </a:defRPr>
       </a:lvl6pPr>
-      <a:lvl7pPr marL="2971800" indent="-228600" algn="l" defTabSz="914400" rtl="0" eaLnBrk="1" latinLnBrk="0" hangingPunct="1">
+      <a:lvl7pPr marL="7691613" indent="-591663" algn="l" defTabSz="2366650" rtl="0" eaLnBrk="1" latinLnBrk="0" hangingPunct="1">
         <a:lnSpc>
           <a:spcPct val="90000"/>
         </a:lnSpc>
         <a:spcBef>
-          <a:spcPts val="500"/>
+          <a:spcPts val="1294"/>
         </a:spcBef>
         <a:buFont typeface="Arial" panose="020B0604020202020204" pitchFamily="34" charset="0"/>
         <a:buChar char="•"/>
-        <a:defRPr sz="1800" kern="1200">
+        <a:defRPr sz="4659" kern="1200">
           <a:solidFill>
             <a:schemeClr val="tx1"/>
           </a:solidFill>
@@ -3175,16 +3174,16 @@
           <a:cs typeface="+mn-cs"/>
         </a:defRPr>
       </a:lvl7pPr>
-      <a:lvl8pPr marL="3429000" indent="-228600" algn="l" defTabSz="914400" rtl="0" eaLnBrk="1" latinLnBrk="0" hangingPunct="1">
+      <a:lvl8pPr marL="8874938" indent="-591663" algn="l" defTabSz="2366650" rtl="0" eaLnBrk="1" latinLnBrk="0" hangingPunct="1">
         <a:lnSpc>
           <a:spcPct val="90000"/>
         </a:lnSpc>
         <a:spcBef>
-          <a:spcPts val="500"/>
+          <a:spcPts val="1294"/>
         </a:spcBef>
         <a:buFont typeface="Arial" panose="020B0604020202020204" pitchFamily="34" charset="0"/>
         <a:buChar char="•"/>
-        <a:defRPr sz="1800" kern="1200">
+        <a:defRPr sz="4659" kern="1200">
           <a:solidFill>
             <a:schemeClr val="tx1"/>
           </a:solidFill>
@@ -3193,16 +3192,16 @@
           <a:cs typeface="+mn-cs"/>
         </a:defRPr>
       </a:lvl8pPr>
-      <a:lvl9pPr marL="3886200" indent="-228600" algn="l" defTabSz="914400" rtl="0" eaLnBrk="1" latinLnBrk="0" hangingPunct="1">
+      <a:lvl9pPr marL="10058263" indent="-591663" algn="l" defTabSz="2366650" rtl="0" eaLnBrk="1" latinLnBrk="0" hangingPunct="1">
         <a:lnSpc>
           <a:spcPct val="90000"/>
         </a:lnSpc>
         <a:spcBef>
-          <a:spcPts val="500"/>
+          <a:spcPts val="1294"/>
         </a:spcBef>
         <a:buFont typeface="Arial" panose="020B0604020202020204" pitchFamily="34" charset="0"/>
         <a:buChar char="•"/>
-        <a:defRPr sz="1800" kern="1200">
+        <a:defRPr sz="4659" kern="1200">
           <a:solidFill>
             <a:schemeClr val="tx1"/>
           </a:solidFill>
@@ -3216,8 +3215,8 @@
       <a:defPPr>
         <a:defRPr lang="en-US"/>
       </a:defPPr>
-      <a:lvl1pPr marL="0" algn="l" defTabSz="914400" rtl="0" eaLnBrk="1" latinLnBrk="0" hangingPunct="1">
-        <a:defRPr sz="1800" kern="1200">
+      <a:lvl1pPr marL="0" algn="l" defTabSz="2366650" rtl="0" eaLnBrk="1" latinLnBrk="0" hangingPunct="1">
+        <a:defRPr sz="4659" kern="1200">
           <a:solidFill>
             <a:schemeClr val="tx1"/>
           </a:solidFill>
@@ -3226,8 +3225,8 @@
           <a:cs typeface="+mn-cs"/>
         </a:defRPr>
       </a:lvl1pPr>
-      <a:lvl2pPr marL="457200" algn="l" defTabSz="914400" rtl="0" eaLnBrk="1" latinLnBrk="0" hangingPunct="1">
-        <a:defRPr sz="1800" kern="1200">
+      <a:lvl2pPr marL="1183325" algn="l" defTabSz="2366650" rtl="0" eaLnBrk="1" latinLnBrk="0" hangingPunct="1">
+        <a:defRPr sz="4659" kern="1200">
           <a:solidFill>
             <a:schemeClr val="tx1"/>
           </a:solidFill>
@@ -3236,8 +3235,8 @@
           <a:cs typeface="+mn-cs"/>
         </a:defRPr>
       </a:lvl2pPr>
-      <a:lvl3pPr marL="914400" algn="l" defTabSz="914400" rtl="0" eaLnBrk="1" latinLnBrk="0" hangingPunct="1">
-        <a:defRPr sz="1800" kern="1200">
+      <a:lvl3pPr marL="2366650" algn="l" defTabSz="2366650" rtl="0" eaLnBrk="1" latinLnBrk="0" hangingPunct="1">
+        <a:defRPr sz="4659" kern="1200">
           <a:solidFill>
             <a:schemeClr val="tx1"/>
           </a:solidFill>
@@ -3246,8 +3245,8 @@
           <a:cs typeface="+mn-cs"/>
         </a:defRPr>
       </a:lvl3pPr>
-      <a:lvl4pPr marL="1371600" algn="l" defTabSz="914400" rtl="0" eaLnBrk="1" latinLnBrk="0" hangingPunct="1">
-        <a:defRPr sz="1800" kern="1200">
+      <a:lvl4pPr marL="3549975" algn="l" defTabSz="2366650" rtl="0" eaLnBrk="1" latinLnBrk="0" hangingPunct="1">
+        <a:defRPr sz="4659" kern="1200">
           <a:solidFill>
             <a:schemeClr val="tx1"/>
           </a:solidFill>
@@ -3256,8 +3255,8 @@
           <a:cs typeface="+mn-cs"/>
         </a:defRPr>
       </a:lvl4pPr>
-      <a:lvl5pPr marL="1828800" algn="l" defTabSz="914400" rtl="0" eaLnBrk="1" latinLnBrk="0" hangingPunct="1">
-        <a:defRPr sz="1800" kern="1200">
+      <a:lvl5pPr marL="4733300" algn="l" defTabSz="2366650" rtl="0" eaLnBrk="1" latinLnBrk="0" hangingPunct="1">
+        <a:defRPr sz="4659" kern="1200">
           <a:solidFill>
             <a:schemeClr val="tx1"/>
           </a:solidFill>
@@ -3266,8 +3265,8 @@
           <a:cs typeface="+mn-cs"/>
         </a:defRPr>
       </a:lvl5pPr>
-      <a:lvl6pPr marL="2286000" algn="l" defTabSz="914400" rtl="0" eaLnBrk="1" latinLnBrk="0" hangingPunct="1">
-        <a:defRPr sz="1800" kern="1200">
+      <a:lvl6pPr marL="5916625" algn="l" defTabSz="2366650" rtl="0" eaLnBrk="1" latinLnBrk="0" hangingPunct="1">
+        <a:defRPr sz="4659" kern="1200">
           <a:solidFill>
             <a:schemeClr val="tx1"/>
           </a:solidFill>
@@ -3276,8 +3275,8 @@
           <a:cs typeface="+mn-cs"/>
         </a:defRPr>
       </a:lvl6pPr>
-      <a:lvl7pPr marL="2743200" algn="l" defTabSz="914400" rtl="0" eaLnBrk="1" latinLnBrk="0" hangingPunct="1">
-        <a:defRPr sz="1800" kern="1200">
+      <a:lvl7pPr marL="7099950" algn="l" defTabSz="2366650" rtl="0" eaLnBrk="1" latinLnBrk="0" hangingPunct="1">
+        <a:defRPr sz="4659" kern="1200">
           <a:solidFill>
             <a:schemeClr val="tx1"/>
           </a:solidFill>
@@ -3286,8 +3285,8 @@
           <a:cs typeface="+mn-cs"/>
         </a:defRPr>
       </a:lvl7pPr>
-      <a:lvl8pPr marL="3200400" algn="l" defTabSz="914400" rtl="0" eaLnBrk="1" latinLnBrk="0" hangingPunct="1">
-        <a:defRPr sz="1800" kern="1200">
+      <a:lvl8pPr marL="8283275" algn="l" defTabSz="2366650" rtl="0" eaLnBrk="1" latinLnBrk="0" hangingPunct="1">
+        <a:defRPr sz="4659" kern="1200">
           <a:solidFill>
             <a:schemeClr val="tx1"/>
           </a:solidFill>
@@ -3296,8 +3295,8 @@
           <a:cs typeface="+mn-cs"/>
         </a:defRPr>
       </a:lvl8pPr>
-      <a:lvl9pPr marL="3657600" algn="l" defTabSz="914400" rtl="0" eaLnBrk="1" latinLnBrk="0" hangingPunct="1">
-        <a:defRPr sz="1800" kern="1200">
+      <a:lvl9pPr marL="9466600" algn="l" defTabSz="2366650" rtl="0" eaLnBrk="1" latinLnBrk="0" hangingPunct="1">
+        <a:defRPr sz="4659" kern="1200">
           <a:solidFill>
             <a:schemeClr val="tx1"/>
           </a:solidFill>
@@ -3328,116 +3327,598 @@
           <a:chExt cx="0" cy="0"/>
         </a:xfrm>
       </p:grpSpPr>
-      <p:grpSp>
-        <p:nvGrpSpPr>
-          <p:cNvPr id="3" name="Group 2">
-            <a:extLst>
-              <a:ext uri="{FF2B5EF4-FFF2-40B4-BE49-F238E27FC236}">
-                <a16:creationId xmlns:a16="http://schemas.microsoft.com/office/drawing/2014/main" id="{84B772C5-6419-006A-35A4-6A8860975FEB}"/>
-              </a:ext>
-            </a:extLst>
-          </p:cNvPr>
-          <p:cNvGrpSpPr/>
+      <p:pic>
+        <p:nvPicPr>
+          <p:cNvPr id="63" name="Picture 62">
+            <a:extLst>
+              <a:ext uri="{FF2B5EF4-FFF2-40B4-BE49-F238E27FC236}">
+                <a16:creationId xmlns:a16="http://schemas.microsoft.com/office/drawing/2014/main" id="{FD40D949-0620-3789-7FE8-9671D47DEF65}"/>
+              </a:ext>
+            </a:extLst>
+          </p:cNvPr>
+          <p:cNvPicPr>
+            <a:picLocks noChangeAspect="1"/>
+          </p:cNvPicPr>
           <p:nvPr/>
-        </p:nvGrpSpPr>
-        <p:grpSpPr>
-          <a:xfrm>
-            <a:off x="1168400" y="482599"/>
-            <a:ext cx="6372437" cy="5029201"/>
-            <a:chOff x="1168400" y="482599"/>
-            <a:chExt cx="6372437" cy="5029201"/>
-          </a:xfrm>
-        </p:grpSpPr>
-        <p:sp>
-          <p:nvSpPr>
-            <p:cNvPr id="2" name="Rounded Rectangle 1">
-              <a:extLst>
-                <a:ext uri="{FF2B5EF4-FFF2-40B4-BE49-F238E27FC236}">
-                  <a16:creationId xmlns:a16="http://schemas.microsoft.com/office/drawing/2014/main" id="{DE4BA2F0-6623-FC5B-7B20-292D0F82B166}"/>
-                </a:ext>
-              </a:extLst>
-            </p:cNvPr>
-            <p:cNvSpPr/>
-            <p:nvPr/>
-          </p:nvSpPr>
-          <p:spPr>
-            <a:xfrm>
-              <a:off x="1168400" y="482599"/>
-              <a:ext cx="6372437" cy="5029201"/>
-            </a:xfrm>
-            <a:prstGeom prst="roundRect">
-              <a:avLst/>
-            </a:prstGeom>
+        </p:nvPicPr>
+        <p:blipFill>
+          <a:blip r:embed="rId2"/>
+          <a:stretch>
+            <a:fillRect/>
+          </a:stretch>
+        </p:blipFill>
+        <p:spPr>
+          <a:xfrm>
+            <a:off x="16134443" y="10934990"/>
+            <a:ext cx="4547616" cy="2743200"/>
+          </a:xfrm>
+          <a:prstGeom prst="rect">
+            <a:avLst/>
+          </a:prstGeom>
+        </p:spPr>
+      </p:pic>
+      <p:pic>
+        <p:nvPicPr>
+          <p:cNvPr id="65" name="Picture 64">
+            <a:extLst>
+              <a:ext uri="{FF2B5EF4-FFF2-40B4-BE49-F238E27FC236}">
+                <a16:creationId xmlns:a16="http://schemas.microsoft.com/office/drawing/2014/main" id="{D6B463B5-5D73-121B-9CFD-D1BBA6130208}"/>
+              </a:ext>
+            </a:extLst>
+          </p:cNvPr>
+          <p:cNvPicPr>
+            <a:picLocks noChangeAspect="1"/>
+          </p:cNvPicPr>
+          <p:nvPr/>
+        </p:nvPicPr>
+        <p:blipFill>
+          <a:blip r:embed="rId3"/>
+          <a:stretch>
+            <a:fillRect/>
+          </a:stretch>
+        </p:blipFill>
+        <p:spPr>
+          <a:xfrm>
+            <a:off x="16233809" y="8532211"/>
+            <a:ext cx="3789680" cy="2286000"/>
+          </a:xfrm>
+          <a:prstGeom prst="rect">
+            <a:avLst/>
+          </a:prstGeom>
+        </p:spPr>
+      </p:pic>
+      <p:pic>
+        <p:nvPicPr>
+          <p:cNvPr id="61" name="Picture 60">
+            <a:extLst>
+              <a:ext uri="{FF2B5EF4-FFF2-40B4-BE49-F238E27FC236}">
+                <a16:creationId xmlns:a16="http://schemas.microsoft.com/office/drawing/2014/main" id="{76174F9E-2815-4438-094E-BA7219CE579C}"/>
+              </a:ext>
+            </a:extLst>
+          </p:cNvPr>
+          <p:cNvPicPr>
+            <a:picLocks noChangeAspect="1"/>
+          </p:cNvPicPr>
+          <p:nvPr/>
+        </p:nvPicPr>
+        <p:blipFill>
+          <a:blip r:embed="rId4"/>
+          <a:stretch>
+            <a:fillRect/>
+          </a:stretch>
+        </p:blipFill>
+        <p:spPr>
+          <a:xfrm>
+            <a:off x="19777271" y="8191790"/>
+            <a:ext cx="9095232" cy="5486400"/>
+          </a:xfrm>
+          <a:prstGeom prst="rect">
+            <a:avLst/>
+          </a:prstGeom>
+        </p:spPr>
+      </p:pic>
+      <p:pic>
+        <p:nvPicPr>
+          <p:cNvPr id="50" name="Picture 49">
+            <a:extLst>
+              <a:ext uri="{FF2B5EF4-FFF2-40B4-BE49-F238E27FC236}">
+                <a16:creationId xmlns:a16="http://schemas.microsoft.com/office/drawing/2014/main" id="{7E6D7348-FEDA-5048-D492-4CA17A267878}"/>
+              </a:ext>
+            </a:extLst>
+          </p:cNvPr>
+          <p:cNvPicPr>
+            <a:picLocks noChangeAspect="1"/>
+          </p:cNvPicPr>
+          <p:nvPr/>
+        </p:nvPicPr>
+        <p:blipFill>
+          <a:blip r:embed="rId5"/>
+          <a:stretch>
+            <a:fillRect/>
+          </a:stretch>
+        </p:blipFill>
+        <p:spPr>
+          <a:xfrm>
+            <a:off x="16134443" y="5287879"/>
+            <a:ext cx="3789680" cy="2286000"/>
+          </a:xfrm>
+          <a:prstGeom prst="rect">
+            <a:avLst/>
+          </a:prstGeom>
+        </p:spPr>
+      </p:pic>
+      <p:pic>
+        <p:nvPicPr>
+          <p:cNvPr id="40" name="Picture 39">
+            <a:extLst>
+              <a:ext uri="{FF2B5EF4-FFF2-40B4-BE49-F238E27FC236}">
+                <a16:creationId xmlns:a16="http://schemas.microsoft.com/office/drawing/2014/main" id="{4A4CF812-75FA-9FF2-B607-3FB21BEECA98}"/>
+              </a:ext>
+            </a:extLst>
+          </p:cNvPr>
+          <p:cNvPicPr>
+            <a:picLocks noChangeAspect="1"/>
+          </p:cNvPicPr>
+          <p:nvPr/>
+        </p:nvPicPr>
+        <p:blipFill>
+          <a:blip r:embed="rId6"/>
+          <a:stretch>
+            <a:fillRect/>
+          </a:stretch>
+        </p:blipFill>
+        <p:spPr>
+          <a:xfrm>
+            <a:off x="19736136" y="2606503"/>
+            <a:ext cx="9095232" cy="5486400"/>
+          </a:xfrm>
+          <a:prstGeom prst="rect">
+            <a:avLst/>
+          </a:prstGeom>
+        </p:spPr>
+      </p:pic>
+      <p:pic>
+        <p:nvPicPr>
+          <p:cNvPr id="52" name="Picture 51">
+            <a:extLst>
+              <a:ext uri="{FF2B5EF4-FFF2-40B4-BE49-F238E27FC236}">
+                <a16:creationId xmlns:a16="http://schemas.microsoft.com/office/drawing/2014/main" id="{ED86F7DC-05D6-720E-2BDE-E48DE5F5B524}"/>
+              </a:ext>
+            </a:extLst>
+          </p:cNvPr>
+          <p:cNvPicPr>
+            <a:picLocks noChangeAspect="1"/>
+          </p:cNvPicPr>
+          <p:nvPr/>
+        </p:nvPicPr>
+        <p:blipFill>
+          <a:blip r:embed="rId7"/>
+          <a:stretch>
+            <a:fillRect/>
+          </a:stretch>
+        </p:blipFill>
+        <p:spPr>
+          <a:xfrm>
+            <a:off x="15597288" y="2938076"/>
+            <a:ext cx="4547616" cy="2743200"/>
+          </a:xfrm>
+          <a:prstGeom prst="rect">
+            <a:avLst/>
+          </a:prstGeom>
+        </p:spPr>
+      </p:pic>
+      <p:pic>
+        <p:nvPicPr>
+          <p:cNvPr id="36" name="Picture 35">
+            <a:extLst>
+              <a:ext uri="{FF2B5EF4-FFF2-40B4-BE49-F238E27FC236}">
+                <a16:creationId xmlns:a16="http://schemas.microsoft.com/office/drawing/2014/main" id="{E62CDE0A-6357-FE26-DA56-7CE6BE2A6835}"/>
+              </a:ext>
+            </a:extLst>
+          </p:cNvPr>
+          <p:cNvPicPr>
+            <a:picLocks noChangeAspect="1"/>
+          </p:cNvPicPr>
+          <p:nvPr/>
+        </p:nvPicPr>
+        <p:blipFill>
+          <a:blip r:embed="rId8"/>
+          <a:stretch>
+            <a:fillRect/>
+          </a:stretch>
+        </p:blipFill>
+        <p:spPr>
+          <a:xfrm>
+            <a:off x="4081941" y="5600497"/>
+            <a:ext cx="3789680" cy="2286000"/>
+          </a:xfrm>
+          <a:prstGeom prst="rect">
+            <a:avLst/>
+          </a:prstGeom>
+        </p:spPr>
+      </p:pic>
+      <p:pic>
+        <p:nvPicPr>
+          <p:cNvPr id="33" name="Picture 32">
+            <a:extLst>
+              <a:ext uri="{FF2B5EF4-FFF2-40B4-BE49-F238E27FC236}">
+                <a16:creationId xmlns:a16="http://schemas.microsoft.com/office/drawing/2014/main" id="{F7C5877A-CA37-A9FC-A1D3-87B1E447D410}"/>
+              </a:ext>
+            </a:extLst>
+          </p:cNvPr>
+          <p:cNvPicPr>
+            <a:picLocks noChangeAspect="1"/>
+          </p:cNvPicPr>
+          <p:nvPr/>
+        </p:nvPicPr>
+        <p:blipFill>
+          <a:blip r:embed="rId9"/>
+          <a:stretch>
+            <a:fillRect/>
+          </a:stretch>
+        </p:blipFill>
+        <p:spPr>
+          <a:xfrm>
+            <a:off x="3702973" y="2856386"/>
+            <a:ext cx="4547616" cy="2743200"/>
+          </a:xfrm>
+          <a:prstGeom prst="rect">
+            <a:avLst/>
+          </a:prstGeom>
+        </p:spPr>
+      </p:pic>
+      <p:pic>
+        <p:nvPicPr>
+          <p:cNvPr id="30" name="Picture 29">
+            <a:extLst>
+              <a:ext uri="{FF2B5EF4-FFF2-40B4-BE49-F238E27FC236}">
+                <a16:creationId xmlns:a16="http://schemas.microsoft.com/office/drawing/2014/main" id="{881A7378-2625-45C8-BE9F-CB5C9C537090}"/>
+              </a:ext>
+            </a:extLst>
+          </p:cNvPr>
+          <p:cNvPicPr>
+            <a:picLocks noChangeAspect="1"/>
+          </p:cNvPicPr>
+          <p:nvPr/>
+        </p:nvPicPr>
+        <p:blipFill>
+          <a:blip r:embed="rId10"/>
+          <a:stretch>
+            <a:fillRect/>
+          </a:stretch>
+        </p:blipFill>
+        <p:spPr>
+          <a:xfrm>
+            <a:off x="7418563" y="2606503"/>
+            <a:ext cx="9095231" cy="5486400"/>
+          </a:xfrm>
+          <a:prstGeom prst="rect">
+            <a:avLst/>
+          </a:prstGeom>
+        </p:spPr>
+      </p:pic>
+      <p:sp>
+        <p:nvSpPr>
+          <p:cNvPr id="17" name="TextBox 16">
+            <a:extLst>
+              <a:ext uri="{FF2B5EF4-FFF2-40B4-BE49-F238E27FC236}">
+                <a16:creationId xmlns:a16="http://schemas.microsoft.com/office/drawing/2014/main" id="{572B3714-305B-A373-BC26-A038ACDDDCF7}"/>
+              </a:ext>
+            </a:extLst>
+          </p:cNvPr>
+          <p:cNvSpPr txBox="1"/>
+          <p:nvPr/>
+        </p:nvSpPr>
+        <p:spPr>
+          <a:xfrm>
+            <a:off x="13643484" y="14776691"/>
+            <a:ext cx="7385933" cy="707886"/>
+          </a:xfrm>
+          <a:prstGeom prst="rect">
+            <a:avLst/>
+          </a:prstGeom>
+          <a:noFill/>
+        </p:spPr>
+        <p:txBody>
+          <a:bodyPr wrap="none" rtlCol="0">
+            <a:spAutoFit/>
+          </a:bodyPr>
+          <a:lstStyle/>
+          <a:p>
+            <a:r>
+              <a:rPr lang="en-US" sz="4000" b="1" dirty="0"/>
+              <a:t>Coarse-graining method: mean</a:t>
+            </a:r>
+          </a:p>
+        </p:txBody>
+      </p:sp>
+      <p:sp>
+        <p:nvSpPr>
+          <p:cNvPr id="3" name="Rectangle 2">
+            <a:extLst>
+              <a:ext uri="{FF2B5EF4-FFF2-40B4-BE49-F238E27FC236}">
+                <a16:creationId xmlns:a16="http://schemas.microsoft.com/office/drawing/2014/main" id="{9FA6DA41-D944-0E88-B621-311F95512A6E}"/>
+              </a:ext>
+            </a:extLst>
+          </p:cNvPr>
+          <p:cNvSpPr/>
+          <p:nvPr/>
+        </p:nvSpPr>
+        <p:spPr>
+          <a:xfrm>
+            <a:off x="4286250" y="2611079"/>
+            <a:ext cx="24136350" cy="11238271"/>
+          </a:xfrm>
+          <a:prstGeom prst="rect">
+            <a:avLst/>
+          </a:prstGeom>
+          <a:noFill/>
+        </p:spPr>
+        <p:style>
+          <a:lnRef idx="2">
+            <a:schemeClr val="accent1">
+              <a:shade val="15000"/>
+            </a:schemeClr>
+          </a:lnRef>
+          <a:fillRef idx="1">
+            <a:schemeClr val="accent1"/>
+          </a:fillRef>
+          <a:effectRef idx="0">
+            <a:schemeClr val="accent1"/>
+          </a:effectRef>
+          <a:fontRef idx="minor">
+            <a:schemeClr val="lt1"/>
+          </a:fontRef>
+        </p:style>
+        <p:txBody>
+          <a:bodyPr rtlCol="0" anchor="ctr"/>
+          <a:lstStyle/>
+          <a:p>
+            <a:pPr algn="ctr"/>
+            <a:endParaRPr lang="en-US" sz="10845"/>
+          </a:p>
+        </p:txBody>
+      </p:sp>
+      <p:sp>
+        <p:nvSpPr>
+          <p:cNvPr id="9" name="TextBox 8">
+            <a:extLst>
+              <a:ext uri="{FF2B5EF4-FFF2-40B4-BE49-F238E27FC236}">
+                <a16:creationId xmlns:a16="http://schemas.microsoft.com/office/drawing/2014/main" id="{EED9BD31-B569-8A46-0539-D698B8AB736A}"/>
+              </a:ext>
+            </a:extLst>
+          </p:cNvPr>
+          <p:cNvSpPr txBox="1"/>
+          <p:nvPr/>
+        </p:nvSpPr>
+        <p:spPr>
+          <a:xfrm>
+            <a:off x="15601975" y="7561806"/>
+            <a:ext cx="449900" cy="553998"/>
+          </a:xfrm>
+          <a:prstGeom prst="rect">
+            <a:avLst/>
+          </a:prstGeom>
+          <a:noFill/>
+          <a:ln>
             <a:solidFill>
-              <a:schemeClr val="bg1"/>
+              <a:schemeClr val="tx1"/>
             </a:solidFill>
-            <a:ln>
-              <a:solidFill>
-                <a:schemeClr val="tx1"/>
-              </a:solidFill>
-            </a:ln>
-          </p:spPr>
-          <p:style>
-            <a:lnRef idx="2">
-              <a:schemeClr val="accent1">
-                <a:shade val="15000"/>
-              </a:schemeClr>
-            </a:lnRef>
-            <a:fillRef idx="1">
-              <a:schemeClr val="accent1"/>
-            </a:fillRef>
-            <a:effectRef idx="0">
-              <a:schemeClr val="accent1"/>
-            </a:effectRef>
-            <a:fontRef idx="minor">
-              <a:schemeClr val="lt1"/>
-            </a:fontRef>
-          </p:style>
-          <p:txBody>
-            <a:bodyPr rtlCol="0" anchor="ctr"/>
-            <a:lstStyle/>
-            <a:p>
-              <a:pPr algn="ctr"/>
-              <a:endParaRPr lang="en-US"/>
-            </a:p>
-          </p:txBody>
-        </p:sp>
-        <p:pic>
-          <p:nvPicPr>
-            <p:cNvPr id="5" name="Picture 4" descr="A diagram of different types of objects with Ice hockey rink in the background&#10;&#10;AI-generated content may be incorrect.">
-              <a:extLst>
-                <a:ext uri="{FF2B5EF4-FFF2-40B4-BE49-F238E27FC236}">
-                  <a16:creationId xmlns:a16="http://schemas.microsoft.com/office/drawing/2014/main" id="{42F98B71-2A50-CD57-978F-09D72D9ACEA3}"/>
-                </a:ext>
-              </a:extLst>
-            </p:cNvPr>
-            <p:cNvPicPr>
-              <a:picLocks noChangeAspect="1"/>
-            </p:cNvPicPr>
-            <p:nvPr/>
-          </p:nvPicPr>
-          <p:blipFill>
-            <a:blip r:embed="rId2"/>
-            <a:srcRect l="18012" t="1783" r="7587" b="7640"/>
-            <a:stretch>
-              <a:fillRect/>
-            </a:stretch>
-          </p:blipFill>
-          <p:spPr>
-            <a:xfrm>
-              <a:off x="1380066" y="872065"/>
-              <a:ext cx="5782735" cy="4250268"/>
-            </a:xfrm>
-            <a:prstGeom prst="rect">
-              <a:avLst/>
-            </a:prstGeom>
-          </p:spPr>
-        </p:pic>
-      </p:grpSp>
+          </a:ln>
+        </p:spPr>
+        <p:txBody>
+          <a:bodyPr wrap="square" rtlCol="0">
+            <a:spAutoFit/>
+          </a:bodyPr>
+          <a:lstStyle/>
+          <a:p>
+            <a:r>
+              <a:rPr lang="en-US" sz="3000" b="1" dirty="0"/>
+              <a:t>A</a:t>
+            </a:r>
+          </a:p>
+        </p:txBody>
+      </p:sp>
+      <p:cxnSp>
+        <p:nvCxnSpPr>
+          <p:cNvPr id="12" name="Straight Connector 11">
+            <a:extLst>
+              <a:ext uri="{FF2B5EF4-FFF2-40B4-BE49-F238E27FC236}">
+                <a16:creationId xmlns:a16="http://schemas.microsoft.com/office/drawing/2014/main" id="{83EDCD52-C4EC-243F-3058-9929997F8CD9}"/>
+              </a:ext>
+            </a:extLst>
+          </p:cNvPr>
+          <p:cNvCxnSpPr>
+            <a:cxnSpLocks/>
+          </p:cNvCxnSpPr>
+          <p:nvPr/>
+        </p:nvCxnSpPr>
+        <p:spPr>
+          <a:xfrm flipH="1">
+            <a:off x="4286250" y="8115300"/>
+            <a:ext cx="24136350" cy="0"/>
+          </a:xfrm>
+          <a:prstGeom prst="line">
+            <a:avLst/>
+          </a:prstGeom>
+        </p:spPr>
+        <p:style>
+          <a:lnRef idx="2">
+            <a:schemeClr val="dk1"/>
+          </a:lnRef>
+          <a:fillRef idx="0">
+            <a:schemeClr val="dk1"/>
+          </a:fillRef>
+          <a:effectRef idx="1">
+            <a:schemeClr val="dk1"/>
+          </a:effectRef>
+          <a:fontRef idx="minor">
+            <a:schemeClr val="tx1"/>
+          </a:fontRef>
+        </p:style>
+      </p:cxnSp>
+      <p:sp>
+        <p:nvSpPr>
+          <p:cNvPr id="19" name="TextBox 18">
+            <a:extLst>
+              <a:ext uri="{FF2B5EF4-FFF2-40B4-BE49-F238E27FC236}">
+                <a16:creationId xmlns:a16="http://schemas.microsoft.com/office/drawing/2014/main" id="{02A043D9-E1DA-93C4-6451-46D9D40BE8C4}"/>
+              </a:ext>
+            </a:extLst>
+          </p:cNvPr>
+          <p:cNvSpPr txBox="1"/>
+          <p:nvPr/>
+        </p:nvSpPr>
+        <p:spPr>
+          <a:xfrm>
+            <a:off x="16062604" y="7561302"/>
+            <a:ext cx="460994" cy="553998"/>
+          </a:xfrm>
+          <a:prstGeom prst="rect">
+            <a:avLst/>
+          </a:prstGeom>
+          <a:noFill/>
+          <a:ln>
+            <a:solidFill>
+              <a:schemeClr val="tx1"/>
+            </a:solidFill>
+          </a:ln>
+        </p:spPr>
+        <p:txBody>
+          <a:bodyPr wrap="square" rtlCol="0">
+            <a:spAutoFit/>
+          </a:bodyPr>
+          <a:lstStyle/>
+          <a:p>
+            <a:r>
+              <a:rPr lang="en-US" sz="3000" b="1" dirty="0"/>
+              <a:t>B</a:t>
+            </a:r>
+          </a:p>
+        </p:txBody>
+      </p:sp>
+      <p:sp>
+        <p:nvSpPr>
+          <p:cNvPr id="20" name="TextBox 19">
+            <a:extLst>
+              <a:ext uri="{FF2B5EF4-FFF2-40B4-BE49-F238E27FC236}">
+                <a16:creationId xmlns:a16="http://schemas.microsoft.com/office/drawing/2014/main" id="{DC6932B5-88E3-0203-E098-6A05BB44B1DA}"/>
+              </a:ext>
+            </a:extLst>
+          </p:cNvPr>
+          <p:cNvSpPr txBox="1"/>
+          <p:nvPr/>
+        </p:nvSpPr>
+        <p:spPr>
+          <a:xfrm>
+            <a:off x="15597288" y="8115300"/>
+            <a:ext cx="457176" cy="553998"/>
+          </a:xfrm>
+          <a:prstGeom prst="rect">
+            <a:avLst/>
+          </a:prstGeom>
+          <a:noFill/>
+          <a:ln>
+            <a:solidFill>
+              <a:schemeClr val="tx1"/>
+            </a:solidFill>
+          </a:ln>
+        </p:spPr>
+        <p:txBody>
+          <a:bodyPr wrap="none" rtlCol="0">
+            <a:spAutoFit/>
+          </a:bodyPr>
+          <a:lstStyle/>
+          <a:p>
+            <a:r>
+              <a:rPr lang="en-US" sz="3000" b="1" dirty="0"/>
+              <a:t>C</a:t>
+            </a:r>
+          </a:p>
+        </p:txBody>
+      </p:sp>
+      <p:sp>
+        <p:nvSpPr>
+          <p:cNvPr id="22" name="TextBox 21">
+            <a:extLst>
+              <a:ext uri="{FF2B5EF4-FFF2-40B4-BE49-F238E27FC236}">
+                <a16:creationId xmlns:a16="http://schemas.microsoft.com/office/drawing/2014/main" id="{6F6EEAFE-F2FB-E758-5CAA-AF321B69DBA6}"/>
+              </a:ext>
+            </a:extLst>
+          </p:cNvPr>
+          <p:cNvSpPr txBox="1"/>
+          <p:nvPr/>
+        </p:nvSpPr>
+        <p:spPr>
+          <a:xfrm>
+            <a:off x="16059150" y="8115300"/>
+            <a:ext cx="457176" cy="553998"/>
+          </a:xfrm>
+          <a:prstGeom prst="rect">
+            <a:avLst/>
+          </a:prstGeom>
+          <a:noFill/>
+          <a:ln>
+            <a:solidFill>
+              <a:schemeClr val="tx1"/>
+            </a:solidFill>
+          </a:ln>
+        </p:spPr>
+        <p:txBody>
+          <a:bodyPr wrap="none" rtlCol="0">
+            <a:spAutoFit/>
+          </a:bodyPr>
+          <a:lstStyle/>
+          <a:p>
+            <a:r>
+              <a:rPr lang="en-US" sz="3000" b="1" dirty="0"/>
+              <a:t>D</a:t>
+            </a:r>
+          </a:p>
+        </p:txBody>
+      </p:sp>
+      <p:cxnSp>
+        <p:nvCxnSpPr>
+          <p:cNvPr id="11" name="Straight Connector 10">
+            <a:extLst>
+              <a:ext uri="{FF2B5EF4-FFF2-40B4-BE49-F238E27FC236}">
+                <a16:creationId xmlns:a16="http://schemas.microsoft.com/office/drawing/2014/main" id="{35806F4A-2051-6D1D-11B8-9A411C4D7D55}"/>
+              </a:ext>
+            </a:extLst>
+          </p:cNvPr>
+          <p:cNvCxnSpPr>
+            <a:cxnSpLocks/>
+          </p:cNvCxnSpPr>
+          <p:nvPr/>
+        </p:nvCxnSpPr>
+        <p:spPr>
+          <a:xfrm>
+            <a:off x="16051875" y="2606503"/>
+            <a:ext cx="0" cy="11242847"/>
+          </a:xfrm>
+          <a:prstGeom prst="line">
+            <a:avLst/>
+          </a:prstGeom>
+        </p:spPr>
+        <p:style>
+          <a:lnRef idx="2">
+            <a:schemeClr val="dk1"/>
+          </a:lnRef>
+          <a:fillRef idx="0">
+            <a:schemeClr val="dk1"/>
+          </a:fillRef>
+          <a:effectRef idx="1">
+            <a:schemeClr val="dk1"/>
+          </a:effectRef>
+          <a:fontRef idx="minor">
+            <a:schemeClr val="tx1"/>
+          </a:fontRef>
+        </p:style>
+      </p:cxnSp>
     </p:spTree>
     <p:extLst>
       <p:ext uri="{BB962C8B-B14F-4D97-AF65-F5344CB8AC3E}">
-        <p14:creationId xmlns:p14="http://schemas.microsoft.com/office/powerpoint/2010/main" val="3428692029"/>
+        <p14:creationId xmlns:p14="http://schemas.microsoft.com/office/powerpoint/2010/main" val="2948164643"/>
       </p:ext>
     </p:extLst>
   </p:cSld>
@@ -3452,676 +3933,10 @@
   <p:cSld>
     <p:spTree>
       <p:nvGrpSpPr>
-        <p:cNvPr id="1" name=""/>
-        <p:cNvGrpSpPr/>
-        <p:nvPr/>
-      </p:nvGrpSpPr>
-      <p:grpSpPr>
-        <a:xfrm>
-          <a:off x="0" y="0"/>
-          <a:ext cx="0" cy="0"/>
-          <a:chOff x="0" y="0"/>
-          <a:chExt cx="0" cy="0"/>
-        </a:xfrm>
-      </p:grpSpPr>
-      <p:grpSp>
-        <p:nvGrpSpPr>
-          <p:cNvPr id="40" name="Group 39">
-            <a:extLst>
-              <a:ext uri="{FF2B5EF4-FFF2-40B4-BE49-F238E27FC236}">
-                <a16:creationId xmlns:a16="http://schemas.microsoft.com/office/drawing/2014/main" id="{B5DD8526-35DF-BE1D-41F8-4A81CDAA70F3}"/>
-              </a:ext>
-            </a:extLst>
-          </p:cNvPr>
-          <p:cNvGrpSpPr/>
-          <p:nvPr/>
-        </p:nvGrpSpPr>
-        <p:grpSpPr>
-          <a:xfrm>
-            <a:off x="203200" y="435700"/>
-            <a:ext cx="8966200" cy="5088466"/>
-            <a:chOff x="203200" y="237067"/>
-            <a:chExt cx="8966200" cy="5088466"/>
-          </a:xfrm>
-        </p:grpSpPr>
-        <p:sp>
-          <p:nvSpPr>
-            <p:cNvPr id="39" name="Rounded Rectangle 38">
-              <a:extLst>
-                <a:ext uri="{FF2B5EF4-FFF2-40B4-BE49-F238E27FC236}">
-                  <a16:creationId xmlns:a16="http://schemas.microsoft.com/office/drawing/2014/main" id="{B2FC92A2-9BD6-FB0F-FC98-B1F08FB260E9}"/>
-                </a:ext>
-              </a:extLst>
-            </p:cNvPr>
-            <p:cNvSpPr/>
-            <p:nvPr/>
-          </p:nvSpPr>
-          <p:spPr>
-            <a:xfrm>
-              <a:off x="203200" y="237067"/>
-              <a:ext cx="8966200" cy="5088466"/>
-            </a:xfrm>
-            <a:prstGeom prst="roundRect">
-              <a:avLst/>
-            </a:prstGeom>
-            <a:solidFill>
-              <a:schemeClr val="bg1"/>
-            </a:solidFill>
-            <a:ln>
-              <a:solidFill>
-                <a:schemeClr val="tx1"/>
-              </a:solidFill>
-            </a:ln>
-          </p:spPr>
-          <p:style>
-            <a:lnRef idx="2">
-              <a:schemeClr val="accent1">
-                <a:shade val="15000"/>
-              </a:schemeClr>
-            </a:lnRef>
-            <a:fillRef idx="1">
-              <a:schemeClr val="accent1"/>
-            </a:fillRef>
-            <a:effectRef idx="0">
-              <a:schemeClr val="accent1"/>
-            </a:effectRef>
-            <a:fontRef idx="minor">
-              <a:schemeClr val="lt1"/>
-            </a:fontRef>
-          </p:style>
-          <p:txBody>
-            <a:bodyPr rtlCol="0" anchor="ctr"/>
-            <a:lstStyle/>
-            <a:p>
-              <a:pPr algn="ctr"/>
-              <a:endParaRPr lang="en-US"/>
-            </a:p>
-          </p:txBody>
-        </p:sp>
-        <p:grpSp>
-          <p:nvGrpSpPr>
-            <p:cNvPr id="38" name="Group 37">
-              <a:extLst>
-                <a:ext uri="{FF2B5EF4-FFF2-40B4-BE49-F238E27FC236}">
-                  <a16:creationId xmlns:a16="http://schemas.microsoft.com/office/drawing/2014/main" id="{6934853E-E174-8AA8-4879-9217F236CF32}"/>
-                </a:ext>
-              </a:extLst>
-            </p:cNvPr>
-            <p:cNvGrpSpPr/>
-            <p:nvPr/>
-          </p:nvGrpSpPr>
-          <p:grpSpPr>
-            <a:xfrm>
-              <a:off x="340784" y="508456"/>
-              <a:ext cx="8643523" cy="4341643"/>
-              <a:chOff x="340784" y="508456"/>
-              <a:chExt cx="8643523" cy="4341643"/>
-            </a:xfrm>
-          </p:grpSpPr>
-          <p:sp>
-            <p:nvSpPr>
-              <p:cNvPr id="2" name="TextBox 1">
-                <a:extLst>
-                  <a:ext uri="{FF2B5EF4-FFF2-40B4-BE49-F238E27FC236}">
-                    <a16:creationId xmlns:a16="http://schemas.microsoft.com/office/drawing/2014/main" id="{00E52D28-0530-01BA-832C-79C7F59C204F}"/>
-                  </a:ext>
-                </a:extLst>
-              </p:cNvPr>
-              <p:cNvSpPr txBox="1"/>
-              <p:nvPr/>
-            </p:nvSpPr>
-            <p:spPr>
-              <a:xfrm>
-                <a:off x="3054381" y="2518832"/>
-                <a:ext cx="389850" cy="215444"/>
-              </a:xfrm>
-              <a:prstGeom prst="rect">
-                <a:avLst/>
-              </a:prstGeom>
-              <a:noFill/>
-            </p:spPr>
-            <p:txBody>
-              <a:bodyPr wrap="none" rtlCol="0">
-                <a:spAutoFit/>
-              </a:bodyPr>
-              <a:lstStyle/>
-              <a:p>
-                <a:r>
-                  <a:rPr lang="en-US" sz="800" b="1" dirty="0"/>
-                  <a:t>MSE</a:t>
-                </a:r>
-              </a:p>
-            </p:txBody>
-          </p:sp>
-          <p:pic>
-            <p:nvPicPr>
-              <p:cNvPr id="4" name="Picture 3" descr="A graph with red and white lines&#10;&#10;AI-generated content may be incorrect.">
-                <a:extLst>
-                  <a:ext uri="{FF2B5EF4-FFF2-40B4-BE49-F238E27FC236}">
-                    <a16:creationId xmlns:a16="http://schemas.microsoft.com/office/drawing/2014/main" id="{FB5C3193-2E18-4C28-70AE-821C55374275}"/>
-                  </a:ext>
-                </a:extLst>
-              </p:cNvPr>
-              <p:cNvPicPr>
-                <a:picLocks noChangeAspect="1"/>
-              </p:cNvPicPr>
-              <p:nvPr/>
-            </p:nvPicPr>
-            <p:blipFill>
-              <a:blip r:embed="rId2"/>
-              <a:stretch>
-                <a:fillRect/>
-              </a:stretch>
-            </p:blipFill>
-            <p:spPr>
-              <a:xfrm>
-                <a:off x="1768581" y="723900"/>
-                <a:ext cx="3029185" cy="1828800"/>
-              </a:xfrm>
-              <a:prstGeom prst="rect">
-                <a:avLst/>
-              </a:prstGeom>
-            </p:spPr>
-          </p:pic>
-          <p:pic>
-            <p:nvPicPr>
-              <p:cNvPr id="8" name="Picture 7" descr="A graph with red and white stripes&#10;&#10;AI-generated content may be incorrect.">
-                <a:extLst>
-                  <a:ext uri="{FF2B5EF4-FFF2-40B4-BE49-F238E27FC236}">
-                    <a16:creationId xmlns:a16="http://schemas.microsoft.com/office/drawing/2014/main" id="{C945C8BC-4DB2-5713-4D38-26D0D8DA79F2}"/>
-                  </a:ext>
-                </a:extLst>
-              </p:cNvPr>
-              <p:cNvPicPr>
-                <a:picLocks noChangeAspect="1"/>
-              </p:cNvPicPr>
-              <p:nvPr/>
-            </p:nvPicPr>
-            <p:blipFill>
-              <a:blip r:embed="rId3"/>
-              <a:stretch>
-                <a:fillRect/>
-              </a:stretch>
-            </p:blipFill>
-            <p:spPr>
-              <a:xfrm>
-                <a:off x="4573898" y="723900"/>
-                <a:ext cx="3029185" cy="1828800"/>
-              </a:xfrm>
-              <a:prstGeom prst="rect">
-                <a:avLst/>
-              </a:prstGeom>
-            </p:spPr>
-          </p:pic>
-          <p:pic>
-            <p:nvPicPr>
-              <p:cNvPr id="10" name="Picture 9" descr="A red and white graph&#10;&#10;AI-generated content may be incorrect.">
-                <a:extLst>
-                  <a:ext uri="{FF2B5EF4-FFF2-40B4-BE49-F238E27FC236}">
-                    <a16:creationId xmlns:a16="http://schemas.microsoft.com/office/drawing/2014/main" id="{78D23DDD-1EA5-FF25-B217-5910774A5437}"/>
-                  </a:ext>
-                </a:extLst>
-              </p:cNvPr>
-              <p:cNvPicPr>
-                <a:picLocks noChangeAspect="1"/>
-              </p:cNvPicPr>
-              <p:nvPr/>
-            </p:nvPicPr>
-            <p:blipFill>
-              <a:blip r:embed="rId4"/>
-              <a:stretch>
-                <a:fillRect/>
-              </a:stretch>
-            </p:blipFill>
-            <p:spPr>
-              <a:xfrm>
-                <a:off x="1756388" y="2884333"/>
-                <a:ext cx="3029185" cy="1828800"/>
-              </a:xfrm>
-              <a:prstGeom prst="rect">
-                <a:avLst/>
-              </a:prstGeom>
-            </p:spPr>
-          </p:pic>
-          <p:pic>
-            <p:nvPicPr>
-              <p:cNvPr id="12" name="Picture 11" descr="A graph with red and white stripes&#10;&#10;AI-generated content may be incorrect.">
-                <a:extLst>
-                  <a:ext uri="{FF2B5EF4-FFF2-40B4-BE49-F238E27FC236}">
-                    <a16:creationId xmlns:a16="http://schemas.microsoft.com/office/drawing/2014/main" id="{807820F2-50AD-BF2B-4809-3C2E10ADDEB1}"/>
-                  </a:ext>
-                </a:extLst>
-              </p:cNvPr>
-              <p:cNvPicPr>
-                <a:picLocks noChangeAspect="1"/>
-              </p:cNvPicPr>
-              <p:nvPr/>
-            </p:nvPicPr>
-            <p:blipFill>
-              <a:blip r:embed="rId5"/>
-              <a:stretch>
-                <a:fillRect/>
-              </a:stretch>
-            </p:blipFill>
-            <p:spPr>
-              <a:xfrm>
-                <a:off x="4573898" y="2884333"/>
-                <a:ext cx="3029185" cy="1828800"/>
-              </a:xfrm>
-              <a:prstGeom prst="rect">
-                <a:avLst/>
-              </a:prstGeom>
-            </p:spPr>
-          </p:pic>
-          <p:sp>
-            <p:nvSpPr>
-              <p:cNvPr id="13" name="TextBox 12">
-                <a:extLst>
-                  <a:ext uri="{FF2B5EF4-FFF2-40B4-BE49-F238E27FC236}">
-                    <a16:creationId xmlns:a16="http://schemas.microsoft.com/office/drawing/2014/main" id="{1DB4CE92-0B11-558C-0F9C-8784AB09E6C3}"/>
-                  </a:ext>
-                </a:extLst>
-              </p:cNvPr>
-              <p:cNvSpPr txBox="1"/>
-              <p:nvPr/>
-            </p:nvSpPr>
-            <p:spPr>
-              <a:xfrm>
-                <a:off x="3008089" y="4634655"/>
-                <a:ext cx="481222" cy="215444"/>
-              </a:xfrm>
-              <a:prstGeom prst="rect">
-                <a:avLst/>
-              </a:prstGeom>
-              <a:noFill/>
-            </p:spPr>
-            <p:txBody>
-              <a:bodyPr wrap="none" rtlCol="0">
-                <a:spAutoFit/>
-              </a:bodyPr>
-              <a:lstStyle/>
-              <a:p>
-                <a:r>
-                  <a:rPr lang="en-US" sz="800" b="1" dirty="0" err="1"/>
-                  <a:t>mMSE</a:t>
-                </a:r>
-                <a:endParaRPr lang="en-US" sz="800" b="1" dirty="0"/>
-              </a:p>
-            </p:txBody>
-          </p:sp>
-          <p:sp>
-            <p:nvSpPr>
-              <p:cNvPr id="14" name="TextBox 13">
-                <a:extLst>
-                  <a:ext uri="{FF2B5EF4-FFF2-40B4-BE49-F238E27FC236}">
-                    <a16:creationId xmlns:a16="http://schemas.microsoft.com/office/drawing/2014/main" id="{8977ADB1-C568-DDD8-AC56-989CBE6B57A6}"/>
-                  </a:ext>
-                </a:extLst>
-              </p:cNvPr>
-              <p:cNvSpPr txBox="1"/>
-              <p:nvPr/>
-            </p:nvSpPr>
-            <p:spPr>
-              <a:xfrm>
-                <a:off x="5871891" y="2520723"/>
-                <a:ext cx="389850" cy="215444"/>
-              </a:xfrm>
-              <a:prstGeom prst="rect">
-                <a:avLst/>
-              </a:prstGeom>
-              <a:noFill/>
-            </p:spPr>
-            <p:txBody>
-              <a:bodyPr wrap="none" rtlCol="0">
-                <a:spAutoFit/>
-              </a:bodyPr>
-              <a:lstStyle/>
-              <a:p>
-                <a:r>
-                  <a:rPr lang="en-US" sz="800" b="1" dirty="0"/>
-                  <a:t>MFE</a:t>
-                </a:r>
-              </a:p>
-            </p:txBody>
-          </p:sp>
-          <p:sp>
-            <p:nvSpPr>
-              <p:cNvPr id="15" name="TextBox 14">
-                <a:extLst>
-                  <a:ext uri="{FF2B5EF4-FFF2-40B4-BE49-F238E27FC236}">
-                    <a16:creationId xmlns:a16="http://schemas.microsoft.com/office/drawing/2014/main" id="{AB059AA8-CC3B-0D88-3803-05CEA81FB0BB}"/>
-                  </a:ext>
-                </a:extLst>
-              </p:cNvPr>
-              <p:cNvSpPr txBox="1"/>
-              <p:nvPr/>
-            </p:nvSpPr>
-            <p:spPr>
-              <a:xfrm>
-                <a:off x="5802732" y="4634655"/>
-                <a:ext cx="521297" cy="215444"/>
-              </a:xfrm>
-              <a:prstGeom prst="rect">
-                <a:avLst/>
-              </a:prstGeom>
-              <a:noFill/>
-            </p:spPr>
-            <p:txBody>
-              <a:bodyPr wrap="none" rtlCol="0">
-                <a:spAutoFit/>
-              </a:bodyPr>
-              <a:lstStyle/>
-              <a:p>
-                <a:r>
-                  <a:rPr lang="en-US" sz="800" b="1" dirty="0"/>
-                  <a:t>RCMFE</a:t>
-                </a:r>
-              </a:p>
-            </p:txBody>
-          </p:sp>
-          <p:sp>
-            <p:nvSpPr>
-              <p:cNvPr id="17" name="TextBox 16">
-                <a:extLst>
-                  <a:ext uri="{FF2B5EF4-FFF2-40B4-BE49-F238E27FC236}">
-                    <a16:creationId xmlns:a16="http://schemas.microsoft.com/office/drawing/2014/main" id="{572B3714-305B-A373-BC26-A038ACDDDCF7}"/>
-                  </a:ext>
-                </a:extLst>
-              </p:cNvPr>
-              <p:cNvSpPr txBox="1"/>
-              <p:nvPr/>
-            </p:nvSpPr>
-            <p:spPr>
-              <a:xfrm>
-                <a:off x="3826015" y="508456"/>
-                <a:ext cx="1919115" cy="215444"/>
-              </a:xfrm>
-              <a:prstGeom prst="rect">
-                <a:avLst/>
-              </a:prstGeom>
-              <a:noFill/>
-            </p:spPr>
-            <p:txBody>
-              <a:bodyPr wrap="none" rtlCol="0">
-                <a:spAutoFit/>
-              </a:bodyPr>
-              <a:lstStyle/>
-              <a:p>
-                <a:r>
-                  <a:rPr lang="en-US" sz="800" b="1" dirty="0" err="1"/>
-                  <a:t>Coarsing</a:t>
-                </a:r>
-                <a:r>
-                  <a:rPr lang="en-US" sz="800" b="1" dirty="0"/>
-                  <a:t> method: standard deviation</a:t>
-                </a:r>
-              </a:p>
-            </p:txBody>
-          </p:sp>
-          <p:pic>
-            <p:nvPicPr>
-              <p:cNvPr id="21" name="Picture 20" descr="A graph showing a green line&#10;&#10;AI-generated content may be incorrect.">
-                <a:extLst>
-                  <a:ext uri="{FF2B5EF4-FFF2-40B4-BE49-F238E27FC236}">
-                    <a16:creationId xmlns:a16="http://schemas.microsoft.com/office/drawing/2014/main" id="{A0EFFCBB-3027-D79A-02AA-928C1828BE6A}"/>
-                  </a:ext>
-                </a:extLst>
-              </p:cNvPr>
-              <p:cNvPicPr>
-                <a:picLocks noChangeAspect="1"/>
-              </p:cNvPicPr>
-              <p:nvPr/>
-            </p:nvPicPr>
-            <p:blipFill>
-              <a:blip r:embed="rId6"/>
-              <a:stretch>
-                <a:fillRect/>
-              </a:stretch>
-            </p:blipFill>
-            <p:spPr>
-              <a:xfrm>
-                <a:off x="7469714" y="3917266"/>
-                <a:ext cx="1514593" cy="914400"/>
-              </a:xfrm>
-              <a:prstGeom prst="rect">
-                <a:avLst/>
-              </a:prstGeom>
-            </p:spPr>
-          </p:pic>
-          <p:pic>
-            <p:nvPicPr>
-              <p:cNvPr id="23" name="Picture 22" descr="A diagram of a scale factor&#10;&#10;AI-generated content may be incorrect.">
-                <a:extLst>
-                  <a:ext uri="{FF2B5EF4-FFF2-40B4-BE49-F238E27FC236}">
-                    <a16:creationId xmlns:a16="http://schemas.microsoft.com/office/drawing/2014/main" id="{2CA27FA9-D109-EC7D-E353-7902E58686B4}"/>
-                  </a:ext>
-                </a:extLst>
-              </p:cNvPr>
-              <p:cNvPicPr>
-                <a:picLocks noChangeAspect="1"/>
-              </p:cNvPicPr>
-              <p:nvPr/>
-            </p:nvPicPr>
-            <p:blipFill>
-              <a:blip r:embed="rId7"/>
-              <a:stretch>
-                <a:fillRect/>
-              </a:stretch>
-            </p:blipFill>
-            <p:spPr>
-              <a:xfrm>
-                <a:off x="7469714" y="3002866"/>
-                <a:ext cx="1514593" cy="914400"/>
-              </a:xfrm>
-              <a:prstGeom prst="rect">
-                <a:avLst/>
-              </a:prstGeom>
-            </p:spPr>
-          </p:pic>
-          <p:pic>
-            <p:nvPicPr>
-              <p:cNvPr id="25" name="Picture 24" descr="A diagram of a scale factor&#10;&#10;AI-generated content may be incorrect.">
-                <a:extLst>
-                  <a:ext uri="{FF2B5EF4-FFF2-40B4-BE49-F238E27FC236}">
-                    <a16:creationId xmlns:a16="http://schemas.microsoft.com/office/drawing/2014/main" id="{AD5AC3D7-94B0-0B09-D435-9E08BE70CD77}"/>
-                  </a:ext>
-                </a:extLst>
-              </p:cNvPr>
-              <p:cNvPicPr>
-                <a:picLocks noChangeAspect="1"/>
-              </p:cNvPicPr>
-              <p:nvPr/>
-            </p:nvPicPr>
-            <p:blipFill>
-              <a:blip r:embed="rId8"/>
-              <a:stretch>
-                <a:fillRect/>
-              </a:stretch>
-            </p:blipFill>
-            <p:spPr>
-              <a:xfrm>
-                <a:off x="340784" y="700426"/>
-                <a:ext cx="1514593" cy="914400"/>
-              </a:xfrm>
-              <a:prstGeom prst="rect">
-                <a:avLst/>
-              </a:prstGeom>
-            </p:spPr>
-          </p:pic>
-          <p:pic>
-            <p:nvPicPr>
-              <p:cNvPr id="27" name="Picture 26" descr="A graph showing a green line&#10;&#10;AI-generated content may be incorrect.">
-                <a:extLst>
-                  <a:ext uri="{FF2B5EF4-FFF2-40B4-BE49-F238E27FC236}">
-                    <a16:creationId xmlns:a16="http://schemas.microsoft.com/office/drawing/2014/main" id="{056E9511-0679-492A-322E-0010BE6A1911}"/>
-                  </a:ext>
-                </a:extLst>
-              </p:cNvPr>
-              <p:cNvPicPr>
-                <a:picLocks noChangeAspect="1"/>
-              </p:cNvPicPr>
-              <p:nvPr/>
-            </p:nvPicPr>
-            <p:blipFill>
-              <a:blip r:embed="rId9"/>
-              <a:stretch>
-                <a:fillRect/>
-              </a:stretch>
-            </p:blipFill>
-            <p:spPr>
-              <a:xfrm>
-                <a:off x="340784" y="1518929"/>
-                <a:ext cx="1514593" cy="914400"/>
-              </a:xfrm>
-              <a:prstGeom prst="rect">
-                <a:avLst/>
-              </a:prstGeom>
-            </p:spPr>
-          </p:pic>
-          <p:pic>
-            <p:nvPicPr>
-              <p:cNvPr id="29" name="Picture 28" descr="A diagram of a cluster&#10;&#10;AI-generated content may be incorrect.">
-                <a:extLst>
-                  <a:ext uri="{FF2B5EF4-FFF2-40B4-BE49-F238E27FC236}">
-                    <a16:creationId xmlns:a16="http://schemas.microsoft.com/office/drawing/2014/main" id="{6F2AAF61-7B05-7CFB-5EA8-A7A3F43A8DF8}"/>
-                  </a:ext>
-                </a:extLst>
-              </p:cNvPr>
-              <p:cNvPicPr>
-                <a:picLocks noChangeAspect="1"/>
-              </p:cNvPicPr>
-              <p:nvPr/>
-            </p:nvPicPr>
-            <p:blipFill>
-              <a:blip r:embed="rId10"/>
-              <a:stretch>
-                <a:fillRect/>
-              </a:stretch>
-            </p:blipFill>
-            <p:spPr>
-              <a:xfrm>
-                <a:off x="350961" y="2980230"/>
-                <a:ext cx="1514593" cy="914400"/>
-              </a:xfrm>
-              <a:prstGeom prst="rect">
-                <a:avLst/>
-              </a:prstGeom>
-            </p:spPr>
-          </p:pic>
-          <p:pic>
-            <p:nvPicPr>
-              <p:cNvPr id="31" name="Picture 30" descr="A green line graph with numbers and a black line&#10;&#10;AI-generated content may be incorrect.">
-                <a:extLst>
-                  <a:ext uri="{FF2B5EF4-FFF2-40B4-BE49-F238E27FC236}">
-                    <a16:creationId xmlns:a16="http://schemas.microsoft.com/office/drawing/2014/main" id="{D4170E40-8659-8534-59A7-3D7D5A7C910A}"/>
-                  </a:ext>
-                </a:extLst>
-              </p:cNvPr>
-              <p:cNvPicPr>
-                <a:picLocks noChangeAspect="1"/>
-              </p:cNvPicPr>
-              <p:nvPr/>
-            </p:nvPicPr>
-            <p:blipFill>
-              <a:blip r:embed="rId11"/>
-              <a:stretch>
-                <a:fillRect/>
-              </a:stretch>
-            </p:blipFill>
-            <p:spPr>
-              <a:xfrm>
-                <a:off x="384675" y="3818482"/>
-                <a:ext cx="1514593" cy="914400"/>
-              </a:xfrm>
-              <a:prstGeom prst="rect">
-                <a:avLst/>
-              </a:prstGeom>
-            </p:spPr>
-          </p:pic>
-          <p:pic>
-            <p:nvPicPr>
-              <p:cNvPr id="35" name="Picture 34" descr="A diagram of a planet&#10;&#10;AI-generated content may be incorrect.">
-                <a:extLst>
-                  <a:ext uri="{FF2B5EF4-FFF2-40B4-BE49-F238E27FC236}">
-                    <a16:creationId xmlns:a16="http://schemas.microsoft.com/office/drawing/2014/main" id="{3D5DBE70-CFF8-1A44-A060-B97B3DEFD3A9}"/>
-                  </a:ext>
-                </a:extLst>
-              </p:cNvPr>
-              <p:cNvPicPr>
-                <a:picLocks noChangeAspect="1"/>
-              </p:cNvPicPr>
-              <p:nvPr/>
-            </p:nvPicPr>
-            <p:blipFill>
-              <a:blip r:embed="rId12"/>
-              <a:stretch>
-                <a:fillRect/>
-              </a:stretch>
-            </p:blipFill>
-            <p:spPr>
-              <a:xfrm>
-                <a:off x="7394236" y="676200"/>
-                <a:ext cx="1514593" cy="914400"/>
-              </a:xfrm>
-              <a:prstGeom prst="rect">
-                <a:avLst/>
-              </a:prstGeom>
-            </p:spPr>
-          </p:pic>
-          <p:pic>
-            <p:nvPicPr>
-              <p:cNvPr id="37" name="Picture 36" descr="A graph showing a curve&#10;&#10;AI-generated content may be incorrect.">
-                <a:extLst>
-                  <a:ext uri="{FF2B5EF4-FFF2-40B4-BE49-F238E27FC236}">
-                    <a16:creationId xmlns:a16="http://schemas.microsoft.com/office/drawing/2014/main" id="{47B4D663-A9F0-D9B8-CCAE-CEE4E4585666}"/>
-                  </a:ext>
-                </a:extLst>
-              </p:cNvPr>
-              <p:cNvPicPr>
-                <a:picLocks noChangeAspect="1"/>
-              </p:cNvPicPr>
-              <p:nvPr/>
-            </p:nvPicPr>
-            <p:blipFill>
-              <a:blip r:embed="rId13"/>
-              <a:stretch>
-                <a:fillRect/>
-              </a:stretch>
-            </p:blipFill>
-            <p:spPr>
-              <a:xfrm>
-                <a:off x="7469714" y="1520560"/>
-                <a:ext cx="1514593" cy="914400"/>
-              </a:xfrm>
-              <a:prstGeom prst="rect">
-                <a:avLst/>
-              </a:prstGeom>
-            </p:spPr>
-          </p:pic>
-        </p:grpSp>
-      </p:grpSp>
-    </p:spTree>
-    <p:extLst>
-      <p:ext uri="{BB962C8B-B14F-4D97-AF65-F5344CB8AC3E}">
-        <p14:creationId xmlns:p14="http://schemas.microsoft.com/office/powerpoint/2010/main" val="2948164643"/>
-      </p:ext>
-    </p:extLst>
-  </p:cSld>
-  <p:clrMapOvr>
-    <a:masterClrMapping/>
-  </p:clrMapOvr>
-</p:sld>
-</file>
-
-<file path=ppt/slides/slide3.xml><?xml version="1.0" encoding="utf-8"?>
-<p:sld xmlns:a="http://schemas.openxmlformats.org/drawingml/2006/main" xmlns:r="http://schemas.openxmlformats.org/officeDocument/2006/relationships" xmlns:p="http://schemas.openxmlformats.org/presentationml/2006/main">
-  <p:cSld>
-    <p:spTree>
-      <p:nvGrpSpPr>
         <p:cNvPr id="1" name="">
           <a:extLst>
             <a:ext uri="{FF2B5EF4-FFF2-40B4-BE49-F238E27FC236}">
-              <a16:creationId xmlns:a16="http://schemas.microsoft.com/office/drawing/2014/main" id="{63D9837D-C764-6911-BDF2-7695F1437604}"/>
+              <a16:creationId xmlns:a16="http://schemas.microsoft.com/office/drawing/2014/main" id="{D28183FF-B84C-DB20-E8CD-D12DFE57A0DB}"/>
             </a:ext>
           </a:extLst>
         </p:cNvPr>
@@ -4136,625 +3951,418 @@
           <a:chExt cx="0" cy="0"/>
         </a:xfrm>
       </p:grpSpPr>
-      <p:grpSp>
-        <p:nvGrpSpPr>
-          <p:cNvPr id="41" name="Group 40">
-            <a:extLst>
-              <a:ext uri="{FF2B5EF4-FFF2-40B4-BE49-F238E27FC236}">
-                <a16:creationId xmlns:a16="http://schemas.microsoft.com/office/drawing/2014/main" id="{ECC7E8CF-9458-9898-D9CE-A516F62ECD0E}"/>
-              </a:ext>
-            </a:extLst>
-          </p:cNvPr>
-          <p:cNvGrpSpPr/>
+      <p:pic>
+        <p:nvPicPr>
+          <p:cNvPr id="8" name="Picture 7">
+            <a:extLst>
+              <a:ext uri="{FF2B5EF4-FFF2-40B4-BE49-F238E27FC236}">
+                <a16:creationId xmlns:a16="http://schemas.microsoft.com/office/drawing/2014/main" id="{FF532770-2330-E6DD-983C-F3ACF0AFB033}"/>
+              </a:ext>
+            </a:extLst>
+          </p:cNvPr>
+          <p:cNvPicPr>
+            <a:picLocks noChangeAspect="1"/>
+          </p:cNvPicPr>
           <p:nvPr/>
-        </p:nvGrpSpPr>
-        <p:grpSpPr>
-          <a:xfrm>
-            <a:off x="440267" y="338667"/>
-            <a:ext cx="8949266" cy="4754871"/>
-            <a:chOff x="59267" y="397933"/>
-            <a:chExt cx="8949266" cy="4754871"/>
-          </a:xfrm>
-        </p:grpSpPr>
-        <p:sp>
-          <p:nvSpPr>
-            <p:cNvPr id="24" name="Rounded Rectangle 23">
-              <a:extLst>
-                <a:ext uri="{FF2B5EF4-FFF2-40B4-BE49-F238E27FC236}">
-                  <a16:creationId xmlns:a16="http://schemas.microsoft.com/office/drawing/2014/main" id="{A0A6FF83-5F2B-0D9A-D972-62F0B63499E7}"/>
-                </a:ext>
-              </a:extLst>
-            </p:cNvPr>
-            <p:cNvSpPr/>
-            <p:nvPr/>
-          </p:nvSpPr>
-          <p:spPr>
-            <a:xfrm>
-              <a:off x="59267" y="397933"/>
-              <a:ext cx="8949266" cy="4754871"/>
-            </a:xfrm>
-            <a:prstGeom prst="roundRect">
-              <a:avLst/>
-            </a:prstGeom>
+        </p:nvPicPr>
+        <p:blipFill>
+          <a:blip r:embed="rId2"/>
+          <a:stretch>
+            <a:fillRect/>
+          </a:stretch>
+        </p:blipFill>
+        <p:spPr>
+          <a:xfrm>
+            <a:off x="3764376" y="2938076"/>
+            <a:ext cx="4547616" cy="2743200"/>
+          </a:xfrm>
+          <a:prstGeom prst="rect">
+            <a:avLst/>
+          </a:prstGeom>
+        </p:spPr>
+      </p:pic>
+      <p:pic>
+        <p:nvPicPr>
+          <p:cNvPr id="4" name="Picture 3">
+            <a:extLst>
+              <a:ext uri="{FF2B5EF4-FFF2-40B4-BE49-F238E27FC236}">
+                <a16:creationId xmlns:a16="http://schemas.microsoft.com/office/drawing/2014/main" id="{C4B0F2C7-3AAA-213D-185F-574259032267}"/>
+              </a:ext>
+            </a:extLst>
+          </p:cNvPr>
+          <p:cNvPicPr>
+            <a:picLocks noChangeAspect="1"/>
+          </p:cNvPicPr>
+          <p:nvPr/>
+        </p:nvPicPr>
+        <p:blipFill>
+          <a:blip r:embed="rId3"/>
+          <a:stretch>
+            <a:fillRect/>
+          </a:stretch>
+        </p:blipFill>
+        <p:spPr>
+          <a:xfrm>
+            <a:off x="7412165" y="2544679"/>
+            <a:ext cx="9095232" cy="5486400"/>
+          </a:xfrm>
+          <a:prstGeom prst="rect">
+            <a:avLst/>
+          </a:prstGeom>
+        </p:spPr>
+      </p:pic>
+      <p:sp>
+        <p:nvSpPr>
+          <p:cNvPr id="17" name="TextBox 16">
+            <a:extLst>
+              <a:ext uri="{FF2B5EF4-FFF2-40B4-BE49-F238E27FC236}">
+                <a16:creationId xmlns:a16="http://schemas.microsoft.com/office/drawing/2014/main" id="{57EA1920-65A8-44EB-4280-2D55864A7E4B}"/>
+              </a:ext>
+            </a:extLst>
+          </p:cNvPr>
+          <p:cNvSpPr txBox="1"/>
+          <p:nvPr/>
+        </p:nvSpPr>
+        <p:spPr>
+          <a:xfrm>
+            <a:off x="13643484" y="14776691"/>
+            <a:ext cx="8069710" cy="707886"/>
+          </a:xfrm>
+          <a:prstGeom prst="rect">
+            <a:avLst/>
+          </a:prstGeom>
+          <a:noFill/>
+        </p:spPr>
+        <p:txBody>
+          <a:bodyPr wrap="none" rtlCol="0">
+            <a:spAutoFit/>
+          </a:bodyPr>
+          <a:lstStyle/>
+          <a:p>
+            <a:r>
+              <a:rPr lang="en-US" sz="4000" b="1" dirty="0"/>
+              <a:t>Coarse-graining method: variance</a:t>
+            </a:r>
+          </a:p>
+        </p:txBody>
+      </p:sp>
+      <p:sp>
+        <p:nvSpPr>
+          <p:cNvPr id="9" name="TextBox 8">
+            <a:extLst>
+              <a:ext uri="{FF2B5EF4-FFF2-40B4-BE49-F238E27FC236}">
+                <a16:creationId xmlns:a16="http://schemas.microsoft.com/office/drawing/2014/main" id="{F86E3561-BD2A-520E-AA90-B5FE273C8349}"/>
+              </a:ext>
+            </a:extLst>
+          </p:cNvPr>
+          <p:cNvSpPr txBox="1"/>
+          <p:nvPr/>
+        </p:nvSpPr>
+        <p:spPr>
+          <a:xfrm>
+            <a:off x="15582925" y="7561806"/>
+            <a:ext cx="449900" cy="553998"/>
+          </a:xfrm>
+          <a:prstGeom prst="rect">
+            <a:avLst/>
+          </a:prstGeom>
+          <a:noFill/>
+          <a:ln>
             <a:solidFill>
-              <a:schemeClr val="bg1"/>
+              <a:schemeClr val="tx1"/>
             </a:solidFill>
-            <a:ln>
-              <a:solidFill>
-                <a:schemeClr val="tx1"/>
-              </a:solidFill>
-            </a:ln>
-          </p:spPr>
-          <p:style>
-            <a:lnRef idx="2">
-              <a:schemeClr val="accent1">
-                <a:shade val="15000"/>
-              </a:schemeClr>
-            </a:lnRef>
-            <a:fillRef idx="1">
-              <a:schemeClr val="accent1"/>
-            </a:fillRef>
-            <a:effectRef idx="0">
-              <a:schemeClr val="accent1"/>
-            </a:effectRef>
-            <a:fontRef idx="minor">
-              <a:schemeClr val="lt1"/>
-            </a:fontRef>
-          </p:style>
-          <p:txBody>
-            <a:bodyPr rtlCol="0" anchor="ctr"/>
-            <a:lstStyle/>
-            <a:p>
-              <a:pPr algn="ctr"/>
-              <a:endParaRPr lang="en-US"/>
-            </a:p>
-          </p:txBody>
-        </p:sp>
-        <p:sp>
-          <p:nvSpPr>
-            <p:cNvPr id="2" name="TextBox 1">
-              <a:extLst>
-                <a:ext uri="{FF2B5EF4-FFF2-40B4-BE49-F238E27FC236}">
-                  <a16:creationId xmlns:a16="http://schemas.microsoft.com/office/drawing/2014/main" id="{E8BCE681-3B8A-C979-27EE-BB3BB33E211B}"/>
-                </a:ext>
-              </a:extLst>
-            </p:cNvPr>
-            <p:cNvSpPr txBox="1"/>
-            <p:nvPr/>
-          </p:nvSpPr>
-          <p:spPr>
-            <a:xfrm>
-              <a:off x="2839362" y="2552579"/>
-              <a:ext cx="389850" cy="215444"/>
-            </a:xfrm>
-            <a:prstGeom prst="rect">
-              <a:avLst/>
-            </a:prstGeom>
-            <a:noFill/>
-          </p:spPr>
-          <p:txBody>
-            <a:bodyPr wrap="none" rtlCol="0">
-              <a:spAutoFit/>
-            </a:bodyPr>
-            <a:lstStyle/>
-            <a:p>
-              <a:r>
-                <a:rPr lang="en-US" sz="800" b="1" dirty="0"/>
-                <a:t>MSE</a:t>
-              </a:r>
-            </a:p>
-          </p:txBody>
-        </p:sp>
-        <p:sp>
-          <p:nvSpPr>
-            <p:cNvPr id="13" name="TextBox 12">
-              <a:extLst>
-                <a:ext uri="{FF2B5EF4-FFF2-40B4-BE49-F238E27FC236}">
-                  <a16:creationId xmlns:a16="http://schemas.microsoft.com/office/drawing/2014/main" id="{35FA97BD-451D-2C76-0A16-43A1EEC34AA5}"/>
-                </a:ext>
-              </a:extLst>
-            </p:cNvPr>
-            <p:cNvSpPr txBox="1"/>
-            <p:nvPr/>
-          </p:nvSpPr>
-          <p:spPr>
-            <a:xfrm>
-              <a:off x="2763058" y="4678235"/>
-              <a:ext cx="481222" cy="215444"/>
-            </a:xfrm>
-            <a:prstGeom prst="rect">
-              <a:avLst/>
-            </a:prstGeom>
-            <a:noFill/>
-          </p:spPr>
-          <p:txBody>
-            <a:bodyPr wrap="none" rtlCol="0">
-              <a:spAutoFit/>
-            </a:bodyPr>
-            <a:lstStyle/>
-            <a:p>
-              <a:r>
-                <a:rPr lang="en-US" sz="800" b="1" dirty="0" err="1"/>
-                <a:t>mMSE</a:t>
-              </a:r>
-              <a:endParaRPr lang="en-US" sz="800" b="1" dirty="0"/>
-            </a:p>
-          </p:txBody>
-        </p:sp>
-        <p:sp>
-          <p:nvSpPr>
-            <p:cNvPr id="14" name="TextBox 13">
-              <a:extLst>
-                <a:ext uri="{FF2B5EF4-FFF2-40B4-BE49-F238E27FC236}">
-                  <a16:creationId xmlns:a16="http://schemas.microsoft.com/office/drawing/2014/main" id="{EDBFEEBE-C074-86B0-0828-0CECB225C64B}"/>
-                </a:ext>
-              </a:extLst>
-            </p:cNvPr>
-            <p:cNvSpPr txBox="1"/>
-            <p:nvPr/>
-          </p:nvSpPr>
-          <p:spPr>
-            <a:xfrm>
-              <a:off x="5706150" y="2552579"/>
-              <a:ext cx="389850" cy="215444"/>
-            </a:xfrm>
-            <a:prstGeom prst="rect">
-              <a:avLst/>
-            </a:prstGeom>
-            <a:noFill/>
-          </p:spPr>
-          <p:txBody>
-            <a:bodyPr wrap="none" rtlCol="0">
-              <a:spAutoFit/>
-            </a:bodyPr>
-            <a:lstStyle/>
-            <a:p>
-              <a:r>
-                <a:rPr lang="en-US" sz="800" b="1" dirty="0"/>
-                <a:t>MFE</a:t>
-              </a:r>
-            </a:p>
-          </p:txBody>
-        </p:sp>
-        <p:sp>
-          <p:nvSpPr>
-            <p:cNvPr id="15" name="TextBox 14">
-              <a:extLst>
-                <a:ext uri="{FF2B5EF4-FFF2-40B4-BE49-F238E27FC236}">
-                  <a16:creationId xmlns:a16="http://schemas.microsoft.com/office/drawing/2014/main" id="{24E8965C-A296-A1C6-D2A3-912C6DF6F1CF}"/>
-                </a:ext>
-              </a:extLst>
-            </p:cNvPr>
-            <p:cNvSpPr txBox="1"/>
-            <p:nvPr/>
-          </p:nvSpPr>
-          <p:spPr>
-            <a:xfrm>
-              <a:off x="5654777" y="4678235"/>
-              <a:ext cx="521297" cy="215444"/>
-            </a:xfrm>
-            <a:prstGeom prst="rect">
-              <a:avLst/>
-            </a:prstGeom>
-            <a:noFill/>
-          </p:spPr>
-          <p:txBody>
-            <a:bodyPr wrap="none" rtlCol="0">
-              <a:spAutoFit/>
-            </a:bodyPr>
-            <a:lstStyle/>
-            <a:p>
-              <a:r>
-                <a:rPr lang="en-US" sz="800" b="1" dirty="0"/>
-                <a:t>RCMFE</a:t>
-              </a:r>
-            </a:p>
-          </p:txBody>
-        </p:sp>
-        <p:sp>
-          <p:nvSpPr>
-            <p:cNvPr id="17" name="TextBox 16">
-              <a:extLst>
-                <a:ext uri="{FF2B5EF4-FFF2-40B4-BE49-F238E27FC236}">
-                  <a16:creationId xmlns:a16="http://schemas.microsoft.com/office/drawing/2014/main" id="{EE638CAE-8D8B-EFF2-FED4-286A7D13C010}"/>
-                </a:ext>
-              </a:extLst>
-            </p:cNvPr>
-            <p:cNvSpPr txBox="1"/>
-            <p:nvPr/>
-          </p:nvSpPr>
-          <p:spPr>
-            <a:xfrm>
-              <a:off x="3749815" y="510610"/>
-              <a:ext cx="1393330" cy="215444"/>
-            </a:xfrm>
-            <a:prstGeom prst="rect">
-              <a:avLst/>
-            </a:prstGeom>
-            <a:noFill/>
-          </p:spPr>
-          <p:txBody>
-            <a:bodyPr wrap="none" rtlCol="0">
-              <a:spAutoFit/>
-            </a:bodyPr>
-            <a:lstStyle/>
-            <a:p>
-              <a:r>
-                <a:rPr lang="en-US" sz="800" b="1" dirty="0" err="1"/>
-                <a:t>Coarsing</a:t>
-              </a:r>
-              <a:r>
-                <a:rPr lang="en-US" sz="800" b="1" dirty="0"/>
-                <a:t> method: median</a:t>
-              </a:r>
-            </a:p>
-          </p:txBody>
-        </p:sp>
-        <p:pic>
-          <p:nvPicPr>
-            <p:cNvPr id="5" name="Picture 4" descr="A red and white scale&#10;&#10;AI-generated content may be incorrect.">
-              <a:extLst>
-                <a:ext uri="{FF2B5EF4-FFF2-40B4-BE49-F238E27FC236}">
-                  <a16:creationId xmlns:a16="http://schemas.microsoft.com/office/drawing/2014/main" id="{2326408B-4978-42FC-F237-66BEE3E1FC37}"/>
-                </a:ext>
-              </a:extLst>
-            </p:cNvPr>
-            <p:cNvPicPr>
-              <a:picLocks noChangeAspect="1"/>
-            </p:cNvPicPr>
-            <p:nvPr/>
-          </p:nvPicPr>
-          <p:blipFill>
-            <a:blip r:embed="rId2"/>
-            <a:stretch>
-              <a:fillRect/>
-            </a:stretch>
-          </p:blipFill>
-          <p:spPr>
-            <a:xfrm>
-              <a:off x="1553188" y="790796"/>
-              <a:ext cx="3029185" cy="1828800"/>
-            </a:xfrm>
-            <a:prstGeom prst="rect">
-              <a:avLst/>
-            </a:prstGeom>
-          </p:spPr>
-        </p:pic>
-        <p:pic>
-          <p:nvPicPr>
-            <p:cNvPr id="9" name="Picture 8" descr="A graph with red lines&#10;&#10;AI-generated content may be incorrect.">
-              <a:extLst>
-                <a:ext uri="{FF2B5EF4-FFF2-40B4-BE49-F238E27FC236}">
-                  <a16:creationId xmlns:a16="http://schemas.microsoft.com/office/drawing/2014/main" id="{22BF59AC-5630-4F71-8DA6-2AA5BCC49133}"/>
-                </a:ext>
-              </a:extLst>
-            </p:cNvPr>
-            <p:cNvPicPr>
-              <a:picLocks noChangeAspect="1"/>
-            </p:cNvPicPr>
-            <p:nvPr/>
-          </p:nvPicPr>
-          <p:blipFill>
-            <a:blip r:embed="rId3"/>
-            <a:stretch>
-              <a:fillRect/>
-            </a:stretch>
-          </p:blipFill>
-          <p:spPr>
-            <a:xfrm>
-              <a:off x="1553187" y="2916451"/>
-              <a:ext cx="3029185" cy="1828800"/>
-            </a:xfrm>
-            <a:prstGeom prst="rect">
-              <a:avLst/>
-            </a:prstGeom>
-          </p:spPr>
-        </p:pic>
-        <p:pic>
-          <p:nvPicPr>
-            <p:cNvPr id="21" name="Picture 20" descr="A red and white scale&#10;&#10;AI-generated content may be incorrect.">
-              <a:extLst>
-                <a:ext uri="{FF2B5EF4-FFF2-40B4-BE49-F238E27FC236}">
-                  <a16:creationId xmlns:a16="http://schemas.microsoft.com/office/drawing/2014/main" id="{2BB23ADB-8F6C-03DC-95C2-F825740452DC}"/>
-                </a:ext>
-              </a:extLst>
-            </p:cNvPr>
-            <p:cNvPicPr>
-              <a:picLocks noChangeAspect="1"/>
-            </p:cNvPicPr>
-            <p:nvPr/>
-          </p:nvPicPr>
-          <p:blipFill>
-            <a:blip r:embed="rId4"/>
-            <a:stretch>
-              <a:fillRect/>
-            </a:stretch>
-          </p:blipFill>
-          <p:spPr>
-            <a:xfrm>
-              <a:off x="4427183" y="790796"/>
-              <a:ext cx="3029185" cy="1828800"/>
-            </a:xfrm>
-            <a:prstGeom prst="rect">
-              <a:avLst/>
-            </a:prstGeom>
-          </p:spPr>
-        </p:pic>
-        <p:pic>
-          <p:nvPicPr>
-            <p:cNvPr id="23" name="Picture 22" descr="A red and white scale&#10;&#10;AI-generated content may be incorrect.">
-              <a:extLst>
-                <a:ext uri="{FF2B5EF4-FFF2-40B4-BE49-F238E27FC236}">
-                  <a16:creationId xmlns:a16="http://schemas.microsoft.com/office/drawing/2014/main" id="{B3B2C6EE-2740-ACCE-419A-8320186540E8}"/>
-                </a:ext>
-              </a:extLst>
-            </p:cNvPr>
-            <p:cNvPicPr>
-              <a:picLocks noChangeAspect="1"/>
-            </p:cNvPicPr>
-            <p:nvPr/>
-          </p:nvPicPr>
-          <p:blipFill>
-            <a:blip r:embed="rId5"/>
-            <a:stretch>
-              <a:fillRect/>
-            </a:stretch>
-          </p:blipFill>
-          <p:spPr>
-            <a:xfrm>
-              <a:off x="4425220" y="2916451"/>
-              <a:ext cx="3029185" cy="1828800"/>
-            </a:xfrm>
-            <a:prstGeom prst="rect">
-              <a:avLst/>
-            </a:prstGeom>
-          </p:spPr>
-        </p:pic>
-        <p:pic>
-          <p:nvPicPr>
-            <p:cNvPr id="26" name="Picture 25" descr="A diagram of a scale factor&#10;&#10;AI-generated content may be incorrect.">
-              <a:extLst>
-                <a:ext uri="{FF2B5EF4-FFF2-40B4-BE49-F238E27FC236}">
-                  <a16:creationId xmlns:a16="http://schemas.microsoft.com/office/drawing/2014/main" id="{2D0A3D0A-C0A8-E1C1-E187-19B4296DD074}"/>
-                </a:ext>
-              </a:extLst>
-            </p:cNvPr>
-            <p:cNvPicPr>
-              <a:picLocks noChangeAspect="1"/>
-            </p:cNvPicPr>
-            <p:nvPr/>
-          </p:nvPicPr>
-          <p:blipFill>
-            <a:blip r:embed="rId6"/>
-            <a:stretch>
-              <a:fillRect/>
-            </a:stretch>
-          </p:blipFill>
-          <p:spPr>
-            <a:xfrm>
-              <a:off x="7329452" y="3064878"/>
-              <a:ext cx="1514593" cy="914400"/>
-            </a:xfrm>
-            <a:prstGeom prst="rect">
-              <a:avLst/>
-            </a:prstGeom>
-          </p:spPr>
-        </p:pic>
-        <p:pic>
-          <p:nvPicPr>
-            <p:cNvPr id="28" name="Picture 27" descr="A graph showing a green line&#10;&#10;AI-generated content may be incorrect.">
-              <a:extLst>
-                <a:ext uri="{FF2B5EF4-FFF2-40B4-BE49-F238E27FC236}">
-                  <a16:creationId xmlns:a16="http://schemas.microsoft.com/office/drawing/2014/main" id="{567303BE-346C-FC5C-EE90-11A59E4EE8EF}"/>
-                </a:ext>
-              </a:extLst>
-            </p:cNvPr>
-            <p:cNvPicPr>
-              <a:picLocks noChangeAspect="1"/>
-            </p:cNvPicPr>
-            <p:nvPr/>
-          </p:nvPicPr>
-          <p:blipFill>
-            <a:blip r:embed="rId7"/>
-            <a:stretch>
-              <a:fillRect/>
-            </a:stretch>
-          </p:blipFill>
-          <p:spPr>
-            <a:xfrm>
-              <a:off x="7204499" y="3979278"/>
-              <a:ext cx="1514593" cy="914400"/>
-            </a:xfrm>
-            <a:prstGeom prst="rect">
-              <a:avLst/>
-            </a:prstGeom>
-          </p:spPr>
-        </p:pic>
-        <p:pic>
-          <p:nvPicPr>
-            <p:cNvPr id="30" name="Picture 29" descr="A diagram of a scale factor&#10;&#10;AI-generated content may be incorrect.">
-              <a:extLst>
-                <a:ext uri="{FF2B5EF4-FFF2-40B4-BE49-F238E27FC236}">
-                  <a16:creationId xmlns:a16="http://schemas.microsoft.com/office/drawing/2014/main" id="{8CCDF3D9-8906-F426-15CB-06E970201226}"/>
-                </a:ext>
-              </a:extLst>
-            </p:cNvPr>
-            <p:cNvPicPr>
-              <a:picLocks noChangeAspect="1"/>
-            </p:cNvPicPr>
-            <p:nvPr/>
-          </p:nvPicPr>
-          <p:blipFill>
-            <a:blip r:embed="rId8"/>
-            <a:stretch>
-              <a:fillRect/>
-            </a:stretch>
-          </p:blipFill>
-          <p:spPr>
-            <a:xfrm>
-              <a:off x="187736" y="831501"/>
-              <a:ext cx="1514593" cy="914400"/>
-            </a:xfrm>
-            <a:prstGeom prst="rect">
-              <a:avLst/>
-            </a:prstGeom>
-          </p:spPr>
-        </p:pic>
-        <p:pic>
-          <p:nvPicPr>
-            <p:cNvPr id="32" name="Picture 31" descr="A graph showing a green line&#10;&#10;AI-generated content may be incorrect.">
-              <a:extLst>
-                <a:ext uri="{FF2B5EF4-FFF2-40B4-BE49-F238E27FC236}">
-                  <a16:creationId xmlns:a16="http://schemas.microsoft.com/office/drawing/2014/main" id="{B88EC16E-0AAB-29D2-2F46-D36DAF4CA685}"/>
-                </a:ext>
-              </a:extLst>
-            </p:cNvPr>
-            <p:cNvPicPr>
-              <a:picLocks noChangeAspect="1"/>
-            </p:cNvPicPr>
-            <p:nvPr/>
-          </p:nvPicPr>
-          <p:blipFill>
-            <a:blip r:embed="rId9"/>
-            <a:stretch>
-              <a:fillRect/>
-            </a:stretch>
-          </p:blipFill>
-          <p:spPr>
-            <a:xfrm>
-              <a:off x="226954" y="1705196"/>
-              <a:ext cx="1514593" cy="914400"/>
-            </a:xfrm>
-            <a:prstGeom prst="rect">
-              <a:avLst/>
-            </a:prstGeom>
-          </p:spPr>
-        </p:pic>
-        <p:pic>
-          <p:nvPicPr>
-            <p:cNvPr id="34" name="Picture 33" descr="A diagram of a cluster&#10;&#10;AI-generated content may be incorrect.">
-              <a:extLst>
-                <a:ext uri="{FF2B5EF4-FFF2-40B4-BE49-F238E27FC236}">
-                  <a16:creationId xmlns:a16="http://schemas.microsoft.com/office/drawing/2014/main" id="{76A4CBFA-7069-7A04-9B1A-9236DF5EE540}"/>
-                </a:ext>
-              </a:extLst>
-            </p:cNvPr>
-            <p:cNvPicPr>
-              <a:picLocks noChangeAspect="1"/>
-            </p:cNvPicPr>
-            <p:nvPr/>
-          </p:nvPicPr>
-          <p:blipFill>
-            <a:blip r:embed="rId10"/>
-            <a:stretch>
-              <a:fillRect/>
-            </a:stretch>
-          </p:blipFill>
-          <p:spPr>
-            <a:xfrm>
-              <a:off x="288500" y="2990665"/>
-              <a:ext cx="1514593" cy="914400"/>
-            </a:xfrm>
-            <a:prstGeom prst="rect">
-              <a:avLst/>
-            </a:prstGeom>
-          </p:spPr>
-        </p:pic>
-        <p:pic>
-          <p:nvPicPr>
-            <p:cNvPr id="36" name="Picture 35" descr="A green line graph with numbers and a black line&#10;&#10;AI-generated content may be incorrect.">
-              <a:extLst>
-                <a:ext uri="{FF2B5EF4-FFF2-40B4-BE49-F238E27FC236}">
-                  <a16:creationId xmlns:a16="http://schemas.microsoft.com/office/drawing/2014/main" id="{6A856116-8FD6-91AF-B199-A99868066BEB}"/>
-                </a:ext>
-              </a:extLst>
-            </p:cNvPr>
-            <p:cNvPicPr>
-              <a:picLocks noChangeAspect="1"/>
-            </p:cNvPicPr>
-            <p:nvPr/>
-          </p:nvPicPr>
-          <p:blipFill>
-            <a:blip r:embed="rId11"/>
-            <a:stretch>
-              <a:fillRect/>
-            </a:stretch>
-          </p:blipFill>
-          <p:spPr>
-            <a:xfrm>
-              <a:off x="226954" y="3905065"/>
-              <a:ext cx="1514593" cy="914400"/>
-            </a:xfrm>
-            <a:prstGeom prst="rect">
-              <a:avLst/>
-            </a:prstGeom>
-          </p:spPr>
-        </p:pic>
-        <p:pic>
-          <p:nvPicPr>
-            <p:cNvPr id="38" name="Picture 37" descr="A diagram of a planet&#10;&#10;AI-generated content may be incorrect.">
-              <a:extLst>
-                <a:ext uri="{FF2B5EF4-FFF2-40B4-BE49-F238E27FC236}">
-                  <a16:creationId xmlns:a16="http://schemas.microsoft.com/office/drawing/2014/main" id="{A5BE97FE-1AA7-8428-B3EE-63700A1024C9}"/>
-                </a:ext>
-              </a:extLst>
-            </p:cNvPr>
-            <p:cNvPicPr>
-              <a:picLocks noChangeAspect="1"/>
-            </p:cNvPicPr>
-            <p:nvPr/>
-          </p:nvPicPr>
-          <p:blipFill>
-            <a:blip r:embed="rId12"/>
-            <a:stretch>
-              <a:fillRect/>
-            </a:stretch>
-          </p:blipFill>
-          <p:spPr>
-            <a:xfrm>
-              <a:off x="7259234" y="831501"/>
-              <a:ext cx="1514593" cy="914400"/>
-            </a:xfrm>
-            <a:prstGeom prst="rect">
-              <a:avLst/>
-            </a:prstGeom>
-          </p:spPr>
-        </p:pic>
-        <p:pic>
-          <p:nvPicPr>
-            <p:cNvPr id="40" name="Picture 39" descr="A graph showing a curve&#10;&#10;AI-generated content may be incorrect.">
-              <a:extLst>
-                <a:ext uri="{FF2B5EF4-FFF2-40B4-BE49-F238E27FC236}">
-                  <a16:creationId xmlns:a16="http://schemas.microsoft.com/office/drawing/2014/main" id="{7353AA3E-8A49-CD34-1D2E-5F04C9E249FB}"/>
-                </a:ext>
-              </a:extLst>
-            </p:cNvPr>
-            <p:cNvPicPr>
-              <a:picLocks noChangeAspect="1"/>
-            </p:cNvPicPr>
-            <p:nvPr/>
-          </p:nvPicPr>
-          <p:blipFill>
-            <a:blip r:embed="rId13"/>
-            <a:stretch>
-              <a:fillRect/>
-            </a:stretch>
-          </p:blipFill>
-          <p:spPr>
-            <a:xfrm>
-              <a:off x="7258268" y="1671688"/>
-              <a:ext cx="1514593" cy="914400"/>
-            </a:xfrm>
-            <a:prstGeom prst="rect">
-              <a:avLst/>
-            </a:prstGeom>
-          </p:spPr>
-        </p:pic>
-      </p:grpSp>
+          </a:ln>
+        </p:spPr>
+        <p:txBody>
+          <a:bodyPr wrap="square" rtlCol="0">
+            <a:spAutoFit/>
+          </a:bodyPr>
+          <a:lstStyle/>
+          <a:p>
+            <a:r>
+              <a:rPr lang="en-US" sz="3000" b="1" dirty="0"/>
+              <a:t>A</a:t>
+            </a:r>
+          </a:p>
+        </p:txBody>
+      </p:sp>
+      <p:cxnSp>
+        <p:nvCxnSpPr>
+          <p:cNvPr id="12" name="Straight Connector 11">
+            <a:extLst>
+              <a:ext uri="{FF2B5EF4-FFF2-40B4-BE49-F238E27FC236}">
+                <a16:creationId xmlns:a16="http://schemas.microsoft.com/office/drawing/2014/main" id="{2B830AEF-75BA-52E1-52FD-FBE7B1AAE510}"/>
+              </a:ext>
+            </a:extLst>
+          </p:cNvPr>
+          <p:cNvCxnSpPr>
+            <a:cxnSpLocks/>
+          </p:cNvCxnSpPr>
+          <p:nvPr/>
+        </p:nvCxnSpPr>
+        <p:spPr>
+          <a:xfrm flipH="1">
+            <a:off x="4286250" y="8115300"/>
+            <a:ext cx="24136350" cy="0"/>
+          </a:xfrm>
+          <a:prstGeom prst="line">
+            <a:avLst/>
+          </a:prstGeom>
+        </p:spPr>
+        <p:style>
+          <a:lnRef idx="2">
+            <a:schemeClr val="dk1"/>
+          </a:lnRef>
+          <a:fillRef idx="0">
+            <a:schemeClr val="dk1"/>
+          </a:fillRef>
+          <a:effectRef idx="1">
+            <a:schemeClr val="dk1"/>
+          </a:effectRef>
+          <a:fontRef idx="minor">
+            <a:schemeClr val="tx1"/>
+          </a:fontRef>
+        </p:style>
+      </p:cxnSp>
+      <p:sp>
+        <p:nvSpPr>
+          <p:cNvPr id="19" name="TextBox 18">
+            <a:extLst>
+              <a:ext uri="{FF2B5EF4-FFF2-40B4-BE49-F238E27FC236}">
+                <a16:creationId xmlns:a16="http://schemas.microsoft.com/office/drawing/2014/main" id="{4EDB4648-7017-A6C6-7E1D-D2DB2A87A8F2}"/>
+              </a:ext>
+            </a:extLst>
+          </p:cNvPr>
+          <p:cNvSpPr txBox="1"/>
+          <p:nvPr/>
+        </p:nvSpPr>
+        <p:spPr>
+          <a:xfrm>
+            <a:off x="16043554" y="7561302"/>
+            <a:ext cx="460994" cy="553998"/>
+          </a:xfrm>
+          <a:prstGeom prst="rect">
+            <a:avLst/>
+          </a:prstGeom>
+          <a:noFill/>
+          <a:ln>
+            <a:solidFill>
+              <a:schemeClr val="tx1"/>
+            </a:solidFill>
+          </a:ln>
+        </p:spPr>
+        <p:txBody>
+          <a:bodyPr wrap="square" rtlCol="0">
+            <a:spAutoFit/>
+          </a:bodyPr>
+          <a:lstStyle/>
+          <a:p>
+            <a:r>
+              <a:rPr lang="en-US" sz="3000" b="1" dirty="0"/>
+              <a:t>B</a:t>
+            </a:r>
+          </a:p>
+        </p:txBody>
+      </p:sp>
+      <p:sp>
+        <p:nvSpPr>
+          <p:cNvPr id="20" name="TextBox 19">
+            <a:extLst>
+              <a:ext uri="{FF2B5EF4-FFF2-40B4-BE49-F238E27FC236}">
+                <a16:creationId xmlns:a16="http://schemas.microsoft.com/office/drawing/2014/main" id="{F5BE9161-6BF8-A748-2D68-A28BD5972FFE}"/>
+              </a:ext>
+            </a:extLst>
+          </p:cNvPr>
+          <p:cNvSpPr txBox="1"/>
+          <p:nvPr/>
+        </p:nvSpPr>
+        <p:spPr>
+          <a:xfrm>
+            <a:off x="15578238" y="8115300"/>
+            <a:ext cx="457176" cy="553998"/>
+          </a:xfrm>
+          <a:prstGeom prst="rect">
+            <a:avLst/>
+          </a:prstGeom>
+          <a:noFill/>
+          <a:ln>
+            <a:solidFill>
+              <a:schemeClr val="tx1"/>
+            </a:solidFill>
+          </a:ln>
+        </p:spPr>
+        <p:txBody>
+          <a:bodyPr wrap="none" rtlCol="0">
+            <a:spAutoFit/>
+          </a:bodyPr>
+          <a:lstStyle/>
+          <a:p>
+            <a:r>
+              <a:rPr lang="en-US" sz="3000" b="1" dirty="0"/>
+              <a:t>C</a:t>
+            </a:r>
+          </a:p>
+        </p:txBody>
+      </p:sp>
+      <p:sp>
+        <p:nvSpPr>
+          <p:cNvPr id="22" name="TextBox 21">
+            <a:extLst>
+              <a:ext uri="{FF2B5EF4-FFF2-40B4-BE49-F238E27FC236}">
+                <a16:creationId xmlns:a16="http://schemas.microsoft.com/office/drawing/2014/main" id="{9834635B-9BA0-017C-A1C8-782F2EAD9EF5}"/>
+              </a:ext>
+            </a:extLst>
+          </p:cNvPr>
+          <p:cNvSpPr txBox="1"/>
+          <p:nvPr/>
+        </p:nvSpPr>
+        <p:spPr>
+          <a:xfrm>
+            <a:off x="16040100" y="8115300"/>
+            <a:ext cx="457176" cy="553998"/>
+          </a:xfrm>
+          <a:prstGeom prst="rect">
+            <a:avLst/>
+          </a:prstGeom>
+          <a:noFill/>
+          <a:ln>
+            <a:solidFill>
+              <a:schemeClr val="tx1"/>
+            </a:solidFill>
+          </a:ln>
+        </p:spPr>
+        <p:txBody>
+          <a:bodyPr wrap="none" rtlCol="0">
+            <a:spAutoFit/>
+          </a:bodyPr>
+          <a:lstStyle/>
+          <a:p>
+            <a:r>
+              <a:rPr lang="en-US" sz="3000" b="1" dirty="0"/>
+              <a:t>D</a:t>
+            </a:r>
+          </a:p>
+        </p:txBody>
+      </p:sp>
+      <p:cxnSp>
+        <p:nvCxnSpPr>
+          <p:cNvPr id="11" name="Straight Connector 10">
+            <a:extLst>
+              <a:ext uri="{FF2B5EF4-FFF2-40B4-BE49-F238E27FC236}">
+                <a16:creationId xmlns:a16="http://schemas.microsoft.com/office/drawing/2014/main" id="{3CEA76C6-D4D9-E1C8-C06D-A27BBD59E58A}"/>
+              </a:ext>
+            </a:extLst>
+          </p:cNvPr>
+          <p:cNvCxnSpPr>
+            <a:cxnSpLocks/>
+          </p:cNvCxnSpPr>
+          <p:nvPr/>
+        </p:nvCxnSpPr>
+        <p:spPr>
+          <a:xfrm>
+            <a:off x="16049532" y="2611079"/>
+            <a:ext cx="2343" cy="11238271"/>
+          </a:xfrm>
+          <a:prstGeom prst="line">
+            <a:avLst/>
+          </a:prstGeom>
+        </p:spPr>
+        <p:style>
+          <a:lnRef idx="2">
+            <a:schemeClr val="dk1"/>
+          </a:lnRef>
+          <a:fillRef idx="0">
+            <a:schemeClr val="dk1"/>
+          </a:fillRef>
+          <a:effectRef idx="1">
+            <a:schemeClr val="dk1"/>
+          </a:effectRef>
+          <a:fontRef idx="minor">
+            <a:schemeClr val="tx1"/>
+          </a:fontRef>
+        </p:style>
+      </p:cxnSp>
+      <p:pic>
+        <p:nvPicPr>
+          <p:cNvPr id="13" name="Picture 12">
+            <a:extLst>
+              <a:ext uri="{FF2B5EF4-FFF2-40B4-BE49-F238E27FC236}">
+                <a16:creationId xmlns:a16="http://schemas.microsoft.com/office/drawing/2014/main" id="{E1667EAB-A9AA-B0DD-6AFC-A2B416E07373}"/>
+              </a:ext>
+            </a:extLst>
+          </p:cNvPr>
+          <p:cNvPicPr>
+            <a:picLocks noChangeAspect="1"/>
+          </p:cNvPicPr>
+          <p:nvPr/>
+        </p:nvPicPr>
+        <p:blipFill>
+          <a:blip r:embed="rId4"/>
+          <a:stretch>
+            <a:fillRect/>
+          </a:stretch>
+        </p:blipFill>
+        <p:spPr>
+          <a:xfrm>
+            <a:off x="4134329" y="5681276"/>
+            <a:ext cx="3789680" cy="2286000"/>
+          </a:xfrm>
+          <a:prstGeom prst="rect">
+            <a:avLst/>
+          </a:prstGeom>
+        </p:spPr>
+      </p:pic>
+      <p:sp>
+        <p:nvSpPr>
+          <p:cNvPr id="3" name="Rectangle 2">
+            <a:extLst>
+              <a:ext uri="{FF2B5EF4-FFF2-40B4-BE49-F238E27FC236}">
+                <a16:creationId xmlns:a16="http://schemas.microsoft.com/office/drawing/2014/main" id="{67B52F69-4C10-0497-109A-07F72E7C7CCB}"/>
+              </a:ext>
+            </a:extLst>
+          </p:cNvPr>
+          <p:cNvSpPr/>
+          <p:nvPr/>
+        </p:nvSpPr>
+        <p:spPr>
+          <a:xfrm>
+            <a:off x="4286250" y="2611079"/>
+            <a:ext cx="24136350" cy="11238271"/>
+          </a:xfrm>
+          <a:prstGeom prst="rect">
+            <a:avLst/>
+          </a:prstGeom>
+          <a:noFill/>
+        </p:spPr>
+        <p:style>
+          <a:lnRef idx="2">
+            <a:schemeClr val="accent1">
+              <a:shade val="15000"/>
+            </a:schemeClr>
+          </a:lnRef>
+          <a:fillRef idx="1">
+            <a:schemeClr val="accent1"/>
+          </a:fillRef>
+          <a:effectRef idx="0">
+            <a:schemeClr val="accent1"/>
+          </a:effectRef>
+          <a:fontRef idx="minor">
+            <a:schemeClr val="lt1"/>
+          </a:fontRef>
+        </p:style>
+        <p:txBody>
+          <a:bodyPr rtlCol="0" anchor="ctr"/>
+          <a:lstStyle/>
+          <a:p>
+            <a:pPr algn="ctr"/>
+            <a:endParaRPr lang="en-US" sz="10845"/>
+          </a:p>
+        </p:txBody>
+      </p:sp>
     </p:spTree>
     <p:extLst>
       <p:ext uri="{BB962C8B-B14F-4D97-AF65-F5344CB8AC3E}">
-        <p14:creationId xmlns:p14="http://schemas.microsoft.com/office/powerpoint/2010/main" val="3871675941"/>
+        <p14:creationId xmlns:p14="http://schemas.microsoft.com/office/powerpoint/2010/main" val="2877956565"/>
       </p:ext>
     </p:extLst>
   </p:cSld>
